--- a/course_materials/weeks/week_09/week_09_nosql_models_json.pptx
+++ b/course_materials/weeks/week_09/week_09_nosql_models_json.pptx
@@ -2,44 +2,44 @@
 <file path=ppt/presentation.xml><?xml version="1.0" encoding="utf-8"?>
 <p:presentation xmlns:p="http://schemas.openxmlformats.org/presentationml/2006/main">
   <p:sldMasterIdLst>
-    <p:sldMasterId xmlns:r="http://schemas.openxmlformats.org/officeDocument/2006/relationships" id="2147483648" r:id="Ra07f219ac0d74f33"/>
+    <p:sldMasterId xmlns:r="http://schemas.openxmlformats.org/officeDocument/2006/relationships" id="2147483648" r:id="R4c160fabd2fa4192"/>
   </p:sldMasterIdLst>
   <p:notesMasterIdLst>
-    <p:notesMasterId xmlns:r="http://schemas.openxmlformats.org/officeDocument/2006/relationships" r:id="R71a72a5cd47c4eb4"/>
+    <p:notesMasterId xmlns:r="http://schemas.openxmlformats.org/officeDocument/2006/relationships" r:id="R32962441d966471d"/>
   </p:notesMasterIdLst>
   <p:sldIdLst>
-    <p:sldId xmlns:r="http://schemas.openxmlformats.org/officeDocument/2006/relationships" id="256" r:id="R6cd0886290d04b06"/>
-    <p:sldId xmlns:r="http://schemas.openxmlformats.org/officeDocument/2006/relationships" id="257" r:id="Re2d9259ba671411c"/>
-    <p:sldId xmlns:r="http://schemas.openxmlformats.org/officeDocument/2006/relationships" id="258" r:id="R08eb912ab7dc4b67"/>
-    <p:sldId xmlns:r="http://schemas.openxmlformats.org/officeDocument/2006/relationships" id="259" r:id="R487a3606090f412d"/>
-    <p:sldId xmlns:r="http://schemas.openxmlformats.org/officeDocument/2006/relationships" id="260" r:id="R4e0d7e00c78f4185"/>
-    <p:sldId xmlns:r="http://schemas.openxmlformats.org/officeDocument/2006/relationships" id="261" r:id="R065b058f6ea04a58"/>
-    <p:sldId xmlns:r="http://schemas.openxmlformats.org/officeDocument/2006/relationships" id="262" r:id="Rcb196a642c9f44f1"/>
-    <p:sldId xmlns:r="http://schemas.openxmlformats.org/officeDocument/2006/relationships" id="263" r:id="Rc792fce79d6940e3"/>
-    <p:sldId xmlns:r="http://schemas.openxmlformats.org/officeDocument/2006/relationships" id="264" r:id="R01a15680c81f4ff0"/>
-    <p:sldId xmlns:r="http://schemas.openxmlformats.org/officeDocument/2006/relationships" id="265" r:id="R41ff318f7ea84ba7"/>
-    <p:sldId xmlns:r="http://schemas.openxmlformats.org/officeDocument/2006/relationships" id="266" r:id="R5f98613702604968"/>
-    <p:sldId xmlns:r="http://schemas.openxmlformats.org/officeDocument/2006/relationships" id="267" r:id="R445dee0c56de4210"/>
-    <p:sldId xmlns:r="http://schemas.openxmlformats.org/officeDocument/2006/relationships" id="268" r:id="R4422563b38b94736"/>
-    <p:sldId xmlns:r="http://schemas.openxmlformats.org/officeDocument/2006/relationships" id="269" r:id="Rd0fa0b32a0db4220"/>
-    <p:sldId xmlns:r="http://schemas.openxmlformats.org/officeDocument/2006/relationships" id="270" r:id="R386b12d89b264dca"/>
-    <p:sldId xmlns:r="http://schemas.openxmlformats.org/officeDocument/2006/relationships" id="271" r:id="R586a9045cf734417"/>
-    <p:sldId xmlns:r="http://schemas.openxmlformats.org/officeDocument/2006/relationships" id="272" r:id="Rc99894bd4ec74ee6"/>
-    <p:sldId xmlns:r="http://schemas.openxmlformats.org/officeDocument/2006/relationships" id="273" r:id="R2c5f066502894ad9"/>
-    <p:sldId xmlns:r="http://schemas.openxmlformats.org/officeDocument/2006/relationships" id="274" r:id="Rc0ac7cb7ca194a7f"/>
-    <p:sldId xmlns:r="http://schemas.openxmlformats.org/officeDocument/2006/relationships" id="275" r:id="Rd0b346ffc6ce46eb"/>
-    <p:sldId xmlns:r="http://schemas.openxmlformats.org/officeDocument/2006/relationships" id="276" r:id="R40dcfef4bff6409f"/>
-    <p:sldId xmlns:r="http://schemas.openxmlformats.org/officeDocument/2006/relationships" id="277" r:id="R2653b0255abd4712"/>
-    <p:sldId xmlns:r="http://schemas.openxmlformats.org/officeDocument/2006/relationships" id="278" r:id="R756bf83a68154209"/>
-    <p:sldId xmlns:r="http://schemas.openxmlformats.org/officeDocument/2006/relationships" id="279" r:id="R527b11d054464eab"/>
-    <p:sldId xmlns:r="http://schemas.openxmlformats.org/officeDocument/2006/relationships" id="280" r:id="Rd765f75c431f4be8"/>
-    <p:sldId xmlns:r="http://schemas.openxmlformats.org/officeDocument/2006/relationships" id="281" r:id="R78642446101e42f8"/>
-    <p:sldId xmlns:r="http://schemas.openxmlformats.org/officeDocument/2006/relationships" id="282" r:id="R2866e62d24ee4a84"/>
-    <p:sldId xmlns:r="http://schemas.openxmlformats.org/officeDocument/2006/relationships" id="283" r:id="Rf9799dde32c743e3"/>
-    <p:sldId xmlns:r="http://schemas.openxmlformats.org/officeDocument/2006/relationships" id="284" r:id="R603cf8e25d2f41c3"/>
-    <p:sldId xmlns:r="http://schemas.openxmlformats.org/officeDocument/2006/relationships" id="285" r:id="Rd9bd57f356554a13"/>
-    <p:sldId xmlns:r="http://schemas.openxmlformats.org/officeDocument/2006/relationships" id="286" r:id="R11dc5f80ea814f33"/>
-    <p:sldId xmlns:r="http://schemas.openxmlformats.org/officeDocument/2006/relationships" id="287" r:id="R7fb0ce77f0614586"/>
+    <p:sldId xmlns:r="http://schemas.openxmlformats.org/officeDocument/2006/relationships" id="256" r:id="R0d253a5994cd442b"/>
+    <p:sldId xmlns:r="http://schemas.openxmlformats.org/officeDocument/2006/relationships" id="257" r:id="R255cc1f6cd3c4941"/>
+    <p:sldId xmlns:r="http://schemas.openxmlformats.org/officeDocument/2006/relationships" id="258" r:id="Rf7b4130b6e8d4eee"/>
+    <p:sldId xmlns:r="http://schemas.openxmlformats.org/officeDocument/2006/relationships" id="259" r:id="R3081c156811f4bdc"/>
+    <p:sldId xmlns:r="http://schemas.openxmlformats.org/officeDocument/2006/relationships" id="260" r:id="Ra451c654c8064baa"/>
+    <p:sldId xmlns:r="http://schemas.openxmlformats.org/officeDocument/2006/relationships" id="261" r:id="R4b8a2aba93554509"/>
+    <p:sldId xmlns:r="http://schemas.openxmlformats.org/officeDocument/2006/relationships" id="262" r:id="R053e7a8c70f0497a"/>
+    <p:sldId xmlns:r="http://schemas.openxmlformats.org/officeDocument/2006/relationships" id="263" r:id="R9cbe8a7f422f41c4"/>
+    <p:sldId xmlns:r="http://schemas.openxmlformats.org/officeDocument/2006/relationships" id="264" r:id="R8a59096ccffc4f58"/>
+    <p:sldId xmlns:r="http://schemas.openxmlformats.org/officeDocument/2006/relationships" id="265" r:id="Rf69d2997fa974c7b"/>
+    <p:sldId xmlns:r="http://schemas.openxmlformats.org/officeDocument/2006/relationships" id="266" r:id="Radbed4a5d01047f9"/>
+    <p:sldId xmlns:r="http://schemas.openxmlformats.org/officeDocument/2006/relationships" id="267" r:id="R4339eefb554d49b9"/>
+    <p:sldId xmlns:r="http://schemas.openxmlformats.org/officeDocument/2006/relationships" id="268" r:id="R42549ca6e57d4c4d"/>
+    <p:sldId xmlns:r="http://schemas.openxmlformats.org/officeDocument/2006/relationships" id="269" r:id="R14867e13cc494980"/>
+    <p:sldId xmlns:r="http://schemas.openxmlformats.org/officeDocument/2006/relationships" id="270" r:id="R6934d5f1681f4738"/>
+    <p:sldId xmlns:r="http://schemas.openxmlformats.org/officeDocument/2006/relationships" id="271" r:id="R8cf5e206cb5b471a"/>
+    <p:sldId xmlns:r="http://schemas.openxmlformats.org/officeDocument/2006/relationships" id="272" r:id="Rf80ed976339c4033"/>
+    <p:sldId xmlns:r="http://schemas.openxmlformats.org/officeDocument/2006/relationships" id="273" r:id="Rc477a4c52c95480f"/>
+    <p:sldId xmlns:r="http://schemas.openxmlformats.org/officeDocument/2006/relationships" id="274" r:id="Ra789e9c9afbb460a"/>
+    <p:sldId xmlns:r="http://schemas.openxmlformats.org/officeDocument/2006/relationships" id="275" r:id="Re1f56831d4ad4b3c"/>
+    <p:sldId xmlns:r="http://schemas.openxmlformats.org/officeDocument/2006/relationships" id="276" r:id="Rbf3b0b760c264711"/>
+    <p:sldId xmlns:r="http://schemas.openxmlformats.org/officeDocument/2006/relationships" id="277" r:id="Rd465cdfbfc3947e2"/>
+    <p:sldId xmlns:r="http://schemas.openxmlformats.org/officeDocument/2006/relationships" id="278" r:id="R4ab10e115de74602"/>
+    <p:sldId xmlns:r="http://schemas.openxmlformats.org/officeDocument/2006/relationships" id="279" r:id="R5cc5ac90f8804a0a"/>
+    <p:sldId xmlns:r="http://schemas.openxmlformats.org/officeDocument/2006/relationships" id="280" r:id="Ra88642d1f4b64a7e"/>
+    <p:sldId xmlns:r="http://schemas.openxmlformats.org/officeDocument/2006/relationships" id="281" r:id="R6a06309bc2d446b9"/>
+    <p:sldId xmlns:r="http://schemas.openxmlformats.org/officeDocument/2006/relationships" id="282" r:id="R8a225bdadaf948b3"/>
+    <p:sldId xmlns:r="http://schemas.openxmlformats.org/officeDocument/2006/relationships" id="283" r:id="R64d4a03130ff409a"/>
+    <p:sldId xmlns:r="http://schemas.openxmlformats.org/officeDocument/2006/relationships" id="284" r:id="R7c88ada346d84c66"/>
+    <p:sldId xmlns:r="http://schemas.openxmlformats.org/officeDocument/2006/relationships" id="285" r:id="R0e9e2a4f0b314cd1"/>
+    <p:sldId xmlns:r="http://schemas.openxmlformats.org/officeDocument/2006/relationships" id="286" r:id="Rcce87f6dd0d74f3d"/>
+    <p:sldId xmlns:r="http://schemas.openxmlformats.org/officeDocument/2006/relationships" id="287" r:id="R1e29e782c0344c09"/>
   </p:sldIdLst>
   <p:sldSz cx="12192000" cy="6858000"/>
   <p:notesSz cx="6858000" cy="9144000"/>
@@ -3418,7 +3418,7 @@
           </a:p>
           <a:p xmlns:a="http://schemas.openxmlformats.org/drawingml/2006/main">
             <a:r>
-              <a:t>Below the examples, write a short paragraph explaining how the page finds the requester and events. Then consider a changed requester name and years of additional events. Choose a sensible shape for a page that shows only the five latest events while retaining the complete history. More than one design can satisfy that requirement, provided the meaning and growth rule are clear.</a:t>
+              <a:t>Below the examples, write a short paragraph explaining how the page finds the requester and events. Then consider a changed requester name and years of additional events. For this lab, keep the three supplied events in both designs and describe what becomes harder as the data changes or grows. You do not need to solve that growth problem yet. Next week we will add a page that shows only its latest two events while retaining all history and maintaining contact details in one place. That will be a new workload to design for, using the JSON foundations you are practicing now.</a:t>
             </a:r>
           </a:p>
           <a:p xmlns:a="http://schemas.openxmlformats.org/drawingml/2006/main">
@@ -4346,7 +4346,7 @@
   </p:cSld>
   <p:clrMap bg1="lt1" tx1="dk1" bg2="lt2" tx2="dk2" accent1="accent1" accent2="accent2" accent3="accent3" accent4="accent4" accent5="accent5" accent6="accent6" hlink="hlink" folHlink="folHlink"/>
   <p:sldLayoutIdLst>
-    <p:sldLayoutId xmlns:r="http://schemas.openxmlformats.org/officeDocument/2006/relationships" id="2147483649" r:id="Rca58e96ed5ad47d6"/>
+    <p:sldLayoutId xmlns:r="http://schemas.openxmlformats.org/officeDocument/2006/relationships" id="2147483649" r:id="R84646dcde5c8451b"/>
   </p:sldLayoutIdLst>
   <p:txStyles>
     <p:titleStyle>
@@ -4897,7 +4897,7 @@
           <p:cNvPr id="7" name="eyebrow">
             <a:extLst xmlns:a="http://schemas.openxmlformats.org/drawingml/2006/main">
               <a:ext uri="{FF2B5EF4-FFF2-40B4-BE49-F238E27FC236}">
-                <a16:creationId xmlns:a16="http://schemas.microsoft.com/office/drawing/2014/main" id="{2D232B50-5E3B-4822-913F-14A4B0EE22AF}"/>
+                <a16:creationId xmlns:a16="http://schemas.microsoft.com/office/drawing/2014/main" id="{21D31B6A-32EF-4AEA-B9DE-56B195DB9D44}"/>
               </a:ext>
             </a:extLst>
           </p:cNvPr>
@@ -4954,7 +4954,7 @@
           <p:cNvPr id="2" name="slide-title">
             <a:extLst xmlns:a="http://schemas.openxmlformats.org/drawingml/2006/main">
               <a:ext uri="{FF2B5EF4-FFF2-40B4-BE49-F238E27FC236}">
-                <a16:creationId xmlns:a16="http://schemas.microsoft.com/office/drawing/2014/main" id="{5324F29F-3B97-415B-835E-8ED1F523BB43}"/>
+                <a16:creationId xmlns:a16="http://schemas.microsoft.com/office/drawing/2014/main" id="{16CDC525-0BEB-4C41-BEA8-FAF65C9E08A6}"/>
               </a:ext>
             </a:extLst>
           </p:cNvPr>
@@ -5011,7 +5011,7 @@
           <p:cNvPr id="3" name="">
             <a:extLst xmlns:a="http://schemas.openxmlformats.org/drawingml/2006/main">
               <a:ext uri="{FF2B5EF4-FFF2-40B4-BE49-F238E27FC236}">
-                <a16:creationId xmlns:a16="http://schemas.microsoft.com/office/drawing/2014/main" id="{7C01BD66-CE7F-45CD-B782-F082F844C268}"/>
+                <a16:creationId xmlns:a16="http://schemas.microsoft.com/office/drawing/2014/main" id="{0E775A32-6117-458C-BC8F-2CDCCB7D31B2}"/>
               </a:ext>
             </a:extLst>
           </p:cNvPr>
@@ -5043,7 +5043,7 @@
           <p:cNvPr id="4" name="slide-number">
             <a:extLst xmlns:a="http://schemas.openxmlformats.org/drawingml/2006/main">
               <a:ext uri="{FF2B5EF4-FFF2-40B4-BE49-F238E27FC236}">
-                <a16:creationId xmlns:a16="http://schemas.microsoft.com/office/drawing/2014/main" id="{7B4EFB57-AF8A-4849-878B-4A06D2CF744F}"/>
+                <a16:creationId xmlns:a16="http://schemas.microsoft.com/office/drawing/2014/main" id="{BD730E10-F691-4299-9167-C221269C5578}"/>
               </a:ext>
             </a:extLst>
           </p:cNvPr>
@@ -5100,7 +5100,7 @@
           <p:cNvPr id="5" name="opening">
             <a:extLst xmlns:a="http://schemas.openxmlformats.org/drawingml/2006/main">
               <a:ext uri="{FF2B5EF4-FFF2-40B4-BE49-F238E27FC236}">
-                <a16:creationId xmlns:a16="http://schemas.microsoft.com/office/drawing/2014/main" id="{BEF2D559-CA7F-44A9-AEDB-477141D2A20E}"/>
+                <a16:creationId xmlns:a16="http://schemas.microsoft.com/office/drawing/2014/main" id="{C59DDDF7-B153-4FAC-AEDF-540011B5CC43}"/>
               </a:ext>
             </a:extLst>
           </p:cNvPr>
@@ -5180,7 +5180,7 @@
           <p:cNvPr id="6" name="arc">
             <a:extLst xmlns:a="http://schemas.openxmlformats.org/drawingml/2006/main">
               <a:ext uri="{FF2B5EF4-FFF2-40B4-BE49-F238E27FC236}">
-                <a16:creationId xmlns:a16="http://schemas.microsoft.com/office/drawing/2014/main" id="{AE3D8CD1-97E4-4233-B2E0-1B1415B8F5AA}"/>
+                <a16:creationId xmlns:a16="http://schemas.microsoft.com/office/drawing/2014/main" id="{863881CD-2E8D-4D1E-8B45-F3BF70CA2A7A}"/>
               </a:ext>
             </a:extLst>
           </p:cNvPr>
@@ -5289,7 +5289,7 @@
           <p:cNvPr id="16" name="eyebrow">
             <a:extLst xmlns:a="http://schemas.openxmlformats.org/drawingml/2006/main">
               <a:ext uri="{FF2B5EF4-FFF2-40B4-BE49-F238E27FC236}">
-                <a16:creationId xmlns:a16="http://schemas.microsoft.com/office/drawing/2014/main" id="{319FBC5F-C257-41A3-8AC9-A92B0CBC6834}"/>
+                <a16:creationId xmlns:a16="http://schemas.microsoft.com/office/drawing/2014/main" id="{FC9E1A3F-8BA0-4E34-9BA9-D2955F56773B}"/>
               </a:ext>
             </a:extLst>
           </p:cNvPr>
@@ -5346,7 +5346,7 @@
           <p:cNvPr id="2" name="slide-title">
             <a:extLst xmlns:a="http://schemas.openxmlformats.org/drawingml/2006/main">
               <a:ext uri="{FF2B5EF4-FFF2-40B4-BE49-F238E27FC236}">
-                <a16:creationId xmlns:a16="http://schemas.microsoft.com/office/drawing/2014/main" id="{CE08F58B-17B8-4D83-80A9-5DE79FD4E2C0}"/>
+                <a16:creationId xmlns:a16="http://schemas.microsoft.com/office/drawing/2014/main" id="{E1D479C1-DC06-482A-A0A6-C7F11AFBD97B}"/>
               </a:ext>
             </a:extLst>
           </p:cNvPr>
@@ -5403,7 +5403,7 @@
           <p:cNvPr id="3" name="">
             <a:extLst xmlns:a="http://schemas.openxmlformats.org/drawingml/2006/main">
               <a:ext uri="{FF2B5EF4-FFF2-40B4-BE49-F238E27FC236}">
-                <a16:creationId xmlns:a16="http://schemas.microsoft.com/office/drawing/2014/main" id="{B2C04353-5E80-47A9-9F60-82379CDE0C66}"/>
+                <a16:creationId xmlns:a16="http://schemas.microsoft.com/office/drawing/2014/main" id="{CA6D9550-3517-4705-AF4A-9CEF6B1475C5}"/>
               </a:ext>
             </a:extLst>
           </p:cNvPr>
@@ -5435,7 +5435,7 @@
           <p:cNvPr id="4" name="slide-number">
             <a:extLst xmlns:a="http://schemas.openxmlformats.org/drawingml/2006/main">
               <a:ext uri="{FF2B5EF4-FFF2-40B4-BE49-F238E27FC236}">
-                <a16:creationId xmlns:a16="http://schemas.microsoft.com/office/drawing/2014/main" id="{D77A2EE1-F452-4F85-8316-7AECCCC798DF}"/>
+                <a16:creationId xmlns:a16="http://schemas.microsoft.com/office/drawing/2014/main" id="{8F1C2915-5FB2-47EE-BE07-74CA43A04DB8}"/>
               </a:ext>
             </a:extLst>
           </p:cNvPr>
@@ -5492,7 +5492,7 @@
           <p:cNvPr id="5" name="">
             <a:extLst xmlns:a="http://schemas.openxmlformats.org/drawingml/2006/main">
               <a:ext uri="{FF2B5EF4-FFF2-40B4-BE49-F238E27FC236}">
-                <a16:creationId xmlns:a16="http://schemas.microsoft.com/office/drawing/2014/main" id="{F3777B15-63E4-4AB8-B970-5DFC8D37466D}"/>
+                <a16:creationId xmlns:a16="http://schemas.microsoft.com/office/drawing/2014/main" id="{AF4C1E5E-74F5-44F7-9A83-9B52B13EB9C0}"/>
               </a:ext>
             </a:extLst>
           </p:cNvPr>
@@ -5524,7 +5524,7 @@
           <p:cNvPr id="6" name="node-Incident text">
             <a:extLst xmlns:a="http://schemas.openxmlformats.org/drawingml/2006/main">
               <a:ext uri="{FF2B5EF4-FFF2-40B4-BE49-F238E27FC236}">
-                <a16:creationId xmlns:a16="http://schemas.microsoft.com/office/drawing/2014/main" id="{2A7EA769-27CC-429C-B38A-443AEC5A61B7}"/>
+                <a16:creationId xmlns:a16="http://schemas.microsoft.com/office/drawing/2014/main" id="{AFFD3057-A157-4591-A8A2-08DCCCC8ACC5}"/>
               </a:ext>
             </a:extLst>
           </p:cNvPr>
@@ -5581,7 +5581,7 @@
           <p:cNvPr id="7" name="">
             <a:extLst xmlns:a="http://schemas.openxmlformats.org/drawingml/2006/main">
               <a:ext uri="{FF2B5EF4-FFF2-40B4-BE49-F238E27FC236}">
-                <a16:creationId xmlns:a16="http://schemas.microsoft.com/office/drawing/2014/main" id="{5BBC1A96-0786-417B-931F-0EF409074827}"/>
+                <a16:creationId xmlns:a16="http://schemas.microsoft.com/office/drawing/2014/main" id="{47C66BBF-C35A-4C94-ACD2-215CF0FC52C0}"/>
               </a:ext>
             </a:extLst>
           </p:cNvPr>
@@ -5613,7 +5613,7 @@
           <p:cNvPr id="8" name="">
             <a:extLst xmlns:a="http://schemas.openxmlformats.org/drawingml/2006/main">
               <a:ext uri="{FF2B5EF4-FFF2-40B4-BE49-F238E27FC236}">
-                <a16:creationId xmlns:a16="http://schemas.microsoft.com/office/drawing/2014/main" id="{8A2BBEA8-B45E-4C6D-87E9-EFEC589499D9}"/>
+                <a16:creationId xmlns:a16="http://schemas.microsoft.com/office/drawing/2014/main" id="{A18F7B7B-0A8A-40C8-892D-BE05FC564DDB}"/>
               </a:ext>
             </a:extLst>
           </p:cNvPr>
@@ -5645,7 +5645,7 @@
           <p:cNvPr id="9" name="node-Embedding model">
             <a:extLst xmlns:a="http://schemas.openxmlformats.org/drawingml/2006/main">
               <a:ext uri="{FF2B5EF4-FFF2-40B4-BE49-F238E27FC236}">
-                <a16:creationId xmlns:a16="http://schemas.microsoft.com/office/drawing/2014/main" id="{41BF37BE-E472-4D6C-BE65-420C333A35C8}"/>
+                <a16:creationId xmlns:a16="http://schemas.microsoft.com/office/drawing/2014/main" id="{00C06A22-4293-4248-ABD4-72CB9A3B8D2E}"/>
               </a:ext>
             </a:extLst>
           </p:cNvPr>
@@ -5702,7 +5702,7 @@
           <p:cNvPr id="10" name="">
             <a:extLst xmlns:a="http://schemas.openxmlformats.org/drawingml/2006/main">
               <a:ext uri="{FF2B5EF4-FFF2-40B4-BE49-F238E27FC236}">
-                <a16:creationId xmlns:a16="http://schemas.microsoft.com/office/drawing/2014/main" id="{895011D9-048C-44CF-A83B-276CA1E44B88}"/>
+                <a16:creationId xmlns:a16="http://schemas.microsoft.com/office/drawing/2014/main" id="{9D83E654-0212-4D5D-92E7-4D0D5253EF58}"/>
               </a:ext>
             </a:extLst>
           </p:cNvPr>
@@ -5734,7 +5734,7 @@
           <p:cNvPr id="11" name="">
             <a:extLst xmlns:a="http://schemas.openxmlformats.org/drawingml/2006/main">
               <a:ext uri="{FF2B5EF4-FFF2-40B4-BE49-F238E27FC236}">
-                <a16:creationId xmlns:a16="http://schemas.microsoft.com/office/drawing/2014/main" id="{54F8D55A-3FF6-44F7-BDAD-37CD32A0FA96}"/>
+                <a16:creationId xmlns:a16="http://schemas.microsoft.com/office/drawing/2014/main" id="{B38CC431-7C8D-4E6A-85A8-58DD00247FD0}"/>
               </a:ext>
             </a:extLst>
           </p:cNvPr>
@@ -5766,7 +5766,7 @@
           <p:cNvPr id="12" name="node-Numeric vector">
             <a:extLst xmlns:a="http://schemas.openxmlformats.org/drawingml/2006/main">
               <a:ext uri="{FF2B5EF4-FFF2-40B4-BE49-F238E27FC236}">
-                <a16:creationId xmlns:a16="http://schemas.microsoft.com/office/drawing/2014/main" id="{6681916E-7356-4F3C-AC19-56BDB346F058}"/>
+                <a16:creationId xmlns:a16="http://schemas.microsoft.com/office/drawing/2014/main" id="{9A9F1B07-78C3-446B-A2F6-F8DDA9914D05}"/>
               </a:ext>
             </a:extLst>
           </p:cNvPr>
@@ -5823,7 +5823,7 @@
           <p:cNvPr id="13" name="embedding-example">
             <a:extLst xmlns:a="http://schemas.openxmlformats.org/drawingml/2006/main">
               <a:ext uri="{FF2B5EF4-FFF2-40B4-BE49-F238E27FC236}">
-                <a16:creationId xmlns:a16="http://schemas.microsoft.com/office/drawing/2014/main" id="{E062BFB5-A755-4E73-ADED-BB22D732AF8A}"/>
+                <a16:creationId xmlns:a16="http://schemas.microsoft.com/office/drawing/2014/main" id="{D4D500EF-5AA6-4D24-A00D-1D0E5ED6C781}"/>
               </a:ext>
             </a:extLst>
           </p:cNvPr>
@@ -5903,7 +5903,7 @@
           <p:cNvPr id="14" name="embedding-meaning">
             <a:extLst xmlns:a="http://schemas.openxmlformats.org/drawingml/2006/main">
               <a:ext uri="{FF2B5EF4-FFF2-40B4-BE49-F238E27FC236}">
-                <a16:creationId xmlns:a16="http://schemas.microsoft.com/office/drawing/2014/main" id="{FF818930-E0E7-4D86-B20B-30455A630265}"/>
+                <a16:creationId xmlns:a16="http://schemas.microsoft.com/office/drawing/2014/main" id="{A23F1824-4D3F-494F-B3DF-5E2BD4F64AAA}"/>
               </a:ext>
             </a:extLst>
           </p:cNvPr>
@@ -5983,7 +5983,7 @@
           <p:cNvPr id="15" name="embedding-limit">
             <a:extLst xmlns:a="http://schemas.openxmlformats.org/drawingml/2006/main">
               <a:ext uri="{FF2B5EF4-FFF2-40B4-BE49-F238E27FC236}">
-                <a16:creationId xmlns:a16="http://schemas.microsoft.com/office/drawing/2014/main" id="{F77BD2C3-3012-4BAF-8F13-9045D2E7AC0A}"/>
+                <a16:creationId xmlns:a16="http://schemas.microsoft.com/office/drawing/2014/main" id="{B4EDD3ED-02C4-4AA9-8D2A-0C26C28FDD09}"/>
               </a:ext>
             </a:extLst>
           </p:cNvPr>
@@ -6046,337 +6046,337 @@
 </file>
 
 <file path=ppt/slides/slide11.xml><?xml version="1.0" encoding="utf-8"?>
-<p:sld xmlns:p="http://schemas.openxmlformats.org/presentationml/2006/main">
-  <p:cSld>
-    <p:bg>
-      <p:bgPr>
-        <a:solidFill xmlns:a="http://schemas.openxmlformats.org/drawingml/2006/main">
-          <a:srgbClr val="FCFCFA"/>
-        </a:solidFill>
-      </p:bgPr>
-    </p:bg>
-    <p:spTree>
-      <p:nvGrpSpPr>
-        <p:cNvPr id="1" name=""/>
-        <p:cNvGrpSpPr/>
-        <p:nvPr/>
-      </p:nvGrpSpPr>
-      <p:grpSpPr>
-        <a:xfrm xmlns:a="http://schemas.openxmlformats.org/drawingml/2006/main"/>
-      </p:grpSpPr>
-      <p:pic>
-        <p:nvPicPr>
-          <p:cNvPr id="14" name=""/>
-          <p:cNvPicPr>
-            <a:picLocks xmlns:a="http://schemas.openxmlformats.org/drawingml/2006/main" noChangeAspect="1"/>
-          </p:cNvPicPr>
-          <p:nvPr/>
-        </p:nvPicPr>
-        <p:blipFill>
-          <a:blip xmlns:r="http://schemas.openxmlformats.org/officeDocument/2006/relationships" xmlns:a="http://schemas.openxmlformats.org/drawingml/2006/main" r:embed="R933f1a713b4c4725"/>
-          <a:stretch xmlns:a="http://schemas.openxmlformats.org/drawingml/2006/main"/>
-        </p:blipFill>
-        <p:spPr>
-          <a:xfrm xmlns:a="http://schemas.openxmlformats.org/drawingml/2006/main">
-            <a:off x="2235868" y="1647825"/>
-            <a:ext cx="7720263" cy="4191000"/>
-          </a:xfrm>
-          <a:prstGeom xmlns:a="http://schemas.openxmlformats.org/drawingml/2006/main" prst="rect">
-            <a:avLst/>
-          </a:prstGeom>
-        </p:spPr>
-      </p:pic>
-      <p:sp>
-        <p:nvSpPr>
-          <p:cNvPr id="9" name="eyebrow">
-            <a:extLst xmlns:a="http://schemas.openxmlformats.org/drawingml/2006/main">
-              <a:ext uri="{FF2B5EF4-FFF2-40B4-BE49-F238E27FC236}">
-                <a16:creationId xmlns:a16="http://schemas.microsoft.com/office/drawing/2014/main" id="{4539B5DB-FB59-4995-8E50-1C72E8013CF9}"/>
-              </a:ext>
-            </a:extLst>
-          </p:cNvPr>
-          <p:cNvSpPr>
-            <a:spLocks xmlns:a="http://schemas.openxmlformats.org/drawingml/2006/main" noGrp="1"/>
-          </p:cNvSpPr>
-          <p:nvPr/>
-        </p:nvSpPr>
-        <p:spPr>
-          <a:xfrm xmlns:a="http://schemas.openxmlformats.org/drawingml/2006/main">
-            <a:off x="609600" y="295275"/>
-            <a:ext cx="5715000" cy="228600"/>
-          </a:xfrm>
-          <a:prstGeom xmlns:a="http://schemas.openxmlformats.org/drawingml/2006/main" prst="rect">
-            <a:avLst/>
-          </a:prstGeom>
-          <a:noFill xmlns:a="http://schemas.openxmlformats.org/drawingml/2006/main"/>
-          <a:ln xmlns:a="http://schemas.openxmlformats.org/drawingml/2006/main" w="0">
-            <a:noFill/>
-          </a:ln>
-        </p:spPr>
-        <p:txBody>
-          <a:bodyPr xmlns:a="http://schemas.openxmlformats.org/drawingml/2006/main" wrap="square" lIns="0" tIns="0" rIns="0" bIns="0" anchor="t">
-            <a:noAutofit/>
-          </a:bodyPr>
-          <a:lstStyle xmlns:a="http://schemas.openxmlformats.org/drawingml/2006/main"/>
-          <a:p xmlns:a="http://schemas.openxmlformats.org/drawingml/2006/main">
-            <a:pPr>
-              <a:defRPr sz="1050" b="1">
-                <a:solidFill>
-                  <a:srgbClr val="214AE8"/>
-                </a:solidFill>
-                <a:latin typeface="Helvetica Neue"/>
-                <a:ea typeface="Helvetica Neue"/>
-                <a:cs typeface="Helvetica Neue"/>
-              </a:defRPr>
-            </a:pPr>
-            <a:r>
-              <a:rPr sz="1050" b="1">
-                <a:solidFill>
-                  <a:srgbClr val="214AE8"/>
-                </a:solidFill>
-                <a:latin typeface="Helvetica Neue"/>
-                <a:ea typeface="Helvetica Neue"/>
-                <a:cs typeface="Helvetica Neue"/>
-              </a:rPr>
-              <a:t>WEEK 09  /  CST4714</a:t>
-            </a:r>
-          </a:p>
-        </p:txBody>
-      </p:sp>
-      <p:sp>
-        <p:nvSpPr>
-          <p:cNvPr id="10" name="slide-title">
-            <a:extLst xmlns:a="http://schemas.openxmlformats.org/drawingml/2006/main">
-              <a:ext uri="{FF2B5EF4-FFF2-40B4-BE49-F238E27FC236}">
-                <a16:creationId xmlns:a16="http://schemas.microsoft.com/office/drawing/2014/main" id="{3B5F7C9C-B251-4A44-90D2-6C1B8402046B}"/>
-              </a:ext>
-            </a:extLst>
-          </p:cNvPr>
-          <p:cNvSpPr>
-            <a:spLocks xmlns:a="http://schemas.openxmlformats.org/drawingml/2006/main" noGrp="1"/>
-          </p:cNvSpPr>
-          <p:nvPr/>
-        </p:nvSpPr>
-        <p:spPr>
-          <a:xfrm xmlns:a="http://schemas.openxmlformats.org/drawingml/2006/main">
-            <a:off x="609600" y="619125"/>
-            <a:ext cx="10972800" cy="628650"/>
-          </a:xfrm>
-          <a:prstGeom xmlns:a="http://schemas.openxmlformats.org/drawingml/2006/main" prst="rect">
-            <a:avLst/>
-          </a:prstGeom>
-          <a:noFill xmlns:a="http://schemas.openxmlformats.org/drawingml/2006/main"/>
-          <a:ln xmlns:a="http://schemas.openxmlformats.org/drawingml/2006/main" w="0">
-            <a:noFill/>
-          </a:ln>
-        </p:spPr>
-        <p:txBody>
-          <a:bodyPr xmlns:a="http://schemas.openxmlformats.org/drawingml/2006/main" wrap="square" lIns="0" tIns="0" rIns="0" bIns="0" anchor="t">
-            <a:noAutofit/>
-          </a:bodyPr>
-          <a:lstStyle xmlns:a="http://schemas.openxmlformats.org/drawingml/2006/main"/>
-          <a:p xmlns:a="http://schemas.openxmlformats.org/drawingml/2006/main">
-            <a:pPr>
-              <a:defRPr sz="2775" b="1">
-                <a:solidFill>
-                  <a:srgbClr val="111827"/>
-                </a:solidFill>
-                <a:latin typeface="Helvetica Neue"/>
-                <a:ea typeface="Helvetica Neue"/>
-                <a:cs typeface="Helvetica Neue"/>
-              </a:defRPr>
-            </a:pPr>
-            <a:r>
-              <a:rPr sz="2775" b="1">
-                <a:solidFill>
-                  <a:srgbClr val="111827"/>
-                </a:solidFill>
-                <a:latin typeface="Helvetica Neue"/>
-                <a:ea typeface="Helvetica Neue"/>
-                <a:cs typeface="Helvetica Neue"/>
-              </a:rPr>
-              <a:t>Vector direction and length</a:t>
-            </a:r>
-          </a:p>
-        </p:txBody>
-      </p:sp>
-      <p:sp>
-        <p:nvSpPr>
-          <p:cNvPr id="11" name="">
-            <a:extLst xmlns:a="http://schemas.openxmlformats.org/drawingml/2006/main">
-              <a:ext uri="{FF2B5EF4-FFF2-40B4-BE49-F238E27FC236}">
-                <a16:creationId xmlns:a16="http://schemas.microsoft.com/office/drawing/2014/main" id="{6DE4B0B7-92EC-4554-87D6-7D9E91F93B99}"/>
-              </a:ext>
-            </a:extLst>
-          </p:cNvPr>
-          <p:cNvSpPr>
-            <a:spLocks xmlns:a="http://schemas.openxmlformats.org/drawingml/2006/main" noGrp="1"/>
-          </p:cNvSpPr>
-          <p:nvPr/>
-        </p:nvSpPr>
-        <p:spPr>
-          <a:xfrm xmlns:a="http://schemas.openxmlformats.org/drawingml/2006/main">
-            <a:off x="609600" y="1295400"/>
-            <a:ext cx="10972800" cy="9525"/>
-          </a:xfrm>
-          <a:prstGeom xmlns:a="http://schemas.openxmlformats.org/drawingml/2006/main" prst="rect">
-            <a:avLst/>
-          </a:prstGeom>
-          <a:solidFill xmlns:a="http://schemas.openxmlformats.org/drawingml/2006/main">
-            <a:srgbClr val="CBD5E1"/>
-          </a:solidFill>
-          <a:ln xmlns:a="http://schemas.openxmlformats.org/drawingml/2006/main" w="0">
-            <a:solidFill>
-              <a:srgbClr val="CBD5E1"/>
-            </a:solidFill>
-          </a:ln>
-        </p:spPr>
-      </p:sp>
-      <p:sp>
-        <p:nvSpPr>
-          <p:cNvPr id="12" name="slide-number">
-            <a:extLst xmlns:a="http://schemas.openxmlformats.org/drawingml/2006/main">
-              <a:ext uri="{FF2B5EF4-FFF2-40B4-BE49-F238E27FC236}">
-                <a16:creationId xmlns:a16="http://schemas.microsoft.com/office/drawing/2014/main" id="{04B303A4-F145-445D-96CA-E68DF1C661E0}"/>
-              </a:ext>
-            </a:extLst>
-          </p:cNvPr>
-          <p:cNvSpPr>
-            <a:spLocks xmlns:a="http://schemas.openxmlformats.org/drawingml/2006/main" noGrp="1"/>
-          </p:cNvSpPr>
-          <p:nvPr/>
-        </p:nvSpPr>
-        <p:spPr>
-          <a:xfrm xmlns:a="http://schemas.openxmlformats.org/drawingml/2006/main">
-            <a:off x="11125200" y="6467475"/>
-            <a:ext cx="457200" cy="190500"/>
-          </a:xfrm>
-          <a:prstGeom xmlns:a="http://schemas.openxmlformats.org/drawingml/2006/main" prst="rect">
-            <a:avLst/>
-          </a:prstGeom>
-          <a:noFill xmlns:a="http://schemas.openxmlformats.org/drawingml/2006/main"/>
-          <a:ln xmlns:a="http://schemas.openxmlformats.org/drawingml/2006/main" w="0">
-            <a:noFill/>
-          </a:ln>
-        </p:spPr>
-        <p:txBody>
-          <a:bodyPr xmlns:a="http://schemas.openxmlformats.org/drawingml/2006/main" wrap="square" lIns="0" tIns="0" rIns="0" bIns="0" anchor="t">
-            <a:noAutofit/>
-          </a:bodyPr>
-          <a:lstStyle xmlns:a="http://schemas.openxmlformats.org/drawingml/2006/main"/>
-          <a:p xmlns:a="http://schemas.openxmlformats.org/drawingml/2006/main">
-            <a:pPr>
-              <a:defRPr sz="900" b="0">
-                <a:solidFill>
-                  <a:srgbClr val="64748B"/>
-                </a:solidFill>
-                <a:latin typeface="Helvetica Neue"/>
-                <a:ea typeface="Helvetica Neue"/>
-                <a:cs typeface="Helvetica Neue"/>
-              </a:defRPr>
-            </a:pPr>
-            <a:r>
-              <a:rPr sz="900" b="0">
-                <a:solidFill>
-                  <a:srgbClr val="64748B"/>
-                </a:solidFill>
-                <a:latin typeface="Helvetica Neue"/>
-                <a:ea typeface="Helvetica Neue"/>
-                <a:cs typeface="Helvetica Neue"/>
-              </a:rPr>
-              <a:t>11</a:t>
-            </a:r>
-          </a:p>
-        </p:txBody>
-      </p:sp>
-      <p:sp>
-        <p:nvSpPr>
-          <p:cNvPr id="13" name="geometry-caption">
-            <a:extLst xmlns:a="http://schemas.openxmlformats.org/drawingml/2006/main">
-              <a:ext uri="{FF2B5EF4-FFF2-40B4-BE49-F238E27FC236}">
-                <a16:creationId xmlns:a16="http://schemas.microsoft.com/office/drawing/2014/main" id="{706D8FB7-EABB-4CF1-8DEB-C7B0A4EEC2FF}"/>
-              </a:ext>
-            </a:extLst>
-          </p:cNvPr>
-          <p:cNvSpPr>
-            <a:spLocks xmlns:a="http://schemas.openxmlformats.org/drawingml/2006/main" noGrp="1"/>
-          </p:cNvSpPr>
-          <p:nvPr/>
-        </p:nvSpPr>
-        <p:spPr>
-          <a:xfrm xmlns:a="http://schemas.openxmlformats.org/drawingml/2006/main">
-            <a:off x="723900" y="5895975"/>
-            <a:ext cx="10668000" cy="628650"/>
-          </a:xfrm>
-          <a:prstGeom xmlns:a="http://schemas.openxmlformats.org/drawingml/2006/main" prst="rect">
-            <a:avLst/>
-          </a:prstGeom>
-          <a:noFill xmlns:a="http://schemas.openxmlformats.org/drawingml/2006/main"/>
-          <a:ln xmlns:a="http://schemas.openxmlformats.org/drawingml/2006/main" w="0">
-            <a:noFill/>
-          </a:ln>
-        </p:spPr>
-        <p:txBody>
-          <a:bodyPr xmlns:a="http://schemas.openxmlformats.org/drawingml/2006/main" wrap="square" lIns="0" tIns="0" rIns="0" bIns="0" anchor="t">
-            <a:noAutofit/>
-          </a:bodyPr>
-          <a:lstStyle xmlns:a="http://schemas.openxmlformats.org/drawingml/2006/main"/>
-          <a:p xmlns:a="http://schemas.openxmlformats.org/drawingml/2006/main">
-            <a:pPr>
-              <a:defRPr sz="2025" b="0">
-                <a:solidFill>
-                  <a:srgbClr val="111827"/>
-                </a:solidFill>
-                <a:latin typeface="Helvetica Neue"/>
-                <a:ea typeface="Helvetica Neue"/>
-                <a:cs typeface="Helvetica Neue"/>
-              </a:defRPr>
-            </a:pPr>
-            <a:r>
-              <a:rPr sz="2025" b="0">
-                <a:solidFill>
-                  <a:srgbClr val="111827"/>
-                </a:solidFill>
-                <a:latin typeface="Helvetica Neue"/>
-                <a:ea typeface="Helvetica Neue"/>
-                <a:cs typeface="Helvetica Neue"/>
-              </a:rPr>
-              <a:t>Theta is the angle between u and v. Scaling a vector by a positive factor</a:t>
-            </a:r>
-          </a:p>
-          <a:p xmlns:a="http://schemas.openxmlformats.org/drawingml/2006/main">
-            <a:pPr>
-              <a:defRPr sz="2025" b="0">
-                <a:solidFill>
-                  <a:srgbClr val="111827"/>
-                </a:solidFill>
-                <a:latin typeface="Helvetica Neue"/>
-                <a:ea typeface="Helvetica Neue"/>
-                <a:cs typeface="Helvetica Neue"/>
-              </a:defRPr>
-            </a:pPr>
-            <a:r>
-              <a:rPr sz="2025" b="0">
-                <a:solidFill>
-                  <a:srgbClr val="111827"/>
-                </a:solidFill>
-                <a:latin typeface="Helvetica Neue"/>
-                <a:ea typeface="Helvetica Neue"/>
-                <a:cs typeface="Helvetica Neue"/>
-              </a:rPr>
-              <a:t>changes its length but preserves its direction.</a:t>
-            </a:r>
-          </a:p>
-        </p:txBody>
-      </p:sp>
-    </p:spTree>
-    <p:extLst>
-      <p:ext uri="{BB962C8B-B14F-4D97-AF65-F5344CB8AC3E}">
-        <p14:creationId xmlns:p14="http://schemas.microsoft.com/office/powerpoint/2010/main" val="1145525781"/>
-      </p:ext>
-    </p:extLst>
-  </p:cSld>
-</p:sld>
+<ns0:sld xmlns:ns0="http://schemas.openxmlformats.org/presentationml/2006/main" xmlns:ns1="http://schemas.openxmlformats.org/drawingml/2006/main" xmlns:ns2="http://schemas.openxmlformats.org/officeDocument/2006/relationships" xmlns:ns3="http://schemas.microsoft.com/office/drawing/2014/main" xmlns:ns4="http://schemas.microsoft.com/office/powerpoint/2010/main">
+  <ns0:cSld>
+    <ns0:bg>
+      <ns0:bgPr>
+        <ns1:solidFill>
+          <ns1:srgbClr val="FCFCFA"/>
+        </ns1:solidFill>
+      </ns0:bgPr>
+    </ns0:bg>
+    <ns0:spTree>
+      <ns0:nvGrpSpPr>
+        <ns0:cNvPr id="1" name=""/>
+        <ns0:cNvGrpSpPr/>
+        <ns0:nvPr/>
+      </ns0:nvGrpSpPr>
+      <ns0:grpSpPr>
+        <ns1:xfrm/>
+      </ns0:grpSpPr>
+      <ns0:pic>
+        <ns0:nvPicPr>
+          <ns0:cNvPr id="14" name="" descr="Two nonzero vectors share an origin and have different lengths. Theta marks the angle between them, not the angle to an axis. Cosine equals their dot product divided by the product of their Euclidean lengths. Same-direction vectors have cosine one, perpendicular vectors zero, and opposite vectors negative one."/>
+          <ns0:cNvPicPr>
+            <ns1:picLocks noChangeAspect="1"/>
+          </ns0:cNvPicPr>
+          <ns0:nvPr/>
+        </ns0:nvPicPr>
+        <ns0:blipFill>
+          <ns1:blip ns2:embed="R13707c20f8464fff"/>
+          <ns1:stretch/>
+        </ns0:blipFill>
+        <ns0:spPr>
+          <ns1:xfrm>
+            <ns1:off x="2235868" y="1647825"/>
+            <ns1:ext cx="7720263" cy="4191000"/>
+          </ns1:xfrm>
+          <ns1:prstGeom prst="rect">
+            <ns1:avLst/>
+          </ns1:prstGeom>
+        </ns0:spPr>
+      </ns0:pic>
+      <ns0:sp>
+        <ns0:nvSpPr>
+          <ns0:cNvPr id="9" name="eyebrow">
+            <ns1:extLst>
+              <ns1:ext uri="{FF2B5EF4-FFF2-40B4-BE49-F238E27FC236}">
+                <ns3:creationId id="{21840690-146A-45F8-962E-BFE9663D6E63}"/>
+              </ns1:ext>
+            </ns1:extLst>
+          </ns0:cNvPr>
+          <ns0:cNvSpPr>
+            <ns1:spLocks noGrp="1"/>
+          </ns0:cNvSpPr>
+          <ns0:nvPr/>
+        </ns0:nvSpPr>
+        <ns0:spPr>
+          <ns1:xfrm>
+            <ns1:off x="609600" y="295275"/>
+            <ns1:ext cx="5715000" cy="228600"/>
+          </ns1:xfrm>
+          <ns1:prstGeom prst="rect">
+            <ns1:avLst/>
+          </ns1:prstGeom>
+          <ns1:noFill/>
+          <ns1:ln w="0">
+            <ns1:noFill/>
+          </ns1:ln>
+        </ns0:spPr>
+        <ns0:txBody>
+          <ns1:bodyPr wrap="square" lIns="0" tIns="0" rIns="0" bIns="0" anchor="t">
+            <ns1:noAutofit/>
+          </ns1:bodyPr>
+          <ns1:lstStyle/>
+          <ns1:p>
+            <ns1:pPr>
+              <ns1:defRPr sz="1050" b="1">
+                <ns1:solidFill>
+                  <ns1:srgbClr val="214AE8"/>
+                </ns1:solidFill>
+                <ns1:latin typeface="Helvetica Neue"/>
+                <ns1:ea typeface="Helvetica Neue"/>
+                <ns1:cs typeface="Helvetica Neue"/>
+              </ns1:defRPr>
+            </ns1:pPr>
+            <ns1:r>
+              <ns1:rPr sz="1050" b="1">
+                <ns1:solidFill>
+                  <ns1:srgbClr val="214AE8"/>
+                </ns1:solidFill>
+                <ns1:latin typeface="Helvetica Neue"/>
+                <ns1:ea typeface="Helvetica Neue"/>
+                <ns1:cs typeface="Helvetica Neue"/>
+              </ns1:rPr>
+              <ns1:t>WEEK 09  /  CST4714</ns1:t>
+            </ns1:r>
+          </ns1:p>
+        </ns0:txBody>
+      </ns0:sp>
+      <ns0:sp>
+        <ns0:nvSpPr>
+          <ns0:cNvPr id="10" name="slide-title">
+            <ns1:extLst>
+              <ns1:ext uri="{FF2B5EF4-FFF2-40B4-BE49-F238E27FC236}">
+                <ns3:creationId id="{9DA94D37-6C2D-4C2C-BF03-6873FD929357}"/>
+              </ns1:ext>
+            </ns1:extLst>
+          </ns0:cNvPr>
+          <ns0:cNvSpPr>
+            <ns1:spLocks noGrp="1"/>
+          </ns0:cNvSpPr>
+          <ns0:nvPr/>
+        </ns0:nvSpPr>
+        <ns0:spPr>
+          <ns1:xfrm>
+            <ns1:off x="609600" y="619125"/>
+            <ns1:ext cx="10972800" cy="628650"/>
+          </ns1:xfrm>
+          <ns1:prstGeom prst="rect">
+            <ns1:avLst/>
+          </ns1:prstGeom>
+          <ns1:noFill/>
+          <ns1:ln w="0">
+            <ns1:noFill/>
+          </ns1:ln>
+        </ns0:spPr>
+        <ns0:txBody>
+          <ns1:bodyPr wrap="square" lIns="0" tIns="0" rIns="0" bIns="0" anchor="t">
+            <ns1:noAutofit/>
+          </ns1:bodyPr>
+          <ns1:lstStyle/>
+          <ns1:p>
+            <ns1:pPr>
+              <ns1:defRPr sz="2775" b="1">
+                <ns1:solidFill>
+                  <ns1:srgbClr val="111827"/>
+                </ns1:solidFill>
+                <ns1:latin typeface="Helvetica Neue"/>
+                <ns1:ea typeface="Helvetica Neue"/>
+                <ns1:cs typeface="Helvetica Neue"/>
+              </ns1:defRPr>
+            </ns1:pPr>
+            <ns1:r>
+              <ns1:rPr sz="2775" b="1">
+                <ns1:solidFill>
+                  <ns1:srgbClr val="111827"/>
+                </ns1:solidFill>
+                <ns1:latin typeface="Helvetica Neue"/>
+                <ns1:ea typeface="Helvetica Neue"/>
+                <ns1:cs typeface="Helvetica Neue"/>
+              </ns1:rPr>
+              <ns1:t>Vector direction and length</ns1:t>
+            </ns1:r>
+          </ns1:p>
+        </ns0:txBody>
+      </ns0:sp>
+      <ns0:sp>
+        <ns0:nvSpPr>
+          <ns0:cNvPr id="11" name="">
+            <ns1:extLst>
+              <ns1:ext uri="{FF2B5EF4-FFF2-40B4-BE49-F238E27FC236}">
+                <ns3:creationId id="{D4D55441-3BEF-4DCA-91A0-8B3E3ADDFFC2}"/>
+              </ns1:ext>
+            </ns1:extLst>
+          </ns0:cNvPr>
+          <ns0:cNvSpPr>
+            <ns1:spLocks noGrp="1"/>
+          </ns0:cNvSpPr>
+          <ns0:nvPr/>
+        </ns0:nvSpPr>
+        <ns0:spPr>
+          <ns1:xfrm>
+            <ns1:off x="609600" y="1295400"/>
+            <ns1:ext cx="10972800" cy="9525"/>
+          </ns1:xfrm>
+          <ns1:prstGeom prst="rect">
+            <ns1:avLst/>
+          </ns1:prstGeom>
+          <ns1:solidFill>
+            <ns1:srgbClr val="CBD5E1"/>
+          </ns1:solidFill>
+          <ns1:ln w="0">
+            <ns1:solidFill>
+              <ns1:srgbClr val="CBD5E1"/>
+            </ns1:solidFill>
+          </ns1:ln>
+        </ns0:spPr>
+      </ns0:sp>
+      <ns0:sp>
+        <ns0:nvSpPr>
+          <ns0:cNvPr id="12" name="slide-number">
+            <ns1:extLst>
+              <ns1:ext uri="{FF2B5EF4-FFF2-40B4-BE49-F238E27FC236}">
+                <ns3:creationId id="{916D6D49-042F-4031-A4D4-CA44A45A7494}"/>
+              </ns1:ext>
+            </ns1:extLst>
+          </ns0:cNvPr>
+          <ns0:cNvSpPr>
+            <ns1:spLocks noGrp="1"/>
+          </ns0:cNvSpPr>
+          <ns0:nvPr/>
+        </ns0:nvSpPr>
+        <ns0:spPr>
+          <ns1:xfrm>
+            <ns1:off x="11125200" y="6467475"/>
+            <ns1:ext cx="457200" cy="190500"/>
+          </ns1:xfrm>
+          <ns1:prstGeom prst="rect">
+            <ns1:avLst/>
+          </ns1:prstGeom>
+          <ns1:noFill/>
+          <ns1:ln w="0">
+            <ns1:noFill/>
+          </ns1:ln>
+        </ns0:spPr>
+        <ns0:txBody>
+          <ns1:bodyPr wrap="square" lIns="0" tIns="0" rIns="0" bIns="0" anchor="t">
+            <ns1:noAutofit/>
+          </ns1:bodyPr>
+          <ns1:lstStyle/>
+          <ns1:p>
+            <ns1:pPr>
+              <ns1:defRPr sz="900" b="0">
+                <ns1:solidFill>
+                  <ns1:srgbClr val="64748B"/>
+                </ns1:solidFill>
+                <ns1:latin typeface="Helvetica Neue"/>
+                <ns1:ea typeface="Helvetica Neue"/>
+                <ns1:cs typeface="Helvetica Neue"/>
+              </ns1:defRPr>
+            </ns1:pPr>
+            <ns1:r>
+              <ns1:rPr sz="900" b="0">
+                <ns1:solidFill>
+                  <ns1:srgbClr val="64748B"/>
+                </ns1:solidFill>
+                <ns1:latin typeface="Helvetica Neue"/>
+                <ns1:ea typeface="Helvetica Neue"/>
+                <ns1:cs typeface="Helvetica Neue"/>
+              </ns1:rPr>
+              <ns1:t>11</ns1:t>
+            </ns1:r>
+          </ns1:p>
+        </ns0:txBody>
+      </ns0:sp>
+      <ns0:sp>
+        <ns0:nvSpPr>
+          <ns0:cNvPr id="13" name="geometry-caption">
+            <ns1:extLst>
+              <ns1:ext uri="{FF2B5EF4-FFF2-40B4-BE49-F238E27FC236}">
+                <ns3:creationId id="{631CC25C-B572-436A-8E57-3B0EB1E81E9B}"/>
+              </ns1:ext>
+            </ns1:extLst>
+          </ns0:cNvPr>
+          <ns0:cNvSpPr>
+            <ns1:spLocks noGrp="1"/>
+          </ns0:cNvSpPr>
+          <ns0:nvPr/>
+        </ns0:nvSpPr>
+        <ns0:spPr>
+          <ns1:xfrm>
+            <ns1:off x="723900" y="5895975"/>
+            <ns1:ext cx="10668000" cy="628650"/>
+          </ns1:xfrm>
+          <ns1:prstGeom prst="rect">
+            <ns1:avLst/>
+          </ns1:prstGeom>
+          <ns1:noFill/>
+          <ns1:ln w="0">
+            <ns1:noFill/>
+          </ns1:ln>
+        </ns0:spPr>
+        <ns0:txBody>
+          <ns1:bodyPr wrap="square" lIns="0" tIns="0" rIns="0" bIns="0" anchor="t">
+            <ns1:noAutofit/>
+          </ns1:bodyPr>
+          <ns1:lstStyle/>
+          <ns1:p>
+            <ns1:pPr>
+              <ns1:defRPr sz="2025" b="0">
+                <ns1:solidFill>
+                  <ns1:srgbClr val="111827"/>
+                </ns1:solidFill>
+                <ns1:latin typeface="Helvetica Neue"/>
+                <ns1:ea typeface="Helvetica Neue"/>
+                <ns1:cs typeface="Helvetica Neue"/>
+              </ns1:defRPr>
+            </ns1:pPr>
+            <ns1:r>
+              <ns1:rPr sz="2025" b="0">
+                <ns1:solidFill>
+                  <ns1:srgbClr val="111827"/>
+                </ns1:solidFill>
+                <ns1:latin typeface="Helvetica Neue"/>
+                <ns1:ea typeface="Helvetica Neue"/>
+                <ns1:cs typeface="Helvetica Neue"/>
+              </ns1:rPr>
+              <ns1:t>Theta is the angle between u and v. Scaling a vector by a positive factor</ns1:t>
+            </ns1:r>
+          </ns1:p>
+          <ns1:p>
+            <ns1:pPr>
+              <ns1:defRPr sz="2025" b="0">
+                <ns1:solidFill>
+                  <ns1:srgbClr val="111827"/>
+                </ns1:solidFill>
+                <ns1:latin typeface="Helvetica Neue"/>
+                <ns1:ea typeface="Helvetica Neue"/>
+                <ns1:cs typeface="Helvetica Neue"/>
+              </ns1:defRPr>
+            </ns1:pPr>
+            <ns1:r>
+              <ns1:rPr sz="2025" b="0">
+                <ns1:solidFill>
+                  <ns1:srgbClr val="111827"/>
+                </ns1:solidFill>
+                <ns1:latin typeface="Helvetica Neue"/>
+                <ns1:ea typeface="Helvetica Neue"/>
+                <ns1:cs typeface="Helvetica Neue"/>
+              </ns1:rPr>
+              <ns1:t>changes its length but preserves its direction.</ns1:t>
+            </ns1:r>
+          </ns1:p>
+        </ns0:txBody>
+      </ns0:sp>
+    </ns0:spTree>
+    <ns0:extLst>
+      <ns0:ext uri="{BB962C8B-B14F-4D97-AF65-F5344CB8AC3E}">
+        <ns4:creationId val="1145525781"/>
+      </ns0:ext>
+    </ns0:extLst>
+  </ns0:cSld>
+</ns0:sld>
 </file>
 
 <file path=ppt/slides/slide12.xml><?xml version="1.0" encoding="utf-8"?>
@@ -6403,7 +6403,7 @@
           <p:cNvPr id="10" name="eyebrow">
             <a:extLst xmlns:a="http://schemas.openxmlformats.org/drawingml/2006/main">
               <a:ext uri="{FF2B5EF4-FFF2-40B4-BE49-F238E27FC236}">
-                <a16:creationId xmlns:a16="http://schemas.microsoft.com/office/drawing/2014/main" id="{3D658AC6-C6D9-414A-BE4E-4B7BD6C19956}"/>
+                <a16:creationId xmlns:a16="http://schemas.microsoft.com/office/drawing/2014/main" id="{9A64ABB9-D71F-4601-914C-9E80B5F4E70C}"/>
               </a:ext>
             </a:extLst>
           </p:cNvPr>
@@ -6460,7 +6460,7 @@
           <p:cNvPr id="2" name="slide-title">
             <a:extLst xmlns:a="http://schemas.openxmlformats.org/drawingml/2006/main">
               <a:ext uri="{FF2B5EF4-FFF2-40B4-BE49-F238E27FC236}">
-                <a16:creationId xmlns:a16="http://schemas.microsoft.com/office/drawing/2014/main" id="{2B8B8AC6-D148-4EE6-B12F-63B174C19ACE}"/>
+                <a16:creationId xmlns:a16="http://schemas.microsoft.com/office/drawing/2014/main" id="{2DD5CE51-46E3-4787-AA00-479E5929854C}"/>
               </a:ext>
             </a:extLst>
           </p:cNvPr>
@@ -6517,7 +6517,7 @@
           <p:cNvPr id="3" name="">
             <a:extLst xmlns:a="http://schemas.openxmlformats.org/drawingml/2006/main">
               <a:ext uri="{FF2B5EF4-FFF2-40B4-BE49-F238E27FC236}">
-                <a16:creationId xmlns:a16="http://schemas.microsoft.com/office/drawing/2014/main" id="{A3F444D8-C30F-454C-8C0C-974E562C0604}"/>
+                <a16:creationId xmlns:a16="http://schemas.microsoft.com/office/drawing/2014/main" id="{7AEFD9C2-A585-4B0F-9C0E-84726BAC7BEC}"/>
               </a:ext>
             </a:extLst>
           </p:cNvPr>
@@ -6549,7 +6549,7 @@
           <p:cNvPr id="4" name="slide-number">
             <a:extLst xmlns:a="http://schemas.openxmlformats.org/drawingml/2006/main">
               <a:ext uri="{FF2B5EF4-FFF2-40B4-BE49-F238E27FC236}">
-                <a16:creationId xmlns:a16="http://schemas.microsoft.com/office/drawing/2014/main" id="{7F1F64B8-CE0E-4E8E-9EA0-BD83E48B9127}"/>
+                <a16:creationId xmlns:a16="http://schemas.microsoft.com/office/drawing/2014/main" id="{241A8958-F1FB-4DC8-A629-FB117A0C82F0}"/>
               </a:ext>
             </a:extLst>
           </p:cNvPr>
@@ -6606,7 +6606,7 @@
           <p:cNvPr id="5" name="">
             <a:extLst xmlns:a="http://schemas.openxmlformats.org/drawingml/2006/main">
               <a:ext uri="{FF2B5EF4-FFF2-40B4-BE49-F238E27FC236}">
-                <a16:creationId xmlns:a16="http://schemas.microsoft.com/office/drawing/2014/main" id="{C6A08EC6-2282-464E-BA0C-43FADD23DFF0}"/>
+                <a16:creationId xmlns:a16="http://schemas.microsoft.com/office/drawing/2014/main" id="{07D7BB19-1A4D-4CF4-9F56-EE59C99AC91F}"/>
               </a:ext>
             </a:extLst>
           </p:cNvPr>
@@ -6638,7 +6638,7 @@
           <p:cNvPr id="6" name="cosine-input">
             <a:extLst xmlns:a="http://schemas.openxmlformats.org/drawingml/2006/main">
               <a:ext uri="{FF2B5EF4-FFF2-40B4-BE49-F238E27FC236}">
-                <a16:creationId xmlns:a16="http://schemas.microsoft.com/office/drawing/2014/main" id="{04CCEF53-091D-45A8-818A-4DDBD9CF0779}"/>
+                <a16:creationId xmlns:a16="http://schemas.microsoft.com/office/drawing/2014/main" id="{1C63DECF-B59C-482E-8996-1C7BE2ABFE8A}"/>
               </a:ext>
             </a:extLst>
           </p:cNvPr>
@@ -6746,7 +6746,7 @@
           <p:cNvPr id="7" name="cosine-norm">
             <a:extLst xmlns:a="http://schemas.openxmlformats.org/drawingml/2006/main">
               <a:ext uri="{FF2B5EF4-FFF2-40B4-BE49-F238E27FC236}">
-                <a16:creationId xmlns:a16="http://schemas.microsoft.com/office/drawing/2014/main" id="{AD36406C-AD42-458E-97A1-D1E92A5E9162}"/>
+                <a16:creationId xmlns:a16="http://schemas.microsoft.com/office/drawing/2014/main" id="{12BB997D-6CE7-4287-BFAD-F19E89BC825D}"/>
               </a:ext>
             </a:extLst>
           </p:cNvPr>
@@ -6803,7 +6803,7 @@
           <p:cNvPr id="8" name="cosine-result">
             <a:extLst xmlns:a="http://schemas.openxmlformats.org/drawingml/2006/main">
               <a:ext uri="{FF2B5EF4-FFF2-40B4-BE49-F238E27FC236}">
-                <a16:creationId xmlns:a16="http://schemas.microsoft.com/office/drawing/2014/main" id="{37EB0E31-7536-4BC8-BB82-D9EE62CC8BF9}"/>
+                <a16:creationId xmlns:a16="http://schemas.microsoft.com/office/drawing/2014/main" id="{9E0F7D57-FEBD-4BA0-93FF-C5F17F4139B7}"/>
               </a:ext>
             </a:extLst>
           </p:cNvPr>
@@ -6883,7 +6883,7 @@
           <p:cNvPr id="9" name="cosine-interpret">
             <a:extLst xmlns:a="http://schemas.openxmlformats.org/drawingml/2006/main">
               <a:ext uri="{FF2B5EF4-FFF2-40B4-BE49-F238E27FC236}">
-                <a16:creationId xmlns:a16="http://schemas.microsoft.com/office/drawing/2014/main" id="{8FC14F99-53DD-4C72-8B4F-F75D3D1CC132}"/>
+                <a16:creationId xmlns:a16="http://schemas.microsoft.com/office/drawing/2014/main" id="{075BE374-94DA-4C93-8704-F03590D2C352}"/>
               </a:ext>
             </a:extLst>
           </p:cNvPr>
@@ -6969,7 +6969,7 @@
           <p:cNvPr id="10" name="eyebrow">
             <a:extLst xmlns:a="http://schemas.openxmlformats.org/drawingml/2006/main">
               <a:ext uri="{FF2B5EF4-FFF2-40B4-BE49-F238E27FC236}">
-                <a16:creationId xmlns:a16="http://schemas.microsoft.com/office/drawing/2014/main" id="{5DF9A112-D4BC-4F21-9987-652422348270}"/>
+                <a16:creationId xmlns:a16="http://schemas.microsoft.com/office/drawing/2014/main" id="{CA2CAEFF-5FF0-4A9B-A992-7484157F0DFB}"/>
               </a:ext>
             </a:extLst>
           </p:cNvPr>
@@ -7026,7 +7026,7 @@
           <p:cNvPr id="2" name="slide-title">
             <a:extLst xmlns:a="http://schemas.openxmlformats.org/drawingml/2006/main">
               <a:ext uri="{FF2B5EF4-FFF2-40B4-BE49-F238E27FC236}">
-                <a16:creationId xmlns:a16="http://schemas.microsoft.com/office/drawing/2014/main" id="{574E4E61-9C8D-439A-8745-745A4A411B6A}"/>
+                <a16:creationId xmlns:a16="http://schemas.microsoft.com/office/drawing/2014/main" id="{C0EA0F3A-7A87-404C-BE11-2D87FECA54B3}"/>
               </a:ext>
             </a:extLst>
           </p:cNvPr>
@@ -7083,7 +7083,7 @@
           <p:cNvPr id="3" name="">
             <a:extLst xmlns:a="http://schemas.openxmlformats.org/drawingml/2006/main">
               <a:ext uri="{FF2B5EF4-FFF2-40B4-BE49-F238E27FC236}">
-                <a16:creationId xmlns:a16="http://schemas.microsoft.com/office/drawing/2014/main" id="{72AB93D2-8E14-45A6-9CE3-5FB59975F5B6}"/>
+                <a16:creationId xmlns:a16="http://schemas.microsoft.com/office/drawing/2014/main" id="{8056ACAD-02AD-492F-9E9B-DD1C0BC8DFA9}"/>
               </a:ext>
             </a:extLst>
           </p:cNvPr>
@@ -7115,7 +7115,7 @@
           <p:cNvPr id="4" name="slide-number">
             <a:extLst xmlns:a="http://schemas.openxmlformats.org/drawingml/2006/main">
               <a:ext uri="{FF2B5EF4-FFF2-40B4-BE49-F238E27FC236}">
-                <a16:creationId xmlns:a16="http://schemas.microsoft.com/office/drawing/2014/main" id="{11BFE654-A49A-4140-BCFD-1842542E050B}"/>
+                <a16:creationId xmlns:a16="http://schemas.microsoft.com/office/drawing/2014/main" id="{184CFE20-FA85-4B6B-8BE2-07B6A87927C7}"/>
               </a:ext>
             </a:extLst>
           </p:cNvPr>
@@ -7172,7 +7172,7 @@
           <p:cNvPr id="5" name="distance-formula">
             <a:extLst xmlns:a="http://schemas.openxmlformats.org/drawingml/2006/main">
               <a:ext uri="{FF2B5EF4-FFF2-40B4-BE49-F238E27FC236}">
-                <a16:creationId xmlns:a16="http://schemas.microsoft.com/office/drawing/2014/main" id="{BB84A570-6C28-473C-9097-D23037AE2ED4}"/>
+                <a16:creationId xmlns:a16="http://schemas.microsoft.com/office/drawing/2014/main" id="{3BE86BAE-5B30-4D46-B8A1-FA107618D5EE}"/>
               </a:ext>
             </a:extLst>
           </p:cNvPr>
@@ -7229,7 +7229,7 @@
           <p:cNvPr id="6" name="">
             <a:extLst xmlns:a="http://schemas.openxmlformats.org/drawingml/2006/main">
               <a:ext uri="{FF2B5EF4-FFF2-40B4-BE49-F238E27FC236}">
-                <a16:creationId xmlns:a16="http://schemas.microsoft.com/office/drawing/2014/main" id="{6D8C5880-E3F4-4530-BA35-D5C63C830E1D}"/>
+                <a16:creationId xmlns:a16="http://schemas.microsoft.com/office/drawing/2014/main" id="{7696D366-A458-433F-97EF-1FCDB91E7773}"/>
               </a:ext>
             </a:extLst>
           </p:cNvPr>
@@ -7261,7 +7261,7 @@
           <p:cNvPr id="7" name="distance-calculation">
             <a:extLst xmlns:a="http://schemas.openxmlformats.org/drawingml/2006/main">
               <a:ext uri="{FF2B5EF4-FFF2-40B4-BE49-F238E27FC236}">
-                <a16:creationId xmlns:a16="http://schemas.microsoft.com/office/drawing/2014/main" id="{BB1681AC-FF68-4A75-AA1A-BC4F7C591C7B}"/>
+                <a16:creationId xmlns:a16="http://schemas.microsoft.com/office/drawing/2014/main" id="{C73098CA-20E7-41A7-96FE-CC665481E63D}"/>
               </a:ext>
             </a:extLst>
           </p:cNvPr>
@@ -7341,7 +7341,7 @@
           <p:cNvPr id="8" name="distance-result">
             <a:extLst xmlns:a="http://schemas.openxmlformats.org/drawingml/2006/main">
               <a:ext uri="{FF2B5EF4-FFF2-40B4-BE49-F238E27FC236}">
-                <a16:creationId xmlns:a16="http://schemas.microsoft.com/office/drawing/2014/main" id="{C87ABE31-EF52-49C9-9358-122BF5E0B1D8}"/>
+                <a16:creationId xmlns:a16="http://schemas.microsoft.com/office/drawing/2014/main" id="{BF8ABB93-86B4-4085-A2A8-4A9AAE35BE7F}"/>
               </a:ext>
             </a:extLst>
           </p:cNvPr>
@@ -7421,7 +7421,7 @@
           <p:cNvPr id="9" name="normalization">
             <a:extLst xmlns:a="http://schemas.openxmlformats.org/drawingml/2006/main">
               <a:ext uri="{FF2B5EF4-FFF2-40B4-BE49-F238E27FC236}">
-                <a16:creationId xmlns:a16="http://schemas.microsoft.com/office/drawing/2014/main" id="{8B3EB0D7-BD5E-46E3-9EA9-AD6D82DFE354}"/>
+                <a16:creationId xmlns:a16="http://schemas.microsoft.com/office/drawing/2014/main" id="{A04F021E-7159-4EF1-8043-1B3DE661E655}"/>
               </a:ext>
             </a:extLst>
           </p:cNvPr>
@@ -7530,7 +7530,7 @@
           <p:cNvPr id="9" name="eyebrow">
             <a:extLst xmlns:a="http://schemas.openxmlformats.org/drawingml/2006/main">
               <a:ext uri="{FF2B5EF4-FFF2-40B4-BE49-F238E27FC236}">
-                <a16:creationId xmlns:a16="http://schemas.microsoft.com/office/drawing/2014/main" id="{95B192FF-5BE2-40E7-839F-42532287349A}"/>
+                <a16:creationId xmlns:a16="http://schemas.microsoft.com/office/drawing/2014/main" id="{54360B97-74AB-4D25-BC57-0D33144048AF}"/>
               </a:ext>
             </a:extLst>
           </p:cNvPr>
@@ -7587,7 +7587,7 @@
           <p:cNvPr id="2" name="slide-title">
             <a:extLst xmlns:a="http://schemas.openxmlformats.org/drawingml/2006/main">
               <a:ext uri="{FF2B5EF4-FFF2-40B4-BE49-F238E27FC236}">
-                <a16:creationId xmlns:a16="http://schemas.microsoft.com/office/drawing/2014/main" id="{5178F7DA-FEEF-4DF5-97EE-8ED12D0EADBA}"/>
+                <a16:creationId xmlns:a16="http://schemas.microsoft.com/office/drawing/2014/main" id="{3A4D7B37-A1F9-457F-BEBB-836D90F7AABB}"/>
               </a:ext>
             </a:extLst>
           </p:cNvPr>
@@ -7644,7 +7644,7 @@
           <p:cNvPr id="3" name="">
             <a:extLst xmlns:a="http://schemas.openxmlformats.org/drawingml/2006/main">
               <a:ext uri="{FF2B5EF4-FFF2-40B4-BE49-F238E27FC236}">
-                <a16:creationId xmlns:a16="http://schemas.microsoft.com/office/drawing/2014/main" id="{BFF4C1FB-B336-45FC-A3C7-0DB2463BD5C2}"/>
+                <a16:creationId xmlns:a16="http://schemas.microsoft.com/office/drawing/2014/main" id="{CF5D17F8-AF16-4742-B72B-4AB0AF2A46D5}"/>
               </a:ext>
             </a:extLst>
           </p:cNvPr>
@@ -7676,7 +7676,7 @@
           <p:cNvPr id="4" name="slide-number">
             <a:extLst xmlns:a="http://schemas.openxmlformats.org/drawingml/2006/main">
               <a:ext uri="{FF2B5EF4-FFF2-40B4-BE49-F238E27FC236}">
-                <a16:creationId xmlns:a16="http://schemas.microsoft.com/office/drawing/2014/main" id="{B123751C-290E-4B31-A219-44AA1B1F58D7}"/>
+                <a16:creationId xmlns:a16="http://schemas.microsoft.com/office/drawing/2014/main" id="{5FD7246C-AAC1-4633-AFBA-EF0F787DC799}"/>
               </a:ext>
             </a:extLst>
           </p:cNvPr>
@@ -7733,7 +7733,7 @@
           <p:cNvPr id="5" name="">
             <a:extLst xmlns:a="http://schemas.openxmlformats.org/drawingml/2006/main">
               <a:ext uri="{FF2B5EF4-FFF2-40B4-BE49-F238E27FC236}">
-                <a16:creationId xmlns:a16="http://schemas.microsoft.com/office/drawing/2014/main" id="{1A063C28-2923-4DC1-A1F0-8B09A588801C}"/>
+                <a16:creationId xmlns:a16="http://schemas.microsoft.com/office/drawing/2014/main" id="{9264B82D-594F-4C34-A4AD-F660F3DE3EA6}"/>
               </a:ext>
             </a:extLst>
           </p:cNvPr>
@@ -7765,7 +7765,7 @@
           <p:cNvPr id="6" name="recall-example">
             <a:extLst xmlns:a="http://schemas.openxmlformats.org/drawingml/2006/main">
               <a:ext uri="{FF2B5EF4-FFF2-40B4-BE49-F238E27FC236}">
-                <a16:creationId xmlns:a16="http://schemas.microsoft.com/office/drawing/2014/main" id="{2B7BD5E7-1ABA-4732-B797-3E50D08D504C}"/>
+                <a16:creationId xmlns:a16="http://schemas.microsoft.com/office/drawing/2014/main" id="{51B21558-425C-4363-8049-3C5B09672768}"/>
               </a:ext>
             </a:extLst>
           </p:cNvPr>
@@ -7873,7 +7873,7 @@
           <p:cNvPr id="7" name="recall-meaning">
             <a:extLst xmlns:a="http://schemas.openxmlformats.org/drawingml/2006/main">
               <a:ext uri="{FF2B5EF4-FFF2-40B4-BE49-F238E27FC236}">
-                <a16:creationId xmlns:a16="http://schemas.microsoft.com/office/drawing/2014/main" id="{CC2E4FDE-02FA-47EB-831D-E68E32E46A73}"/>
+                <a16:creationId xmlns:a16="http://schemas.microsoft.com/office/drawing/2014/main" id="{CA3A457A-E204-4713-92FB-8D749FE99721}"/>
               </a:ext>
             </a:extLst>
           </p:cNvPr>
@@ -7953,7 +7953,7 @@
           <p:cNvPr id="8" name="recall-permissions">
             <a:extLst xmlns:a="http://schemas.openxmlformats.org/drawingml/2006/main">
               <a:ext uri="{FF2B5EF4-FFF2-40B4-BE49-F238E27FC236}">
-                <a16:creationId xmlns:a16="http://schemas.microsoft.com/office/drawing/2014/main" id="{4625E370-8951-4A03-98A6-FB9365C2147D}"/>
+                <a16:creationId xmlns:a16="http://schemas.microsoft.com/office/drawing/2014/main" id="{FB407D40-3DDB-43E1-B69E-FD28B83D68D6}"/>
               </a:ext>
             </a:extLst>
           </p:cNvPr>
@@ -8062,7 +8062,7 @@
           <p:cNvPr id="7" name="eyebrow">
             <a:extLst xmlns:a="http://schemas.openxmlformats.org/drawingml/2006/main">
               <a:ext uri="{FF2B5EF4-FFF2-40B4-BE49-F238E27FC236}">
-                <a16:creationId xmlns:a16="http://schemas.microsoft.com/office/drawing/2014/main" id="{11D3D24C-2290-406F-B086-128F4B0CEB64}"/>
+                <a16:creationId xmlns:a16="http://schemas.microsoft.com/office/drawing/2014/main" id="{0158148D-2AF9-412C-96B9-E928CB6C73A0}"/>
               </a:ext>
             </a:extLst>
           </p:cNvPr>
@@ -8119,7 +8119,7 @@
           <p:cNvPr id="2" name="slide-title">
             <a:extLst xmlns:a="http://schemas.openxmlformats.org/drawingml/2006/main">
               <a:ext uri="{FF2B5EF4-FFF2-40B4-BE49-F238E27FC236}">
-                <a16:creationId xmlns:a16="http://schemas.microsoft.com/office/drawing/2014/main" id="{A596DD71-72CC-412F-8957-B840BEB2B0B2}"/>
+                <a16:creationId xmlns:a16="http://schemas.microsoft.com/office/drawing/2014/main" id="{90F4CAA3-F913-4ACD-939F-D1841C8D85C6}"/>
               </a:ext>
             </a:extLst>
           </p:cNvPr>
@@ -8176,7 +8176,7 @@
           <p:cNvPr id="3" name="">
             <a:extLst xmlns:a="http://schemas.openxmlformats.org/drawingml/2006/main">
               <a:ext uri="{FF2B5EF4-FFF2-40B4-BE49-F238E27FC236}">
-                <a16:creationId xmlns:a16="http://schemas.microsoft.com/office/drawing/2014/main" id="{8AC324F3-3B63-4069-A50C-4FA37DB743FB}"/>
+                <a16:creationId xmlns:a16="http://schemas.microsoft.com/office/drawing/2014/main" id="{FCF67756-32C9-40AB-8D87-E5059D1A5BB7}"/>
               </a:ext>
             </a:extLst>
           </p:cNvPr>
@@ -8208,7 +8208,7 @@
           <p:cNvPr id="4" name="slide-number">
             <a:extLst xmlns:a="http://schemas.openxmlformats.org/drawingml/2006/main">
               <a:ext uri="{FF2B5EF4-FFF2-40B4-BE49-F238E27FC236}">
-                <a16:creationId xmlns:a16="http://schemas.microsoft.com/office/drawing/2014/main" id="{D66F9B40-6D8C-41A0-9A1A-506C849C3183}"/>
+                <a16:creationId xmlns:a16="http://schemas.microsoft.com/office/drawing/2014/main" id="{79685156-A31B-4427-A54A-60BFC3CC4566}"/>
               </a:ext>
             </a:extLst>
           </p:cNvPr>
@@ -8806,7 +8806,7 @@
           <p:cNvPr id="6" name="family-overlap">
             <a:extLst xmlns:a="http://schemas.openxmlformats.org/drawingml/2006/main">
               <a:ext uri="{FF2B5EF4-FFF2-40B4-BE49-F238E27FC236}">
-                <a16:creationId xmlns:a16="http://schemas.microsoft.com/office/drawing/2014/main" id="{C9A0CA5E-A601-46A0-B318-6F43F5C8DB3D}"/>
+                <a16:creationId xmlns:a16="http://schemas.microsoft.com/office/drawing/2014/main" id="{09EA03C7-BE77-466E-AC3D-3333AF4DBEAF}"/>
               </a:ext>
             </a:extLst>
           </p:cNvPr>
@@ -8892,7 +8892,7 @@
           <p:cNvPr id="7" name="eyebrow">
             <a:extLst xmlns:a="http://schemas.openxmlformats.org/drawingml/2006/main">
               <a:ext uri="{FF2B5EF4-FFF2-40B4-BE49-F238E27FC236}">
-                <a16:creationId xmlns:a16="http://schemas.microsoft.com/office/drawing/2014/main" id="{D73ACD10-9377-4A50-83EE-4AC601DCD0A3}"/>
+                <a16:creationId xmlns:a16="http://schemas.microsoft.com/office/drawing/2014/main" id="{48BB7D15-1E51-4BF1-BD8F-88093AE94116}"/>
               </a:ext>
             </a:extLst>
           </p:cNvPr>
@@ -8949,7 +8949,7 @@
           <p:cNvPr id="2" name="slide-title">
             <a:extLst xmlns:a="http://schemas.openxmlformats.org/drawingml/2006/main">
               <a:ext uri="{FF2B5EF4-FFF2-40B4-BE49-F238E27FC236}">
-                <a16:creationId xmlns:a16="http://schemas.microsoft.com/office/drawing/2014/main" id="{C8E6120D-7D0F-42CA-B146-6199AAD76226}"/>
+                <a16:creationId xmlns:a16="http://schemas.microsoft.com/office/drawing/2014/main" id="{EFF789F6-C8B8-4BB9-AC9C-8B5B7C8797B9}"/>
               </a:ext>
             </a:extLst>
           </p:cNvPr>
@@ -9006,7 +9006,7 @@
           <p:cNvPr id="3" name="">
             <a:extLst xmlns:a="http://schemas.openxmlformats.org/drawingml/2006/main">
               <a:ext uri="{FF2B5EF4-FFF2-40B4-BE49-F238E27FC236}">
-                <a16:creationId xmlns:a16="http://schemas.microsoft.com/office/drawing/2014/main" id="{51D0B6D0-5338-4245-8844-2011E744684A}"/>
+                <a16:creationId xmlns:a16="http://schemas.microsoft.com/office/drawing/2014/main" id="{7A7A58A8-A81D-4F31-B6C0-CAE7AC8F6530}"/>
               </a:ext>
             </a:extLst>
           </p:cNvPr>
@@ -9038,7 +9038,7 @@
           <p:cNvPr id="4" name="slide-number">
             <a:extLst xmlns:a="http://schemas.openxmlformats.org/drawingml/2006/main">
               <a:ext uri="{FF2B5EF4-FFF2-40B4-BE49-F238E27FC236}">
-                <a16:creationId xmlns:a16="http://schemas.microsoft.com/office/drawing/2014/main" id="{EA293696-4E4B-4DA3-A9C1-E5897A4E096D}"/>
+                <a16:creationId xmlns:a16="http://schemas.microsoft.com/office/drawing/2014/main" id="{97A8B092-7CDE-4259-BB67-6A69B874F65F}"/>
               </a:ext>
             </a:extLst>
           </p:cNvPr>
@@ -9095,7 +9095,7 @@
           <p:cNvPr id="5" name="design-prompt">
             <a:extLst xmlns:a="http://schemas.openxmlformats.org/drawingml/2006/main">
               <a:ext uri="{FF2B5EF4-FFF2-40B4-BE49-F238E27FC236}">
-                <a16:creationId xmlns:a16="http://schemas.microsoft.com/office/drawing/2014/main" id="{A1E6AF4D-82CB-491D-9F57-C6D91BBA7C06}"/>
+                <a16:creationId xmlns:a16="http://schemas.microsoft.com/office/drawing/2014/main" id="{8A36F148-EBD2-47C8-B926-48A148390F8C}"/>
               </a:ext>
             </a:extLst>
           </p:cNvPr>
@@ -9203,7 +9203,7 @@
           <p:cNvPr id="6" name="design-constraint">
             <a:extLst xmlns:a="http://schemas.openxmlformats.org/drawingml/2006/main">
               <a:ext uri="{FF2B5EF4-FFF2-40B4-BE49-F238E27FC236}">
-                <a16:creationId xmlns:a16="http://schemas.microsoft.com/office/drawing/2014/main" id="{73978B17-4BB2-4D66-B44B-045068397B40}"/>
+                <a16:creationId xmlns:a16="http://schemas.microsoft.com/office/drawing/2014/main" id="{47FFA46C-E671-4D8E-9E69-FCD74E79ED16}"/>
               </a:ext>
             </a:extLst>
           </p:cNvPr>
@@ -9312,7 +9312,7 @@
           <p:cNvPr id="7" name="eyebrow">
             <a:extLst xmlns:a="http://schemas.openxmlformats.org/drawingml/2006/main">
               <a:ext uri="{FF2B5EF4-FFF2-40B4-BE49-F238E27FC236}">
-                <a16:creationId xmlns:a16="http://schemas.microsoft.com/office/drawing/2014/main" id="{B0106D24-D0D2-4817-BD01-5EDDF4CCB985}"/>
+                <a16:creationId xmlns:a16="http://schemas.microsoft.com/office/drawing/2014/main" id="{061A7708-7A83-4D05-9E04-8BFB4717C352}"/>
               </a:ext>
             </a:extLst>
           </p:cNvPr>
@@ -9369,7 +9369,7 @@
           <p:cNvPr id="2" name="slide-title">
             <a:extLst xmlns:a="http://schemas.openxmlformats.org/drawingml/2006/main">
               <a:ext uri="{FF2B5EF4-FFF2-40B4-BE49-F238E27FC236}">
-                <a16:creationId xmlns:a16="http://schemas.microsoft.com/office/drawing/2014/main" id="{D0BD9614-B45F-4E7E-8C2F-478B13FE9E9F}"/>
+                <a16:creationId xmlns:a16="http://schemas.microsoft.com/office/drawing/2014/main" id="{ABA90375-5B22-4E92-B2CF-A063EE85BE52}"/>
               </a:ext>
             </a:extLst>
           </p:cNvPr>
@@ -9426,7 +9426,7 @@
           <p:cNvPr id="3" name="">
             <a:extLst xmlns:a="http://schemas.openxmlformats.org/drawingml/2006/main">
               <a:ext uri="{FF2B5EF4-FFF2-40B4-BE49-F238E27FC236}">
-                <a16:creationId xmlns:a16="http://schemas.microsoft.com/office/drawing/2014/main" id="{B881717C-A30C-4901-BA31-39E9C22AD474}"/>
+                <a16:creationId xmlns:a16="http://schemas.microsoft.com/office/drawing/2014/main" id="{FBDCE5C8-82D5-4A22-87D4-BFA483F6B34F}"/>
               </a:ext>
             </a:extLst>
           </p:cNvPr>
@@ -9458,7 +9458,7 @@
           <p:cNvPr id="4" name="slide-number">
             <a:extLst xmlns:a="http://schemas.openxmlformats.org/drawingml/2006/main">
               <a:ext uri="{FF2B5EF4-FFF2-40B4-BE49-F238E27FC236}">
-                <a16:creationId xmlns:a16="http://schemas.microsoft.com/office/drawing/2014/main" id="{CC17793F-C66B-4910-92BD-7DE6D054A176}"/>
+                <a16:creationId xmlns:a16="http://schemas.microsoft.com/office/drawing/2014/main" id="{955AE72A-4972-42CC-83D9-50924062962A}"/>
               </a:ext>
             </a:extLst>
           </p:cNvPr>
@@ -9515,7 +9515,7 @@
           <p:cNvPr id="5" name="day2-opening">
             <a:extLst xmlns:a="http://schemas.openxmlformats.org/drawingml/2006/main">
               <a:ext uri="{FF2B5EF4-FFF2-40B4-BE49-F238E27FC236}">
-                <a16:creationId xmlns:a16="http://schemas.microsoft.com/office/drawing/2014/main" id="{F683B7B0-3C1E-40CE-998B-741924AC53C2}"/>
+                <a16:creationId xmlns:a16="http://schemas.microsoft.com/office/drawing/2014/main" id="{F875FF41-358E-4CB7-A0F5-F15C810AEDC4}"/>
               </a:ext>
             </a:extLst>
           </p:cNvPr>
@@ -9595,7 +9595,7 @@
           <p:cNvPr id="6" name="day2-arc">
             <a:extLst xmlns:a="http://schemas.openxmlformats.org/drawingml/2006/main">
               <a:ext uri="{FF2B5EF4-FFF2-40B4-BE49-F238E27FC236}">
-                <a16:creationId xmlns:a16="http://schemas.microsoft.com/office/drawing/2014/main" id="{F1E83C6A-6A66-441A-B388-6BEDC612B34D}"/>
+                <a16:creationId xmlns:a16="http://schemas.microsoft.com/office/drawing/2014/main" id="{B823F292-8921-4419-A441-2AD0D5CECDCA}"/>
               </a:ext>
             </a:extLst>
           </p:cNvPr>
@@ -9727,7 +9727,7 @@
           <p:cNvPr id="10" name="eyebrow">
             <a:extLst xmlns:a="http://schemas.openxmlformats.org/drawingml/2006/main">
               <a:ext uri="{FF2B5EF4-FFF2-40B4-BE49-F238E27FC236}">
-                <a16:creationId xmlns:a16="http://schemas.microsoft.com/office/drawing/2014/main" id="{9A56AFA4-7052-417D-A94F-BDAC7A3C2852}"/>
+                <a16:creationId xmlns:a16="http://schemas.microsoft.com/office/drawing/2014/main" id="{D6F614DF-FF4C-4963-AE51-09BD7ADF7E4B}"/>
               </a:ext>
             </a:extLst>
           </p:cNvPr>
@@ -9784,7 +9784,7 @@
           <p:cNvPr id="2" name="slide-title">
             <a:extLst xmlns:a="http://schemas.openxmlformats.org/drawingml/2006/main">
               <a:ext uri="{FF2B5EF4-FFF2-40B4-BE49-F238E27FC236}">
-                <a16:creationId xmlns:a16="http://schemas.microsoft.com/office/drawing/2014/main" id="{B21C73C6-83B1-47EC-A8B9-002C068B98D2}"/>
+                <a16:creationId xmlns:a16="http://schemas.microsoft.com/office/drawing/2014/main" id="{7075DD21-18FB-48B4-B04A-181C86905018}"/>
               </a:ext>
             </a:extLst>
           </p:cNvPr>
@@ -9841,7 +9841,7 @@
           <p:cNvPr id="3" name="">
             <a:extLst xmlns:a="http://schemas.openxmlformats.org/drawingml/2006/main">
               <a:ext uri="{FF2B5EF4-FFF2-40B4-BE49-F238E27FC236}">
-                <a16:creationId xmlns:a16="http://schemas.microsoft.com/office/drawing/2014/main" id="{5D1D1189-BD9F-4698-8528-5001A0CD3600}"/>
+                <a16:creationId xmlns:a16="http://schemas.microsoft.com/office/drawing/2014/main" id="{B5F7CBE6-FBF2-4B22-958E-F6D26B9FB575}"/>
               </a:ext>
             </a:extLst>
           </p:cNvPr>
@@ -9873,7 +9873,7 @@
           <p:cNvPr id="4" name="slide-number">
             <a:extLst xmlns:a="http://schemas.openxmlformats.org/drawingml/2006/main">
               <a:ext uri="{FF2B5EF4-FFF2-40B4-BE49-F238E27FC236}">
-                <a16:creationId xmlns:a16="http://schemas.microsoft.com/office/drawing/2014/main" id="{D761DA1C-9A5D-4A60-A643-C3DDAD3EC353}"/>
+                <a16:creationId xmlns:a16="http://schemas.microsoft.com/office/drawing/2014/main" id="{A6D7E068-F47C-4706-A13F-336AEA8067E5}"/>
               </a:ext>
             </a:extLst>
           </p:cNvPr>
@@ -9930,7 +9930,7 @@
           <p:cNvPr id="5" name="json-history">
             <a:extLst xmlns:a="http://schemas.openxmlformats.org/drawingml/2006/main">
               <a:ext uri="{FF2B5EF4-FFF2-40B4-BE49-F238E27FC236}">
-                <a16:creationId xmlns:a16="http://schemas.microsoft.com/office/drawing/2014/main" id="{D29F0EF0-6D6A-4D15-BCBC-C503F8EB6568}"/>
+                <a16:creationId xmlns:a16="http://schemas.microsoft.com/office/drawing/2014/main" id="{A5CB94A3-6D7F-46BE-84BC-019A8B6D0536}"/>
               </a:ext>
             </a:extLst>
           </p:cNvPr>
@@ -10033,7 +10033,7 @@
           <p:cNvPr id="6" name="">
             <a:extLst xmlns:a="http://schemas.openxmlformats.org/drawingml/2006/main">
               <a:ext uri="{FF2B5EF4-FFF2-40B4-BE49-F238E27FC236}">
-                <a16:creationId xmlns:a16="http://schemas.microsoft.com/office/drawing/2014/main" id="{6A8C2F1D-0EB6-49A7-AF92-B2A3D05634BD}"/>
+                <a16:creationId xmlns:a16="http://schemas.microsoft.com/office/drawing/2014/main" id="{405D6985-726F-4880-8350-824409C22E6A}"/>
               </a:ext>
             </a:extLst>
           </p:cNvPr>
@@ -10065,7 +10065,7 @@
           <p:cNvPr id="7" name="api-payload">
             <a:extLst xmlns:a="http://schemas.openxmlformats.org/drawingml/2006/main">
               <a:ext uri="{FF2B5EF4-FFF2-40B4-BE49-F238E27FC236}">
-                <a16:creationId xmlns:a16="http://schemas.microsoft.com/office/drawing/2014/main" id="{BDB32F7D-9EDF-4A67-99A1-493492F5008F}"/>
+                <a16:creationId xmlns:a16="http://schemas.microsoft.com/office/drawing/2014/main" id="{4BBE5480-23BE-4EE8-AD20-0763B8973D5F}"/>
               </a:ext>
             </a:extLst>
           </p:cNvPr>
@@ -10122,7 +10122,7 @@
           <p:cNvPr id="8" name="json-popularity">
             <a:extLst xmlns:a="http://schemas.openxmlformats.org/drawingml/2006/main">
               <a:ext uri="{FF2B5EF4-FFF2-40B4-BE49-F238E27FC236}">
-                <a16:creationId xmlns:a16="http://schemas.microsoft.com/office/drawing/2014/main" id="{20BD6D0D-23B5-4BBF-A06C-6C3E8EDC5BD6}"/>
+                <a16:creationId xmlns:a16="http://schemas.microsoft.com/office/drawing/2014/main" id="{AAA39145-B022-469C-8177-2ED677822E3A}"/>
               </a:ext>
             </a:extLst>
           </p:cNvPr>
@@ -10202,7 +10202,7 @@
           <p:cNvPr id="9" name="json-boundary">
             <a:extLst xmlns:a="http://schemas.openxmlformats.org/drawingml/2006/main">
               <a:ext uri="{FF2B5EF4-FFF2-40B4-BE49-F238E27FC236}">
-                <a16:creationId xmlns:a16="http://schemas.microsoft.com/office/drawing/2014/main" id="{53C7C06C-D099-4CE6-8D08-69F255E71B25}"/>
+                <a16:creationId xmlns:a16="http://schemas.microsoft.com/office/drawing/2014/main" id="{07189581-4765-4246-B346-E14F251CDD64}"/>
               </a:ext>
             </a:extLst>
           </p:cNvPr>
@@ -10288,7 +10288,7 @@
           <p:cNvPr id="7" name="eyebrow">
             <a:extLst xmlns:a="http://schemas.openxmlformats.org/drawingml/2006/main">
               <a:ext uri="{FF2B5EF4-FFF2-40B4-BE49-F238E27FC236}">
-                <a16:creationId xmlns:a16="http://schemas.microsoft.com/office/drawing/2014/main" id="{EE833A2D-2E37-44E6-98DA-E1FB2B9D97E8}"/>
+                <a16:creationId xmlns:a16="http://schemas.microsoft.com/office/drawing/2014/main" id="{E6B6D674-6C4B-4765-B930-6BCE147335D2}"/>
               </a:ext>
             </a:extLst>
           </p:cNvPr>
@@ -10345,7 +10345,7 @@
           <p:cNvPr id="2" name="slide-title">
             <a:extLst xmlns:a="http://schemas.openxmlformats.org/drawingml/2006/main">
               <a:ext uri="{FF2B5EF4-FFF2-40B4-BE49-F238E27FC236}">
-                <a16:creationId xmlns:a16="http://schemas.microsoft.com/office/drawing/2014/main" id="{AEBDC80A-F060-4297-A29C-E763D64BAF96}"/>
+                <a16:creationId xmlns:a16="http://schemas.microsoft.com/office/drawing/2014/main" id="{A437B82C-F46A-4492-AE4E-723BD09A459A}"/>
               </a:ext>
             </a:extLst>
           </p:cNvPr>
@@ -10402,7 +10402,7 @@
           <p:cNvPr id="3" name="">
             <a:extLst xmlns:a="http://schemas.openxmlformats.org/drawingml/2006/main">
               <a:ext uri="{FF2B5EF4-FFF2-40B4-BE49-F238E27FC236}">
-                <a16:creationId xmlns:a16="http://schemas.microsoft.com/office/drawing/2014/main" id="{6561E9AD-AD32-4CDA-BA2B-DBFE3B97C1AA}"/>
+                <a16:creationId xmlns:a16="http://schemas.microsoft.com/office/drawing/2014/main" id="{A8A8C822-1C7D-4C61-9D1C-28928ADD1626}"/>
               </a:ext>
             </a:extLst>
           </p:cNvPr>
@@ -10434,7 +10434,7 @@
           <p:cNvPr id="4" name="slide-number">
             <a:extLst xmlns:a="http://schemas.openxmlformats.org/drawingml/2006/main">
               <a:ext uri="{FF2B5EF4-FFF2-40B4-BE49-F238E27FC236}">
-                <a16:creationId xmlns:a16="http://schemas.microsoft.com/office/drawing/2014/main" id="{EF980854-8697-42DF-8490-E58B75EB2B29}"/>
+                <a16:creationId xmlns:a16="http://schemas.microsoft.com/office/drawing/2014/main" id="{3BEE8A1A-3464-4121-8A9F-8B033EC70C97}"/>
               </a:ext>
             </a:extLst>
           </p:cNvPr>
@@ -11032,7 +11032,7 @@
           <p:cNvPr id="6" name="json-root">
             <a:extLst xmlns:a="http://schemas.openxmlformats.org/drawingml/2006/main">
               <a:ext uri="{FF2B5EF4-FFF2-40B4-BE49-F238E27FC236}">
-                <a16:creationId xmlns:a16="http://schemas.microsoft.com/office/drawing/2014/main" id="{E4A1A01E-1883-4619-90D5-035BEF3C7363}"/>
+                <a16:creationId xmlns:a16="http://schemas.microsoft.com/office/drawing/2014/main" id="{9C450ED4-28C9-420A-B021-EE39530E7E83}"/>
               </a:ext>
             </a:extLst>
           </p:cNvPr>
@@ -11118,7 +11118,7 @@
           <p:cNvPr id="7" name="eyebrow">
             <a:extLst xmlns:a="http://schemas.openxmlformats.org/drawingml/2006/main">
               <a:ext uri="{FF2B5EF4-FFF2-40B4-BE49-F238E27FC236}">
-                <a16:creationId xmlns:a16="http://schemas.microsoft.com/office/drawing/2014/main" id="{120432E6-A32D-4518-8E10-5BBD232B5243}"/>
+                <a16:creationId xmlns:a16="http://schemas.microsoft.com/office/drawing/2014/main" id="{AC5A9199-3BAD-4573-8E75-C53BDCC64805}"/>
               </a:ext>
             </a:extLst>
           </p:cNvPr>
@@ -11175,7 +11175,7 @@
           <p:cNvPr id="2" name="slide-title">
             <a:extLst xmlns:a="http://schemas.openxmlformats.org/drawingml/2006/main">
               <a:ext uri="{FF2B5EF4-FFF2-40B4-BE49-F238E27FC236}">
-                <a16:creationId xmlns:a16="http://schemas.microsoft.com/office/drawing/2014/main" id="{48D1A37C-B051-4C7B-A297-3985528BC2BD}"/>
+                <a16:creationId xmlns:a16="http://schemas.microsoft.com/office/drawing/2014/main" id="{D71EBD2D-119A-480E-8F1E-B1A97366E1EB}"/>
               </a:ext>
             </a:extLst>
           </p:cNvPr>
@@ -11232,7 +11232,7 @@
           <p:cNvPr id="3" name="">
             <a:extLst xmlns:a="http://schemas.openxmlformats.org/drawingml/2006/main">
               <a:ext uri="{FF2B5EF4-FFF2-40B4-BE49-F238E27FC236}">
-                <a16:creationId xmlns:a16="http://schemas.microsoft.com/office/drawing/2014/main" id="{D6BB483E-651A-4260-B1A5-BA864CEF41AB}"/>
+                <a16:creationId xmlns:a16="http://schemas.microsoft.com/office/drawing/2014/main" id="{98CD3706-A828-44C3-A1E8-98BD7824772E}"/>
               </a:ext>
             </a:extLst>
           </p:cNvPr>
@@ -11264,7 +11264,7 @@
           <p:cNvPr id="4" name="slide-number">
             <a:extLst xmlns:a="http://schemas.openxmlformats.org/drawingml/2006/main">
               <a:ext uri="{FF2B5EF4-FFF2-40B4-BE49-F238E27FC236}">
-                <a16:creationId xmlns:a16="http://schemas.microsoft.com/office/drawing/2014/main" id="{A4AA82C0-A92D-4161-852C-AB27C1210360}"/>
+                <a16:creationId xmlns:a16="http://schemas.microsoft.com/office/drawing/2014/main" id="{1E494F07-43CF-48E6-B847-15CA0803C17C}"/>
               </a:ext>
             </a:extLst>
           </p:cNvPr>
@@ -11640,7 +11640,7 @@
           <p:cNvPr id="6" name="carry-forward">
             <a:extLst xmlns:a="http://schemas.openxmlformats.org/drawingml/2006/main">
               <a:ext uri="{FF2B5EF4-FFF2-40B4-BE49-F238E27FC236}">
-                <a16:creationId xmlns:a16="http://schemas.microsoft.com/office/drawing/2014/main" id="{277BA187-61B1-4FC3-B879-AB5C06F6934C}"/>
+                <a16:creationId xmlns:a16="http://schemas.microsoft.com/office/drawing/2014/main" id="{798D909C-C61E-4591-B0BA-A6FAC0170415}"/>
               </a:ext>
             </a:extLst>
           </p:cNvPr>
@@ -11749,7 +11749,7 @@
           <p:cNvPr id="9" name="eyebrow">
             <a:extLst xmlns:a="http://schemas.openxmlformats.org/drawingml/2006/main">
               <a:ext uri="{FF2B5EF4-FFF2-40B4-BE49-F238E27FC236}">
-                <a16:creationId xmlns:a16="http://schemas.microsoft.com/office/drawing/2014/main" id="{FAA45DC5-8104-47DC-939F-DED6B250954D}"/>
+                <a16:creationId xmlns:a16="http://schemas.microsoft.com/office/drawing/2014/main" id="{42C97682-BEE2-4463-A794-5C6DA430E74C}"/>
               </a:ext>
             </a:extLst>
           </p:cNvPr>
@@ -11806,7 +11806,7 @@
           <p:cNvPr id="2" name="slide-title">
             <a:extLst xmlns:a="http://schemas.openxmlformats.org/drawingml/2006/main">
               <a:ext uri="{FF2B5EF4-FFF2-40B4-BE49-F238E27FC236}">
-                <a16:creationId xmlns:a16="http://schemas.microsoft.com/office/drawing/2014/main" id="{7AE2A991-9F58-45F2-9A76-E6F15B2403A2}"/>
+                <a16:creationId xmlns:a16="http://schemas.microsoft.com/office/drawing/2014/main" id="{20AA89F2-DAF2-45F0-A29F-AFF96287A9B4}"/>
               </a:ext>
             </a:extLst>
           </p:cNvPr>
@@ -11863,7 +11863,7 @@
           <p:cNvPr id="3" name="">
             <a:extLst xmlns:a="http://schemas.openxmlformats.org/drawingml/2006/main">
               <a:ext uri="{FF2B5EF4-FFF2-40B4-BE49-F238E27FC236}">
-                <a16:creationId xmlns:a16="http://schemas.microsoft.com/office/drawing/2014/main" id="{7CEBFEEB-5550-4035-A50E-04AEE93CDBC6}"/>
+                <a16:creationId xmlns:a16="http://schemas.microsoft.com/office/drawing/2014/main" id="{5FE76721-6A73-4C54-BE81-BDDD2B1343E3}"/>
               </a:ext>
             </a:extLst>
           </p:cNvPr>
@@ -11895,7 +11895,7 @@
           <p:cNvPr id="4" name="slide-number">
             <a:extLst xmlns:a="http://schemas.openxmlformats.org/drawingml/2006/main">
               <a:ext uri="{FF2B5EF4-FFF2-40B4-BE49-F238E27FC236}">
-                <a16:creationId xmlns:a16="http://schemas.microsoft.com/office/drawing/2014/main" id="{85890BFC-04C2-4F40-A9FF-BD35AA04AB17}"/>
+                <a16:creationId xmlns:a16="http://schemas.microsoft.com/office/drawing/2014/main" id="{08FD0B4E-0F85-4520-A0E9-478E4C721DBF}"/>
               </a:ext>
             </a:extLst>
           </p:cNvPr>
@@ -11952,7 +11952,7 @@
           <p:cNvPr id="5" name="">
             <a:extLst xmlns:a="http://schemas.openxmlformats.org/drawingml/2006/main">
               <a:ext uri="{FF2B5EF4-FFF2-40B4-BE49-F238E27FC236}">
-                <a16:creationId xmlns:a16="http://schemas.microsoft.com/office/drawing/2014/main" id="{79EB7D2E-609B-43CD-83A1-E9419049B096}"/>
+                <a16:creationId xmlns:a16="http://schemas.microsoft.com/office/drawing/2014/main" id="{222263E1-8B1C-4A7D-8EB1-394771C5B9C4}"/>
               </a:ext>
             </a:extLst>
           </p:cNvPr>
@@ -11984,7 +11984,7 @@
           <p:cNvPr id="6" name="json-annotated">
             <a:extLst xmlns:a="http://schemas.openxmlformats.org/drawingml/2006/main">
               <a:ext uri="{FF2B5EF4-FFF2-40B4-BE49-F238E27FC236}">
-                <a16:creationId xmlns:a16="http://schemas.microsoft.com/office/drawing/2014/main" id="{C73DF3BD-1B45-4294-A39C-13C513D6EC2F}"/>
+                <a16:creationId xmlns:a16="http://schemas.microsoft.com/office/drawing/2014/main" id="{338DBB3E-3766-49A7-A89A-04D3D7229523}"/>
               </a:ext>
             </a:extLst>
           </p:cNvPr>
@@ -12179,7 +12179,7 @@
           <p:cNvPr id="7" name="punctuation">
             <a:extLst xmlns:a="http://schemas.openxmlformats.org/drawingml/2006/main">
               <a:ext uri="{FF2B5EF4-FFF2-40B4-BE49-F238E27FC236}">
-                <a16:creationId xmlns:a16="http://schemas.microsoft.com/office/drawing/2014/main" id="{537C8ACC-6B70-41F8-A6A2-EE2B294581B7}"/>
+                <a16:creationId xmlns:a16="http://schemas.microsoft.com/office/drawing/2014/main" id="{5C3B1228-D7A0-4FD3-BB36-48F5798E3D60}"/>
               </a:ext>
             </a:extLst>
           </p:cNvPr>
@@ -12320,7 +12320,7 @@
           <p:cNvPr id="8" name="json-format">
             <a:extLst xmlns:a="http://schemas.openxmlformats.org/drawingml/2006/main">
               <a:ext uri="{FF2B5EF4-FFF2-40B4-BE49-F238E27FC236}">
-                <a16:creationId xmlns:a16="http://schemas.microsoft.com/office/drawing/2014/main" id="{299D42EA-0BDA-481E-B33B-84FE935D1BC8}"/>
+                <a16:creationId xmlns:a16="http://schemas.microsoft.com/office/drawing/2014/main" id="{43C37019-E250-48B7-A159-83A1C2E942CC}"/>
               </a:ext>
             </a:extLst>
           </p:cNvPr>
@@ -12429,7 +12429,7 @@
           <p:cNvPr id="11" name="eyebrow">
             <a:extLst xmlns:a="http://schemas.openxmlformats.org/drawingml/2006/main">
               <a:ext uri="{FF2B5EF4-FFF2-40B4-BE49-F238E27FC236}">
-                <a16:creationId xmlns:a16="http://schemas.microsoft.com/office/drawing/2014/main" id="{05579456-3776-447B-AB1C-4DCA8C962B8C}"/>
+                <a16:creationId xmlns:a16="http://schemas.microsoft.com/office/drawing/2014/main" id="{DAE3A23A-C302-4250-97E3-482FD434F5B6}"/>
               </a:ext>
             </a:extLst>
           </p:cNvPr>
@@ -12486,7 +12486,7 @@
           <p:cNvPr id="2" name="slide-title">
             <a:extLst xmlns:a="http://schemas.openxmlformats.org/drawingml/2006/main">
               <a:ext uri="{FF2B5EF4-FFF2-40B4-BE49-F238E27FC236}">
-                <a16:creationId xmlns:a16="http://schemas.microsoft.com/office/drawing/2014/main" id="{2CF6FD0C-9A4B-4690-8742-2BBC9ABF4036}"/>
+                <a16:creationId xmlns:a16="http://schemas.microsoft.com/office/drawing/2014/main" id="{9A1191B7-9397-49D5-8885-14B59F28FA81}"/>
               </a:ext>
             </a:extLst>
           </p:cNvPr>
@@ -12543,7 +12543,7 @@
           <p:cNvPr id="3" name="">
             <a:extLst xmlns:a="http://schemas.openxmlformats.org/drawingml/2006/main">
               <a:ext uri="{FF2B5EF4-FFF2-40B4-BE49-F238E27FC236}">
-                <a16:creationId xmlns:a16="http://schemas.microsoft.com/office/drawing/2014/main" id="{2A878B21-362D-4673-8A98-A2C53F5212D1}"/>
+                <a16:creationId xmlns:a16="http://schemas.microsoft.com/office/drawing/2014/main" id="{319C2E5B-F5E1-4699-AD94-DC23E50A18BD}"/>
               </a:ext>
             </a:extLst>
           </p:cNvPr>
@@ -12575,7 +12575,7 @@
           <p:cNvPr id="4" name="slide-number">
             <a:extLst xmlns:a="http://schemas.openxmlformats.org/drawingml/2006/main">
               <a:ext uri="{FF2B5EF4-FFF2-40B4-BE49-F238E27FC236}">
-                <a16:creationId xmlns:a16="http://schemas.microsoft.com/office/drawing/2014/main" id="{B96A7BB0-9136-47B6-95B6-FBD9027C564E}"/>
+                <a16:creationId xmlns:a16="http://schemas.microsoft.com/office/drawing/2014/main" id="{C67FC01D-18AA-469F-BE80-4D465DED0BDC}"/>
               </a:ext>
             </a:extLst>
           </p:cNvPr>
@@ -12632,7 +12632,7 @@
           <p:cNvPr id="5" name="">
             <a:extLst xmlns:a="http://schemas.openxmlformats.org/drawingml/2006/main">
               <a:ext uri="{FF2B5EF4-FFF2-40B4-BE49-F238E27FC236}">
-                <a16:creationId xmlns:a16="http://schemas.microsoft.com/office/drawing/2014/main" id="{91B9B510-7A7E-422B-86A2-E93ECD17CF4D}"/>
+                <a16:creationId xmlns:a16="http://schemas.microsoft.com/office/drawing/2014/main" id="{D9B206F5-6750-49C5-9D64-5BC65190BB25}"/>
               </a:ext>
             </a:extLst>
           </p:cNvPr>
@@ -12664,7 +12664,7 @@
           <p:cNvPr id="6" name="invalid-json">
             <a:extLst xmlns:a="http://schemas.openxmlformats.org/drawingml/2006/main">
               <a:ext uri="{FF2B5EF4-FFF2-40B4-BE49-F238E27FC236}">
-                <a16:creationId xmlns:a16="http://schemas.microsoft.com/office/drawing/2014/main" id="{4959989D-A093-47C0-BF2C-98208AA74F14}"/>
+                <a16:creationId xmlns:a16="http://schemas.microsoft.com/office/drawing/2014/main" id="{CEDEF9CC-0DB5-48DB-8A03-4B1B080C6E73}"/>
               </a:ext>
             </a:extLst>
           </p:cNvPr>
@@ -12721,7 +12721,7 @@
           <p:cNvPr id="7" name="repair-reasons">
             <a:extLst xmlns:a="http://schemas.openxmlformats.org/drawingml/2006/main">
               <a:ext uri="{FF2B5EF4-FFF2-40B4-BE49-F238E27FC236}">
-                <a16:creationId xmlns:a16="http://schemas.microsoft.com/office/drawing/2014/main" id="{AF3D9FD7-2A0F-460A-AFC0-5A3075F6F650}"/>
+                <a16:creationId xmlns:a16="http://schemas.microsoft.com/office/drawing/2014/main" id="{052B28A4-5543-4ED7-81D5-FA7E7D43B884}"/>
               </a:ext>
             </a:extLst>
           </p:cNvPr>
@@ -12778,7 +12778,7 @@
           <p:cNvPr id="8" name="">
             <a:extLst xmlns:a="http://schemas.openxmlformats.org/drawingml/2006/main">
               <a:ext uri="{FF2B5EF4-FFF2-40B4-BE49-F238E27FC236}">
-                <a16:creationId xmlns:a16="http://schemas.microsoft.com/office/drawing/2014/main" id="{F80B2476-06EC-4684-ADB5-964A362F9BF4}"/>
+                <a16:creationId xmlns:a16="http://schemas.microsoft.com/office/drawing/2014/main" id="{9711687E-BB3F-439F-8231-393B16D1BF3D}"/>
               </a:ext>
             </a:extLst>
           </p:cNvPr>
@@ -12810,7 +12810,7 @@
           <p:cNvPr id="9" name="repaired-json">
             <a:extLst xmlns:a="http://schemas.openxmlformats.org/drawingml/2006/main">
               <a:ext uri="{FF2B5EF4-FFF2-40B4-BE49-F238E27FC236}">
-                <a16:creationId xmlns:a16="http://schemas.microsoft.com/office/drawing/2014/main" id="{AC82B620-6A3A-4DCF-A7D7-D161F4E4572E}"/>
+                <a16:creationId xmlns:a16="http://schemas.microsoft.com/office/drawing/2014/main" id="{B4D45046-92F5-4327-A35B-9D91302189B1}"/>
               </a:ext>
             </a:extLst>
           </p:cNvPr>
@@ -12867,7 +12867,7 @@
           <p:cNvPr id="10" name="syntax-repair">
             <a:extLst xmlns:a="http://schemas.openxmlformats.org/drawingml/2006/main">
               <a:ext uri="{FF2B5EF4-FFF2-40B4-BE49-F238E27FC236}">
-                <a16:creationId xmlns:a16="http://schemas.microsoft.com/office/drawing/2014/main" id="{5548D820-AEE7-45C6-AE0B-8C955988F13F}"/>
+                <a16:creationId xmlns:a16="http://schemas.microsoft.com/office/drawing/2014/main" id="{AAC211F5-0C83-44FF-AE29-461CC6FE0465}"/>
               </a:ext>
             </a:extLst>
           </p:cNvPr>
@@ -12976,7 +12976,7 @@
           <p:cNvPr id="7" name="eyebrow">
             <a:extLst xmlns:a="http://schemas.openxmlformats.org/drawingml/2006/main">
               <a:ext uri="{FF2B5EF4-FFF2-40B4-BE49-F238E27FC236}">
-                <a16:creationId xmlns:a16="http://schemas.microsoft.com/office/drawing/2014/main" id="{DB1F0E5F-8A4E-4A88-BB72-6A0387AAF8FC}"/>
+                <a16:creationId xmlns:a16="http://schemas.microsoft.com/office/drawing/2014/main" id="{8EEB89FE-D6D1-4E68-BE01-A45251599ADB}"/>
               </a:ext>
             </a:extLst>
           </p:cNvPr>
@@ -13033,7 +13033,7 @@
           <p:cNvPr id="2" name="slide-title">
             <a:extLst xmlns:a="http://schemas.openxmlformats.org/drawingml/2006/main">
               <a:ext uri="{FF2B5EF4-FFF2-40B4-BE49-F238E27FC236}">
-                <a16:creationId xmlns:a16="http://schemas.microsoft.com/office/drawing/2014/main" id="{B6A797B8-3CAD-440C-B481-63C84C8345B0}"/>
+                <a16:creationId xmlns:a16="http://schemas.microsoft.com/office/drawing/2014/main" id="{1F61B8BB-2B51-424C-8A93-9A20AC19924C}"/>
               </a:ext>
             </a:extLst>
           </p:cNvPr>
@@ -13090,7 +13090,7 @@
           <p:cNvPr id="3" name="">
             <a:extLst xmlns:a="http://schemas.openxmlformats.org/drawingml/2006/main">
               <a:ext uri="{FF2B5EF4-FFF2-40B4-BE49-F238E27FC236}">
-                <a16:creationId xmlns:a16="http://schemas.microsoft.com/office/drawing/2014/main" id="{8E598BD9-7840-42B9-BB6D-E03EFC667494}"/>
+                <a16:creationId xmlns:a16="http://schemas.microsoft.com/office/drawing/2014/main" id="{A8F332EC-6797-4723-B2CA-5013A9F70CBB}"/>
               </a:ext>
             </a:extLst>
           </p:cNvPr>
@@ -13122,7 +13122,7 @@
           <p:cNvPr id="4" name="slide-number">
             <a:extLst xmlns:a="http://schemas.openxmlformats.org/drawingml/2006/main">
               <a:ext uri="{FF2B5EF4-FFF2-40B4-BE49-F238E27FC236}">
-                <a16:creationId xmlns:a16="http://schemas.microsoft.com/office/drawing/2014/main" id="{282386F6-8821-42D9-AE7E-8B716ECABE93}"/>
+                <a16:creationId xmlns:a16="http://schemas.microsoft.com/office/drawing/2014/main" id="{A37619F8-FFA9-43B2-A67A-BAE1804AF389}"/>
               </a:ext>
             </a:extLst>
           </p:cNvPr>
@@ -13451,7 +13451,7 @@
           <p:cNvPr id="6" name="value-contract">
             <a:extLst xmlns:a="http://schemas.openxmlformats.org/drawingml/2006/main">
               <a:ext uri="{FF2B5EF4-FFF2-40B4-BE49-F238E27FC236}">
-                <a16:creationId xmlns:a16="http://schemas.microsoft.com/office/drawing/2014/main" id="{E2B83C21-1C4B-44D6-B79A-F139DF3FDD5D}"/>
+                <a16:creationId xmlns:a16="http://schemas.microsoft.com/office/drawing/2014/main" id="{0DB3074A-0176-4032-AD57-5AEE8E135161}"/>
               </a:ext>
             </a:extLst>
           </p:cNvPr>
@@ -13560,7 +13560,7 @@
           <p:cNvPr id="9" name="eyebrow">
             <a:extLst xmlns:a="http://schemas.openxmlformats.org/drawingml/2006/main">
               <a:ext uri="{FF2B5EF4-FFF2-40B4-BE49-F238E27FC236}">
-                <a16:creationId xmlns:a16="http://schemas.microsoft.com/office/drawing/2014/main" id="{497844DE-BF12-4DD8-A5F6-D809BD090200}"/>
+                <a16:creationId xmlns:a16="http://schemas.microsoft.com/office/drawing/2014/main" id="{DF4087FD-E8A3-4119-9D6E-1FD92BDB828F}"/>
               </a:ext>
             </a:extLst>
           </p:cNvPr>
@@ -13617,7 +13617,7 @@
           <p:cNvPr id="2" name="slide-title">
             <a:extLst xmlns:a="http://schemas.openxmlformats.org/drawingml/2006/main">
               <a:ext uri="{FF2B5EF4-FFF2-40B4-BE49-F238E27FC236}">
-                <a16:creationId xmlns:a16="http://schemas.microsoft.com/office/drawing/2014/main" id="{9E977691-3730-4B34-86B1-E7EB4BE016C9}"/>
+                <a16:creationId xmlns:a16="http://schemas.microsoft.com/office/drawing/2014/main" id="{006CF276-C65A-4857-81EC-99FCD42DBAD3}"/>
               </a:ext>
             </a:extLst>
           </p:cNvPr>
@@ -13674,7 +13674,7 @@
           <p:cNvPr id="3" name="">
             <a:extLst xmlns:a="http://schemas.openxmlformats.org/drawingml/2006/main">
               <a:ext uri="{FF2B5EF4-FFF2-40B4-BE49-F238E27FC236}">
-                <a16:creationId xmlns:a16="http://schemas.microsoft.com/office/drawing/2014/main" id="{067FA860-1119-45BC-B2B6-327AA90F8772}"/>
+                <a16:creationId xmlns:a16="http://schemas.microsoft.com/office/drawing/2014/main" id="{4DBF55D4-7AB0-4F51-935E-1D289FBDB733}"/>
               </a:ext>
             </a:extLst>
           </p:cNvPr>
@@ -13706,7 +13706,7 @@
           <p:cNvPr id="4" name="slide-number">
             <a:extLst xmlns:a="http://schemas.openxmlformats.org/drawingml/2006/main">
               <a:ext uri="{FF2B5EF4-FFF2-40B4-BE49-F238E27FC236}">
-                <a16:creationId xmlns:a16="http://schemas.microsoft.com/office/drawing/2014/main" id="{557671B9-85FA-4B5B-A485-B5166DA0EF73}"/>
+                <a16:creationId xmlns:a16="http://schemas.microsoft.com/office/drawing/2014/main" id="{01D2F612-AF2D-4A9D-87F0-568335ACFF59}"/>
               </a:ext>
             </a:extLst>
           </p:cNvPr>
@@ -13763,7 +13763,7 @@
           <p:cNvPr id="5" name="">
             <a:extLst xmlns:a="http://schemas.openxmlformats.org/drawingml/2006/main">
               <a:ext uri="{FF2B5EF4-FFF2-40B4-BE49-F238E27FC236}">
-                <a16:creationId xmlns:a16="http://schemas.microsoft.com/office/drawing/2014/main" id="{A970696A-40B4-4AB4-A020-F3A64E08D37A}"/>
+                <a16:creationId xmlns:a16="http://schemas.microsoft.com/office/drawing/2014/main" id="{8F900262-E942-4387-ACDF-C12CC23980E4}"/>
               </a:ext>
             </a:extLst>
           </p:cNvPr>
@@ -13795,7 +13795,7 @@
           <p:cNvPr id="6" name="date-json">
             <a:extLst xmlns:a="http://schemas.openxmlformats.org/drawingml/2006/main">
               <a:ext uri="{FF2B5EF4-FFF2-40B4-BE49-F238E27FC236}">
-                <a16:creationId xmlns:a16="http://schemas.microsoft.com/office/drawing/2014/main" id="{8913216F-08BC-4737-BB8C-390DBD3B639D}"/>
+                <a16:creationId xmlns:a16="http://schemas.microsoft.com/office/drawing/2014/main" id="{00E4B348-9A76-41A9-8853-F440A6678C1D}"/>
               </a:ext>
             </a:extLst>
           </p:cNvPr>
@@ -13852,7 +13852,7 @@
           <p:cNvPr id="7" name="bson-date">
             <a:extLst xmlns:a="http://schemas.openxmlformats.org/drawingml/2006/main">
               <a:ext uri="{FF2B5EF4-FFF2-40B4-BE49-F238E27FC236}">
-                <a16:creationId xmlns:a16="http://schemas.microsoft.com/office/drawing/2014/main" id="{0CB6B210-1BC8-415C-A967-5BACC1621B8B}"/>
+                <a16:creationId xmlns:a16="http://schemas.microsoft.com/office/drawing/2014/main" id="{27E81948-6451-484B-97DC-C0C6D767EFC9}"/>
               </a:ext>
             </a:extLst>
           </p:cNvPr>
@@ -13960,7 +13960,7 @@
           <p:cNvPr id="8" name="json-contract">
             <a:extLst xmlns:a="http://schemas.openxmlformats.org/drawingml/2006/main">
               <a:ext uri="{FF2B5EF4-FFF2-40B4-BE49-F238E27FC236}">
-                <a16:creationId xmlns:a16="http://schemas.microsoft.com/office/drawing/2014/main" id="{957BCCE0-FD77-452F-823E-FE3D7B81E867}"/>
+                <a16:creationId xmlns:a16="http://schemas.microsoft.com/office/drawing/2014/main" id="{1FB27AB7-96BF-4DC5-A2BA-DE87BC4A5E9C}"/>
               </a:ext>
             </a:extLst>
           </p:cNvPr>
@@ -14069,7 +14069,7 @@
           <p:cNvPr id="7" name="eyebrow">
             <a:extLst xmlns:a="http://schemas.openxmlformats.org/drawingml/2006/main">
               <a:ext uri="{FF2B5EF4-FFF2-40B4-BE49-F238E27FC236}">
-                <a16:creationId xmlns:a16="http://schemas.microsoft.com/office/drawing/2014/main" id="{64F556E4-5A91-4766-B394-466F85E7CEE4}"/>
+                <a16:creationId xmlns:a16="http://schemas.microsoft.com/office/drawing/2014/main" id="{0F80A8C6-13D2-49AD-97DC-69D5F9C61CC6}"/>
               </a:ext>
             </a:extLst>
           </p:cNvPr>
@@ -14126,7 +14126,7 @@
           <p:cNvPr id="2" name="slide-title">
             <a:extLst xmlns:a="http://schemas.openxmlformats.org/drawingml/2006/main">
               <a:ext uri="{FF2B5EF4-FFF2-40B4-BE49-F238E27FC236}">
-                <a16:creationId xmlns:a16="http://schemas.microsoft.com/office/drawing/2014/main" id="{8EE7E622-366B-44C4-A7A4-DA3460571F5D}"/>
+                <a16:creationId xmlns:a16="http://schemas.microsoft.com/office/drawing/2014/main" id="{9EDD9EA9-66A5-4E4A-B59B-71D656D6C015}"/>
               </a:ext>
             </a:extLst>
           </p:cNvPr>
@@ -14183,7 +14183,7 @@
           <p:cNvPr id="3" name="">
             <a:extLst xmlns:a="http://schemas.openxmlformats.org/drawingml/2006/main">
               <a:ext uri="{FF2B5EF4-FFF2-40B4-BE49-F238E27FC236}">
-                <a16:creationId xmlns:a16="http://schemas.microsoft.com/office/drawing/2014/main" id="{4FFB665E-0B90-4AD8-9566-14680236279D}"/>
+                <a16:creationId xmlns:a16="http://schemas.microsoft.com/office/drawing/2014/main" id="{4499C5B0-81AD-45F1-A866-BCCBF59668CE}"/>
               </a:ext>
             </a:extLst>
           </p:cNvPr>
@@ -14215,7 +14215,7 @@
           <p:cNvPr id="4" name="slide-number">
             <a:extLst xmlns:a="http://schemas.openxmlformats.org/drawingml/2006/main">
               <a:ext uri="{FF2B5EF4-FFF2-40B4-BE49-F238E27FC236}">
-                <a16:creationId xmlns:a16="http://schemas.microsoft.com/office/drawing/2014/main" id="{B84174C9-1414-4404-AD18-3DE198AC8EE6}"/>
+                <a16:creationId xmlns:a16="http://schemas.microsoft.com/office/drawing/2014/main" id="{1C09C4C1-AA23-4F84-810E-1F9A9B7FBE0C}"/>
               </a:ext>
             </a:extLst>
           </p:cNvPr>
@@ -14520,7 +14520,7 @@
           <p:cNvPr id="6" name="example-contract">
             <a:extLst xmlns:a="http://schemas.openxmlformats.org/drawingml/2006/main">
               <a:ext uri="{FF2B5EF4-FFF2-40B4-BE49-F238E27FC236}">
-                <a16:creationId xmlns:a16="http://schemas.microsoft.com/office/drawing/2014/main" id="{D8D1EF7D-729F-4D17-833F-6D2C5F0D687A}"/>
+                <a16:creationId xmlns:a16="http://schemas.microsoft.com/office/drawing/2014/main" id="{1D91DFB0-739A-48EF-8544-D0D767021AB6}"/>
               </a:ext>
             </a:extLst>
           </p:cNvPr>
@@ -14629,7 +14629,7 @@
           <p:cNvPr id="8" name="eyebrow">
             <a:extLst xmlns:a="http://schemas.openxmlformats.org/drawingml/2006/main">
               <a:ext uri="{FF2B5EF4-FFF2-40B4-BE49-F238E27FC236}">
-                <a16:creationId xmlns:a16="http://schemas.microsoft.com/office/drawing/2014/main" id="{EC09518E-DCBD-4B43-8C52-7B59053D8CF7}"/>
+                <a16:creationId xmlns:a16="http://schemas.microsoft.com/office/drawing/2014/main" id="{D4D7E6BC-255D-4A76-85BE-5728D4A25CA4}"/>
               </a:ext>
             </a:extLst>
           </p:cNvPr>
@@ -14686,7 +14686,7 @@
           <p:cNvPr id="2" name="slide-title">
             <a:extLst xmlns:a="http://schemas.openxmlformats.org/drawingml/2006/main">
               <a:ext uri="{FF2B5EF4-FFF2-40B4-BE49-F238E27FC236}">
-                <a16:creationId xmlns:a16="http://schemas.microsoft.com/office/drawing/2014/main" id="{8E1CD98D-5537-4B90-B86D-19A157BB99A2}"/>
+                <a16:creationId xmlns:a16="http://schemas.microsoft.com/office/drawing/2014/main" id="{4739714D-2BD6-40CC-89DF-A750B4E3D7F4}"/>
               </a:ext>
             </a:extLst>
           </p:cNvPr>
@@ -14743,7 +14743,7 @@
           <p:cNvPr id="3" name="">
             <a:extLst xmlns:a="http://schemas.openxmlformats.org/drawingml/2006/main">
               <a:ext uri="{FF2B5EF4-FFF2-40B4-BE49-F238E27FC236}">
-                <a16:creationId xmlns:a16="http://schemas.microsoft.com/office/drawing/2014/main" id="{5D884E23-E18B-49FC-AFA6-76FD924D3AC9}"/>
+                <a16:creationId xmlns:a16="http://schemas.microsoft.com/office/drawing/2014/main" id="{11C6ACE6-4981-4307-B989-6C35CFDAB004}"/>
               </a:ext>
             </a:extLst>
           </p:cNvPr>
@@ -14775,7 +14775,7 @@
           <p:cNvPr id="4" name="slide-number">
             <a:extLst xmlns:a="http://schemas.openxmlformats.org/drawingml/2006/main">
               <a:ext uri="{FF2B5EF4-FFF2-40B4-BE49-F238E27FC236}">
-                <a16:creationId xmlns:a16="http://schemas.microsoft.com/office/drawing/2014/main" id="{4F236E68-F0D2-44D2-A019-67C7306984E2}"/>
+                <a16:creationId xmlns:a16="http://schemas.microsoft.com/office/drawing/2014/main" id="{D9BBDE08-CA19-4E57-A682-3704D802681C}"/>
               </a:ext>
             </a:extLst>
           </p:cNvPr>
@@ -14832,7 +14832,7 @@
           <p:cNvPr id="5" name="">
             <a:extLst xmlns:a="http://schemas.openxmlformats.org/drawingml/2006/main">
               <a:ext uri="{FF2B5EF4-FFF2-40B4-BE49-F238E27FC236}">
-                <a16:creationId xmlns:a16="http://schemas.microsoft.com/office/drawing/2014/main" id="{D85C4DF3-2659-4E5C-A6CC-B5078514A1C3}"/>
+                <a16:creationId xmlns:a16="http://schemas.microsoft.com/office/drawing/2014/main" id="{EFB15452-8B74-4D49-AD8B-1541EDBAFA0D}"/>
               </a:ext>
             </a:extLst>
           </p:cNvPr>
@@ -14864,7 +14864,7 @@
           <p:cNvPr id="6" name="referenced-json">
             <a:extLst xmlns:a="http://schemas.openxmlformats.org/drawingml/2006/main">
               <a:ext uri="{FF2B5EF4-FFF2-40B4-BE49-F238E27FC236}">
-                <a16:creationId xmlns:a16="http://schemas.microsoft.com/office/drawing/2014/main" id="{A408B927-5514-45CF-98BA-1FCB3859D903}"/>
+                <a16:creationId xmlns:a16="http://schemas.microsoft.com/office/drawing/2014/main" id="{6AD27BF2-CC14-4177-8E6E-A590BEE118BB}"/>
               </a:ext>
             </a:extLst>
           </p:cNvPr>
@@ -15266,7 +15266,7 @@
           <p:cNvPr id="7" name="reference-envelope">
             <a:extLst xmlns:a="http://schemas.openxmlformats.org/drawingml/2006/main">
               <a:ext uri="{FF2B5EF4-FFF2-40B4-BE49-F238E27FC236}">
-                <a16:creationId xmlns:a16="http://schemas.microsoft.com/office/drawing/2014/main" id="{C7636328-6847-45D8-825C-D28E59C77AD3}"/>
+                <a16:creationId xmlns:a16="http://schemas.microsoft.com/office/drawing/2014/main" id="{3AD8BB6C-9CAD-4A4D-9EC7-306B91CD6EF3}"/>
               </a:ext>
             </a:extLst>
           </p:cNvPr>
@@ -15352,7 +15352,7 @@
           <p:cNvPr id="8" name="eyebrow">
             <a:extLst xmlns:a="http://schemas.openxmlformats.org/drawingml/2006/main">
               <a:ext uri="{FF2B5EF4-FFF2-40B4-BE49-F238E27FC236}">
-                <a16:creationId xmlns:a16="http://schemas.microsoft.com/office/drawing/2014/main" id="{7209634B-D4D3-40DA-B2A0-E4EEEF12AC8D}"/>
+                <a16:creationId xmlns:a16="http://schemas.microsoft.com/office/drawing/2014/main" id="{C5828912-B2AA-494E-871D-11F54D78AEFB}"/>
               </a:ext>
             </a:extLst>
           </p:cNvPr>
@@ -15409,7 +15409,7 @@
           <p:cNvPr id="2" name="slide-title">
             <a:extLst xmlns:a="http://schemas.openxmlformats.org/drawingml/2006/main">
               <a:ext uri="{FF2B5EF4-FFF2-40B4-BE49-F238E27FC236}">
-                <a16:creationId xmlns:a16="http://schemas.microsoft.com/office/drawing/2014/main" id="{6DD90FA7-BAE1-49E7-BC98-51FCC6CCF3EB}"/>
+                <a16:creationId xmlns:a16="http://schemas.microsoft.com/office/drawing/2014/main" id="{1D404E72-46FA-45C0-90B2-7207BEB319DA}"/>
               </a:ext>
             </a:extLst>
           </p:cNvPr>
@@ -15466,7 +15466,7 @@
           <p:cNvPr id="3" name="">
             <a:extLst xmlns:a="http://schemas.openxmlformats.org/drawingml/2006/main">
               <a:ext uri="{FF2B5EF4-FFF2-40B4-BE49-F238E27FC236}">
-                <a16:creationId xmlns:a16="http://schemas.microsoft.com/office/drawing/2014/main" id="{5F002C70-48F9-4164-AC1A-D179B78F19D6}"/>
+                <a16:creationId xmlns:a16="http://schemas.microsoft.com/office/drawing/2014/main" id="{9381DEC1-D6E4-46D1-8BD1-72FBB77F72B0}"/>
               </a:ext>
             </a:extLst>
           </p:cNvPr>
@@ -15498,7 +15498,7 @@
           <p:cNvPr id="4" name="slide-number">
             <a:extLst xmlns:a="http://schemas.openxmlformats.org/drawingml/2006/main">
               <a:ext uri="{FF2B5EF4-FFF2-40B4-BE49-F238E27FC236}">
-                <a16:creationId xmlns:a16="http://schemas.microsoft.com/office/drawing/2014/main" id="{9FD2E31B-9084-4132-BDDD-ED2D28F67F3E}"/>
+                <a16:creationId xmlns:a16="http://schemas.microsoft.com/office/drawing/2014/main" id="{117E99A4-2261-4CFC-A0AF-E2AAA41AD9BC}"/>
               </a:ext>
             </a:extLst>
           </p:cNvPr>
@@ -15555,7 +15555,7 @@
           <p:cNvPr id="5" name="">
             <a:extLst xmlns:a="http://schemas.openxmlformats.org/drawingml/2006/main">
               <a:ext uri="{FF2B5EF4-FFF2-40B4-BE49-F238E27FC236}">
-                <a16:creationId xmlns:a16="http://schemas.microsoft.com/office/drawing/2014/main" id="{E41672D5-86E8-4C63-9039-AC0F255690ED}"/>
+                <a16:creationId xmlns:a16="http://schemas.microsoft.com/office/drawing/2014/main" id="{EF1EBCF8-FE81-4761-9EAB-F510E2C4C800}"/>
               </a:ext>
             </a:extLst>
           </p:cNvPr>
@@ -15587,7 +15587,7 @@
           <p:cNvPr id="6" name="embedded-json">
             <a:extLst xmlns:a="http://schemas.openxmlformats.org/drawingml/2006/main">
               <a:ext uri="{FF2B5EF4-FFF2-40B4-BE49-F238E27FC236}">
-                <a16:creationId xmlns:a16="http://schemas.microsoft.com/office/drawing/2014/main" id="{3287262A-3E7B-4F97-9E29-989CCD1B66A5}"/>
+                <a16:creationId xmlns:a16="http://schemas.microsoft.com/office/drawing/2014/main" id="{4267A221-DA58-44E1-A162-B1723EF4CB32}"/>
               </a:ext>
             </a:extLst>
           </p:cNvPr>
@@ -15920,7 +15920,7 @@
           <p:cNvPr id="7" name="containment-meaning">
             <a:extLst xmlns:a="http://schemas.openxmlformats.org/drawingml/2006/main">
               <a:ext uri="{FF2B5EF4-FFF2-40B4-BE49-F238E27FC236}">
-                <a16:creationId xmlns:a16="http://schemas.microsoft.com/office/drawing/2014/main" id="{30588D28-4A79-4177-BD48-6169BCC6F791}"/>
+                <a16:creationId xmlns:a16="http://schemas.microsoft.com/office/drawing/2014/main" id="{BEC2A35F-15E7-416D-9421-5D3FBE4D6E48}"/>
               </a:ext>
             </a:extLst>
           </p:cNvPr>
@@ -16029,7 +16029,7 @@
           <p:cNvPr id="7" name="eyebrow">
             <a:extLst xmlns:a="http://schemas.openxmlformats.org/drawingml/2006/main">
               <a:ext uri="{FF2B5EF4-FFF2-40B4-BE49-F238E27FC236}">
-                <a16:creationId xmlns:a16="http://schemas.microsoft.com/office/drawing/2014/main" id="{8963ADF2-90B0-44FF-A1D8-7F2B46F80548}"/>
+                <a16:creationId xmlns:a16="http://schemas.microsoft.com/office/drawing/2014/main" id="{601F2E77-E76A-4BEF-954E-C20587E2B504}"/>
               </a:ext>
             </a:extLst>
           </p:cNvPr>
@@ -16086,7 +16086,7 @@
           <p:cNvPr id="2" name="slide-title">
             <a:extLst xmlns:a="http://schemas.openxmlformats.org/drawingml/2006/main">
               <a:ext uri="{FF2B5EF4-FFF2-40B4-BE49-F238E27FC236}">
-                <a16:creationId xmlns:a16="http://schemas.microsoft.com/office/drawing/2014/main" id="{BACABD33-20C2-4D2E-832C-5F6727A9E6BB}"/>
+                <a16:creationId xmlns:a16="http://schemas.microsoft.com/office/drawing/2014/main" id="{36333822-D4DD-45CB-98DD-C337DA6D36D4}"/>
               </a:ext>
             </a:extLst>
           </p:cNvPr>
@@ -16143,7 +16143,7 @@
           <p:cNvPr id="3" name="">
             <a:extLst xmlns:a="http://schemas.openxmlformats.org/drawingml/2006/main">
               <a:ext uri="{FF2B5EF4-FFF2-40B4-BE49-F238E27FC236}">
-                <a16:creationId xmlns:a16="http://schemas.microsoft.com/office/drawing/2014/main" id="{FF563524-31A0-4CEB-8280-4F26B4AB82FB}"/>
+                <a16:creationId xmlns:a16="http://schemas.microsoft.com/office/drawing/2014/main" id="{A7AC58B1-4076-4DD8-B525-7D0280FA121E}"/>
               </a:ext>
             </a:extLst>
           </p:cNvPr>
@@ -16175,7 +16175,7 @@
           <p:cNvPr id="4" name="slide-number">
             <a:extLst xmlns:a="http://schemas.openxmlformats.org/drawingml/2006/main">
               <a:ext uri="{FF2B5EF4-FFF2-40B4-BE49-F238E27FC236}">
-                <a16:creationId xmlns:a16="http://schemas.microsoft.com/office/drawing/2014/main" id="{32644844-4FE7-47CF-A2DE-B07B2FA934C8}"/>
+                <a16:creationId xmlns:a16="http://schemas.microsoft.com/office/drawing/2014/main" id="{B5CE97FA-DA73-413A-9E1B-131E6BCAE617}"/>
               </a:ext>
             </a:extLst>
           </p:cNvPr>
@@ -16454,7 +16454,7 @@
           <p:cNvPr id="6" name="name-difference">
             <a:extLst xmlns:a="http://schemas.openxmlformats.org/drawingml/2006/main">
               <a:ext uri="{FF2B5EF4-FFF2-40B4-BE49-F238E27FC236}">
-                <a16:creationId xmlns:a16="http://schemas.microsoft.com/office/drawing/2014/main" id="{5B5D66F5-E4DB-4DEE-B2D1-85177CA71141}"/>
+                <a16:creationId xmlns:a16="http://schemas.microsoft.com/office/drawing/2014/main" id="{F54A3B2E-61FE-4A5B-AD95-7E81D132DAAF}"/>
               </a:ext>
             </a:extLst>
           </p:cNvPr>
@@ -16563,7 +16563,7 @@
           <p:cNvPr id="12" name="eyebrow">
             <a:extLst xmlns:a="http://schemas.openxmlformats.org/drawingml/2006/main">
               <a:ext uri="{FF2B5EF4-FFF2-40B4-BE49-F238E27FC236}">
-                <a16:creationId xmlns:a16="http://schemas.microsoft.com/office/drawing/2014/main" id="{2406CAEE-E590-42DC-81B7-B79CE5503CB8}"/>
+                <a16:creationId xmlns:a16="http://schemas.microsoft.com/office/drawing/2014/main" id="{C5637C7F-7A6A-47B7-96F9-96A98F6AE6D5}"/>
               </a:ext>
             </a:extLst>
           </p:cNvPr>
@@ -16620,7 +16620,7 @@
           <p:cNvPr id="2" name="slide-title">
             <a:extLst xmlns:a="http://schemas.openxmlformats.org/drawingml/2006/main">
               <a:ext uri="{FF2B5EF4-FFF2-40B4-BE49-F238E27FC236}">
-                <a16:creationId xmlns:a16="http://schemas.microsoft.com/office/drawing/2014/main" id="{55670099-539C-4688-9ABF-2AE8ECFEA424}"/>
+                <a16:creationId xmlns:a16="http://schemas.microsoft.com/office/drawing/2014/main" id="{BC61F6B7-09A5-4CBC-A132-403F268900BE}"/>
               </a:ext>
             </a:extLst>
           </p:cNvPr>
@@ -16677,7 +16677,7 @@
           <p:cNvPr id="3" name="">
             <a:extLst xmlns:a="http://schemas.openxmlformats.org/drawingml/2006/main">
               <a:ext uri="{FF2B5EF4-FFF2-40B4-BE49-F238E27FC236}">
-                <a16:creationId xmlns:a16="http://schemas.microsoft.com/office/drawing/2014/main" id="{208DCA50-3EC7-4F0D-8B81-7A3E671E62B0}"/>
+                <a16:creationId xmlns:a16="http://schemas.microsoft.com/office/drawing/2014/main" id="{445BBC59-CD99-4E22-A830-22D89FBAEA39}"/>
               </a:ext>
             </a:extLst>
           </p:cNvPr>
@@ -16709,7 +16709,7 @@
           <p:cNvPr id="4" name="slide-number">
             <a:extLst xmlns:a="http://schemas.openxmlformats.org/drawingml/2006/main">
               <a:ext uri="{FF2B5EF4-FFF2-40B4-BE49-F238E27FC236}">
-                <a16:creationId xmlns:a16="http://schemas.microsoft.com/office/drawing/2014/main" id="{416289A4-BF59-4A25-9819-22EA55DFFAAF}"/>
+                <a16:creationId xmlns:a16="http://schemas.microsoft.com/office/drawing/2014/main" id="{91247647-689F-4970-82AA-3077EBA53B28}"/>
               </a:ext>
             </a:extLst>
           </p:cNvPr>
@@ -16766,7 +16766,7 @@
           <p:cNvPr id="5" name="">
             <a:extLst xmlns:a="http://schemas.openxmlformats.org/drawingml/2006/main">
               <a:ext uri="{FF2B5EF4-FFF2-40B4-BE49-F238E27FC236}">
-                <a16:creationId xmlns:a16="http://schemas.microsoft.com/office/drawing/2014/main" id="{6033E017-437A-47C4-BD40-351601115AB0}"/>
+                <a16:creationId xmlns:a16="http://schemas.microsoft.com/office/drawing/2014/main" id="{0C23444C-92E8-422D-BCB6-6190969A1EB0}"/>
               </a:ext>
             </a:extLst>
           </p:cNvPr>
@@ -16798,7 +16798,7 @@
           <p:cNvPr id="6" name="node-Ticket document">
             <a:extLst xmlns:a="http://schemas.openxmlformats.org/drawingml/2006/main">
               <a:ext uri="{FF2B5EF4-FFF2-40B4-BE49-F238E27FC236}">
-                <a16:creationId xmlns:a16="http://schemas.microsoft.com/office/drawing/2014/main" id="{6F01556F-5D6A-4D57-9BEA-DEA605BD84B7}"/>
+                <a16:creationId xmlns:a16="http://schemas.microsoft.com/office/drawing/2014/main" id="{7735879F-A8E9-4E83-BB42-5A1FD0C369FE}"/>
               </a:ext>
             </a:extLst>
           </p:cNvPr>
@@ -16855,7 +16855,7 @@
           <p:cNvPr id="7" name="">
             <a:extLst xmlns:a="http://schemas.openxmlformats.org/drawingml/2006/main">
               <a:ext uri="{FF2B5EF4-FFF2-40B4-BE49-F238E27FC236}">
-                <a16:creationId xmlns:a16="http://schemas.microsoft.com/office/drawing/2014/main" id="{B00E9231-C91B-47C6-B250-465E03803E74}"/>
+                <a16:creationId xmlns:a16="http://schemas.microsoft.com/office/drawing/2014/main" id="{D39953FD-D064-45AF-AF60-F25B15F49FAF}"/>
               </a:ext>
             </a:extLst>
           </p:cNvPr>
@@ -16887,7 +16887,7 @@
           <p:cNvPr id="8" name="node-Separate event records">
             <a:extLst xmlns:a="http://schemas.openxmlformats.org/drawingml/2006/main">
               <a:ext uri="{FF2B5EF4-FFF2-40B4-BE49-F238E27FC236}">
-                <a16:creationId xmlns:a16="http://schemas.microsoft.com/office/drawing/2014/main" id="{C6AEBD99-ED80-4C7E-BE61-26EBF80CF7D2}"/>
+                <a16:creationId xmlns:a16="http://schemas.microsoft.com/office/drawing/2014/main" id="{B8958626-66C0-4365-8B27-6D8CD8A230E7}"/>
               </a:ext>
             </a:extLst>
           </p:cNvPr>
@@ -16944,7 +16944,7 @@
           <p:cNvPr id="9" name="bounded-body">
             <a:extLst xmlns:a="http://schemas.openxmlformats.org/drawingml/2006/main">
               <a:ext uri="{FF2B5EF4-FFF2-40B4-BE49-F238E27FC236}">
-                <a16:creationId xmlns:a16="http://schemas.microsoft.com/office/drawing/2014/main" id="{49EEBF6A-F2B8-4648-92F1-A36F8AE00ECB}"/>
+                <a16:creationId xmlns:a16="http://schemas.microsoft.com/office/drawing/2014/main" id="{B1256ECC-F43B-4E07-A325-7FCB414DCF61}"/>
               </a:ext>
             </a:extLst>
           </p:cNvPr>
@@ -17057,7 +17057,7 @@
           <p:cNvPr id="10" name="history-body">
             <a:extLst xmlns:a="http://schemas.openxmlformats.org/drawingml/2006/main">
               <a:ext uri="{FF2B5EF4-FFF2-40B4-BE49-F238E27FC236}">
-                <a16:creationId xmlns:a16="http://schemas.microsoft.com/office/drawing/2014/main" id="{262BBC3E-3197-4297-9BAF-86EA1EBB577B}"/>
+                <a16:creationId xmlns:a16="http://schemas.microsoft.com/office/drawing/2014/main" id="{3EE4747E-5120-4008-A0CB-BC57D382C52A}"/>
               </a:ext>
             </a:extLst>
           </p:cNvPr>
@@ -17170,7 +17170,7 @@
           <p:cNvPr id="11" name="sync-cost">
             <a:extLst xmlns:a="http://schemas.openxmlformats.org/drawingml/2006/main">
               <a:ext uri="{FF2B5EF4-FFF2-40B4-BE49-F238E27FC236}">
-                <a16:creationId xmlns:a16="http://schemas.microsoft.com/office/drawing/2014/main" id="{D39C4768-80F9-4404-B3D2-D2D13B4E0147}"/>
+                <a16:creationId xmlns:a16="http://schemas.microsoft.com/office/drawing/2014/main" id="{70FDEBC5-5703-4015-B0AB-7A19BADF9F0F}"/>
               </a:ext>
             </a:extLst>
           </p:cNvPr>
@@ -17279,7 +17279,7 @@
           <p:cNvPr id="9" name="eyebrow">
             <a:extLst xmlns:a="http://schemas.openxmlformats.org/drawingml/2006/main">
               <a:ext uri="{FF2B5EF4-FFF2-40B4-BE49-F238E27FC236}">
-                <a16:creationId xmlns:a16="http://schemas.microsoft.com/office/drawing/2014/main" id="{2C8F8910-FB20-4BB0-A59A-F8CCF37950E6}"/>
+                <a16:creationId xmlns:a16="http://schemas.microsoft.com/office/drawing/2014/main" id="{31E12FD9-12CB-4829-911B-83F13BB0F973}"/>
               </a:ext>
             </a:extLst>
           </p:cNvPr>
@@ -17336,7 +17336,7 @@
           <p:cNvPr id="2" name="slide-title">
             <a:extLst xmlns:a="http://schemas.openxmlformats.org/drawingml/2006/main">
               <a:ext uri="{FF2B5EF4-FFF2-40B4-BE49-F238E27FC236}">
-                <a16:creationId xmlns:a16="http://schemas.microsoft.com/office/drawing/2014/main" id="{E67F4AC8-4689-4063-80A0-3CE45FE74633}"/>
+                <a16:creationId xmlns:a16="http://schemas.microsoft.com/office/drawing/2014/main" id="{FA0694AD-B5DC-4F9E-AE35-C4539DE48093}"/>
               </a:ext>
             </a:extLst>
           </p:cNvPr>
@@ -17393,7 +17393,7 @@
           <p:cNvPr id="3" name="">
             <a:extLst xmlns:a="http://schemas.openxmlformats.org/drawingml/2006/main">
               <a:ext uri="{FF2B5EF4-FFF2-40B4-BE49-F238E27FC236}">
-                <a16:creationId xmlns:a16="http://schemas.microsoft.com/office/drawing/2014/main" id="{3B1FB2D0-7A41-427A-8D94-E7CF5CD8AB0C}"/>
+                <a16:creationId xmlns:a16="http://schemas.microsoft.com/office/drawing/2014/main" id="{D32F18F9-4AE2-42AF-9201-5BEF6DE93752}"/>
               </a:ext>
             </a:extLst>
           </p:cNvPr>
@@ -17425,7 +17425,7 @@
           <p:cNvPr id="4" name="slide-number">
             <a:extLst xmlns:a="http://schemas.openxmlformats.org/drawingml/2006/main">
               <a:ext uri="{FF2B5EF4-FFF2-40B4-BE49-F238E27FC236}">
-                <a16:creationId xmlns:a16="http://schemas.microsoft.com/office/drawing/2014/main" id="{4A9C6A8E-8A7C-491D-B5C1-D396451B1ACA}"/>
+                <a16:creationId xmlns:a16="http://schemas.microsoft.com/office/drawing/2014/main" id="{D3DC44F8-3C40-43A5-888B-CDE1AD08B37D}"/>
               </a:ext>
             </a:extLst>
           </p:cNvPr>
@@ -17482,7 +17482,7 @@
           <p:cNvPr id="5" name="editor-path">
             <a:extLst xmlns:a="http://schemas.openxmlformats.org/drawingml/2006/main">
               <a:ext uri="{FF2B5EF4-FFF2-40B4-BE49-F238E27FC236}">
-                <a16:creationId xmlns:a16="http://schemas.microsoft.com/office/drawing/2014/main" id="{1EB384FB-81DE-4333-8D22-D07A346883C1}"/>
+                <a16:creationId xmlns:a16="http://schemas.microsoft.com/office/drawing/2014/main" id="{571C6863-6A94-4BDA-9082-CDB2E14CECAF}"/>
               </a:ext>
             </a:extLst>
           </p:cNvPr>
@@ -17562,7 +17562,7 @@
           <p:cNvPr id="6" name="">
             <a:extLst xmlns:a="http://schemas.openxmlformats.org/drawingml/2006/main">
               <a:ext uri="{FF2B5EF4-FFF2-40B4-BE49-F238E27FC236}">
-                <a16:creationId xmlns:a16="http://schemas.microsoft.com/office/drawing/2014/main" id="{012D6DB6-09CC-4864-B2F7-818EB8C8845A}"/>
+                <a16:creationId xmlns:a16="http://schemas.microsoft.com/office/drawing/2014/main" id="{383FA35E-CCA8-4719-BEB8-E97228379032}"/>
               </a:ext>
             </a:extLst>
           </p:cNvPr>
@@ -17594,7 +17594,7 @@
           <p:cNvPr id="7" name="markdown-example">
             <a:extLst xmlns:a="http://schemas.openxmlformats.org/drawingml/2006/main">
               <a:ext uri="{FF2B5EF4-FFF2-40B4-BE49-F238E27FC236}">
-                <a16:creationId xmlns:a16="http://schemas.microsoft.com/office/drawing/2014/main" id="{77387D93-2889-4C17-8B26-1ACCC7CFE273}"/>
+                <a16:creationId xmlns:a16="http://schemas.microsoft.com/office/drawing/2014/main" id="{9B7E6EDD-83B5-4AE4-99E2-CAE371C18F2A}"/>
               </a:ext>
             </a:extLst>
           </p:cNvPr>
@@ -17748,7 +17748,7 @@
           <p:cNvPr id="8" name="editor-finish">
             <a:extLst xmlns:a="http://schemas.openxmlformats.org/drawingml/2006/main">
               <a:ext uri="{FF2B5EF4-FFF2-40B4-BE49-F238E27FC236}">
-                <a16:creationId xmlns:a16="http://schemas.microsoft.com/office/drawing/2014/main" id="{6383436C-6B4B-4E20-90D7-31722D611692}"/>
+                <a16:creationId xmlns:a16="http://schemas.microsoft.com/office/drawing/2014/main" id="{39EE7AC6-AA8E-4E2D-9019-2CC809A5DA63}"/>
               </a:ext>
             </a:extLst>
           </p:cNvPr>
@@ -17857,7 +17857,7 @@
           <p:cNvPr id="7" name="eyebrow">
             <a:extLst xmlns:a="http://schemas.openxmlformats.org/drawingml/2006/main">
               <a:ext uri="{FF2B5EF4-FFF2-40B4-BE49-F238E27FC236}">
-                <a16:creationId xmlns:a16="http://schemas.microsoft.com/office/drawing/2014/main" id="{21224169-6AF2-42DB-8DA4-160C662FCBFC}"/>
+                <a16:creationId xmlns:a16="http://schemas.microsoft.com/office/drawing/2014/main" id="{E62871B1-A45F-4CA8-9B05-ADCBFA084F00}"/>
               </a:ext>
             </a:extLst>
           </p:cNvPr>
@@ -17914,7 +17914,7 @@
           <p:cNvPr id="2" name="slide-title">
             <a:extLst xmlns:a="http://schemas.openxmlformats.org/drawingml/2006/main">
               <a:ext uri="{FF2B5EF4-FFF2-40B4-BE49-F238E27FC236}">
-                <a16:creationId xmlns:a16="http://schemas.microsoft.com/office/drawing/2014/main" id="{AA779FFF-17AA-4E30-8A5E-0CA3E32B7470}"/>
+                <a16:creationId xmlns:a16="http://schemas.microsoft.com/office/drawing/2014/main" id="{452B6121-FBE8-41F1-BCC0-B5B9B0FE5828}"/>
               </a:ext>
             </a:extLst>
           </p:cNvPr>
@@ -17971,7 +17971,7 @@
           <p:cNvPr id="3" name="">
             <a:extLst xmlns:a="http://schemas.openxmlformats.org/drawingml/2006/main">
               <a:ext uri="{FF2B5EF4-FFF2-40B4-BE49-F238E27FC236}">
-                <a16:creationId xmlns:a16="http://schemas.microsoft.com/office/drawing/2014/main" id="{C2EDC5CA-E3E5-499B-ACDC-B45CB4787514}"/>
+                <a16:creationId xmlns:a16="http://schemas.microsoft.com/office/drawing/2014/main" id="{F5D7F6E4-E8CB-4975-9037-3EA5EDBC81BA}"/>
               </a:ext>
             </a:extLst>
           </p:cNvPr>
@@ -18003,7 +18003,7 @@
           <p:cNvPr id="4" name="slide-number">
             <a:extLst xmlns:a="http://schemas.openxmlformats.org/drawingml/2006/main">
               <a:ext uri="{FF2B5EF4-FFF2-40B4-BE49-F238E27FC236}">
-                <a16:creationId xmlns:a16="http://schemas.microsoft.com/office/drawing/2014/main" id="{7D08723A-2FAD-4E5B-84EB-BED8ADA2CDCA}"/>
+                <a16:creationId xmlns:a16="http://schemas.microsoft.com/office/drawing/2014/main" id="{6CB6B846-4D40-4983-BAF3-6C5F4FF79C3C}"/>
               </a:ext>
             </a:extLst>
           </p:cNvPr>
@@ -18382,7 +18382,7 @@
           <p:cNvPr id="6" name="history-limit">
             <a:extLst xmlns:a="http://schemas.openxmlformats.org/drawingml/2006/main">
               <a:ext uri="{FF2B5EF4-FFF2-40B4-BE49-F238E27FC236}">
-                <a16:creationId xmlns:a16="http://schemas.microsoft.com/office/drawing/2014/main" id="{5ED6BA82-2F3F-4348-ADEC-C7511234DB27}"/>
+                <a16:creationId xmlns:a16="http://schemas.microsoft.com/office/drawing/2014/main" id="{6ACA1AF8-971E-4F99-8654-42FA7413D79B}"/>
               </a:ext>
             </a:extLst>
           </p:cNvPr>
@@ -18491,7 +18491,7 @@
           <p:cNvPr id="8" name="eyebrow">
             <a:extLst xmlns:a="http://schemas.openxmlformats.org/drawingml/2006/main">
               <a:ext uri="{FF2B5EF4-FFF2-40B4-BE49-F238E27FC236}">
-                <a16:creationId xmlns:a16="http://schemas.microsoft.com/office/drawing/2014/main" id="{D42B8012-D481-44E7-AA35-2830426EC03A}"/>
+                <a16:creationId xmlns:a16="http://schemas.microsoft.com/office/drawing/2014/main" id="{8FF2F636-804B-42B1-A4D5-E0C8192A6FBA}"/>
               </a:ext>
             </a:extLst>
           </p:cNvPr>
@@ -18548,7 +18548,7 @@
           <p:cNvPr id="2" name="slide-title">
             <a:extLst xmlns:a="http://schemas.openxmlformats.org/drawingml/2006/main">
               <a:ext uri="{FF2B5EF4-FFF2-40B4-BE49-F238E27FC236}">
-                <a16:creationId xmlns:a16="http://schemas.microsoft.com/office/drawing/2014/main" id="{ABBC0CBA-B6E0-4C9C-B998-2389030FF0A8}"/>
+                <a16:creationId xmlns:a16="http://schemas.microsoft.com/office/drawing/2014/main" id="{1518822B-1EC5-4348-9556-8B7C46491F25}"/>
               </a:ext>
             </a:extLst>
           </p:cNvPr>
@@ -18605,7 +18605,7 @@
           <p:cNvPr id="3" name="">
             <a:extLst xmlns:a="http://schemas.openxmlformats.org/drawingml/2006/main">
               <a:ext uri="{FF2B5EF4-FFF2-40B4-BE49-F238E27FC236}">
-                <a16:creationId xmlns:a16="http://schemas.microsoft.com/office/drawing/2014/main" id="{5892981D-4C36-49BF-9D70-8C0B66F40523}"/>
+                <a16:creationId xmlns:a16="http://schemas.microsoft.com/office/drawing/2014/main" id="{99C0C90B-DEA6-4EEA-8541-FD3D1BA3F446}"/>
               </a:ext>
             </a:extLst>
           </p:cNvPr>
@@ -18637,7 +18637,7 @@
           <p:cNvPr id="4" name="slide-number">
             <a:extLst xmlns:a="http://schemas.openxmlformats.org/drawingml/2006/main">
               <a:ext uri="{FF2B5EF4-FFF2-40B4-BE49-F238E27FC236}">
-                <a16:creationId xmlns:a16="http://schemas.microsoft.com/office/drawing/2014/main" id="{F47A92AA-56FE-4A63-B3D5-252CD55E1BD2}"/>
+                <a16:creationId xmlns:a16="http://schemas.microsoft.com/office/drawing/2014/main" id="{39432D60-A377-4D51-999C-0658B83A3000}"/>
               </a:ext>
             </a:extLst>
           </p:cNvPr>
@@ -18966,7 +18966,7 @@
           <p:cNvPr id="6" name="atlas-instructions">
             <a:extLst xmlns:a="http://schemas.openxmlformats.org/drawingml/2006/main">
               <a:ext uri="{FF2B5EF4-FFF2-40B4-BE49-F238E27FC236}">
-                <a16:creationId xmlns:a16="http://schemas.microsoft.com/office/drawing/2014/main" id="{DE67EDD6-9FC4-4B3A-A1E3-44ECCA6BCECF}"/>
+                <a16:creationId xmlns:a16="http://schemas.microsoft.com/office/drawing/2014/main" id="{6AE7EC0F-CB7A-482D-B5F7-783FCDC6BCDF}"/>
               </a:ext>
             </a:extLst>
           </p:cNvPr>
@@ -19046,7 +19046,7 @@
           <p:cNvPr id="7" name="atlas-boundary">
             <a:extLst xmlns:a="http://schemas.openxmlformats.org/drawingml/2006/main">
               <a:ext uri="{FF2B5EF4-FFF2-40B4-BE49-F238E27FC236}">
-                <a16:creationId xmlns:a16="http://schemas.microsoft.com/office/drawing/2014/main" id="{0D897226-1C63-4BC7-B11E-FB7EE0462322}"/>
+                <a16:creationId xmlns:a16="http://schemas.microsoft.com/office/drawing/2014/main" id="{6ADD5EE0-8B1A-48A7-8655-EB4BA6901A2B}"/>
               </a:ext>
             </a:extLst>
           </p:cNvPr>
@@ -19132,7 +19132,7 @@
           <p:cNvPr id="8" name="eyebrow">
             <a:extLst xmlns:a="http://schemas.openxmlformats.org/drawingml/2006/main">
               <a:ext uri="{FF2B5EF4-FFF2-40B4-BE49-F238E27FC236}">
-                <a16:creationId xmlns:a16="http://schemas.microsoft.com/office/drawing/2014/main" id="{1DD84A24-555B-4A67-82C4-F2F3094D09F9}"/>
+                <a16:creationId xmlns:a16="http://schemas.microsoft.com/office/drawing/2014/main" id="{30D2D752-BD99-4A26-97E8-BAB3BEDDEDFF}"/>
               </a:ext>
             </a:extLst>
           </p:cNvPr>
@@ -19189,7 +19189,7 @@
           <p:cNvPr id="2" name="slide-title">
             <a:extLst xmlns:a="http://schemas.openxmlformats.org/drawingml/2006/main">
               <a:ext uri="{FF2B5EF4-FFF2-40B4-BE49-F238E27FC236}">
-                <a16:creationId xmlns:a16="http://schemas.microsoft.com/office/drawing/2014/main" id="{131637D1-F833-403D-8145-04400F34DC2E}"/>
+                <a16:creationId xmlns:a16="http://schemas.microsoft.com/office/drawing/2014/main" id="{16A581A0-89B8-4A99-9494-B5CBDEC83C3B}"/>
               </a:ext>
             </a:extLst>
           </p:cNvPr>
@@ -19246,7 +19246,7 @@
           <p:cNvPr id="3" name="">
             <a:extLst xmlns:a="http://schemas.openxmlformats.org/drawingml/2006/main">
               <a:ext uri="{FF2B5EF4-FFF2-40B4-BE49-F238E27FC236}">
-                <a16:creationId xmlns:a16="http://schemas.microsoft.com/office/drawing/2014/main" id="{E8AC92DE-1743-476D-B962-3CB7C787B6C9}"/>
+                <a16:creationId xmlns:a16="http://schemas.microsoft.com/office/drawing/2014/main" id="{8DB8BB02-EC44-4C3A-9E79-0625ACE03846}"/>
               </a:ext>
             </a:extLst>
           </p:cNvPr>
@@ -19278,7 +19278,7 @@
           <p:cNvPr id="4" name="slide-number">
             <a:extLst xmlns:a="http://schemas.openxmlformats.org/drawingml/2006/main">
               <a:ext uri="{FF2B5EF4-FFF2-40B4-BE49-F238E27FC236}">
-                <a16:creationId xmlns:a16="http://schemas.microsoft.com/office/drawing/2014/main" id="{2BC6CEDA-BDB5-40AD-AD76-FD113DDB9E76}"/>
+                <a16:creationId xmlns:a16="http://schemas.microsoft.com/office/drawing/2014/main" id="{B509DC7D-78F8-4FAD-B43F-DCB95EA26933}"/>
               </a:ext>
             </a:extLst>
           </p:cNvPr>
@@ -19335,7 +19335,7 @@
           <p:cNvPr id="5" name="lab-input">
             <a:extLst xmlns:a="http://schemas.openxmlformats.org/drawingml/2006/main">
               <a:ext uri="{FF2B5EF4-FFF2-40B4-BE49-F238E27FC236}">
-                <a16:creationId xmlns:a16="http://schemas.microsoft.com/office/drawing/2014/main" id="{FF7C9AE8-4CFA-43B0-8C6D-93837B88548A}"/>
+                <a16:creationId xmlns:a16="http://schemas.microsoft.com/office/drawing/2014/main" id="{28FB3E02-F9C3-4E07-9EC7-030FA13C6BDF}"/>
               </a:ext>
             </a:extLst>
           </p:cNvPr>
@@ -19415,7 +19415,7 @@
           <p:cNvPr id="6" name="lab-work">
             <a:extLst xmlns:a="http://schemas.openxmlformats.org/drawingml/2006/main">
               <a:ext uri="{FF2B5EF4-FFF2-40B4-BE49-F238E27FC236}">
-                <a16:creationId xmlns:a16="http://schemas.microsoft.com/office/drawing/2014/main" id="{79447D39-8616-40A2-B6D5-8A289FD1E163}"/>
+                <a16:creationId xmlns:a16="http://schemas.microsoft.com/office/drawing/2014/main" id="{A0575F0A-8739-47A3-887B-342D9CA59095}"/>
               </a:ext>
             </a:extLst>
           </p:cNvPr>
@@ -19523,7 +19523,7 @@
           <p:cNvPr id="7" name="lab-submit">
             <a:extLst xmlns:a="http://schemas.openxmlformats.org/drawingml/2006/main">
               <a:ext uri="{FF2B5EF4-FFF2-40B4-BE49-F238E27FC236}">
-                <a16:creationId xmlns:a16="http://schemas.microsoft.com/office/drawing/2014/main" id="{460094AB-B303-4326-B85C-7B4B458700D2}"/>
+                <a16:creationId xmlns:a16="http://schemas.microsoft.com/office/drawing/2014/main" id="{9DC91C72-88F1-40F7-9BBA-192EF42CA946}"/>
               </a:ext>
             </a:extLst>
           </p:cNvPr>
@@ -19632,7 +19632,7 @@
           <p:cNvPr id="7" name="eyebrow">
             <a:extLst xmlns:a="http://schemas.openxmlformats.org/drawingml/2006/main">
               <a:ext uri="{FF2B5EF4-FFF2-40B4-BE49-F238E27FC236}">
-                <a16:creationId xmlns:a16="http://schemas.microsoft.com/office/drawing/2014/main" id="{BEBD7EAC-081B-4FEC-9160-CFB6D8DD53A2}"/>
+                <a16:creationId xmlns:a16="http://schemas.microsoft.com/office/drawing/2014/main" id="{666A02B9-AB62-44CD-A956-6BED24DFF7B7}"/>
               </a:ext>
             </a:extLst>
           </p:cNvPr>
@@ -19689,7 +19689,7 @@
           <p:cNvPr id="2" name="slide-title">
             <a:extLst xmlns:a="http://schemas.openxmlformats.org/drawingml/2006/main">
               <a:ext uri="{FF2B5EF4-FFF2-40B4-BE49-F238E27FC236}">
-                <a16:creationId xmlns:a16="http://schemas.microsoft.com/office/drawing/2014/main" id="{A8967CCF-59F1-4D06-A051-B27DBA6ED0EC}"/>
+                <a16:creationId xmlns:a16="http://schemas.microsoft.com/office/drawing/2014/main" id="{34AE2E46-BF23-41A8-9B60-CA7B77040EA4}"/>
               </a:ext>
             </a:extLst>
           </p:cNvPr>
@@ -19746,7 +19746,7 @@
           <p:cNvPr id="3" name="">
             <a:extLst xmlns:a="http://schemas.openxmlformats.org/drawingml/2006/main">
               <a:ext uri="{FF2B5EF4-FFF2-40B4-BE49-F238E27FC236}">
-                <a16:creationId xmlns:a16="http://schemas.microsoft.com/office/drawing/2014/main" id="{9FF6FFDE-7D05-4BE0-A4D4-9A1A68072C5A}"/>
+                <a16:creationId xmlns:a16="http://schemas.microsoft.com/office/drawing/2014/main" id="{A39D2490-F009-45E3-A3C8-320C83915CB8}"/>
               </a:ext>
             </a:extLst>
           </p:cNvPr>
@@ -19778,7 +19778,7 @@
           <p:cNvPr id="4" name="slide-number">
             <a:extLst xmlns:a="http://schemas.openxmlformats.org/drawingml/2006/main">
               <a:ext uri="{FF2B5EF4-FFF2-40B4-BE49-F238E27FC236}">
-                <a16:creationId xmlns:a16="http://schemas.microsoft.com/office/drawing/2014/main" id="{F4B671E7-83FD-4229-B9A6-8162C598ECA4}"/>
+                <a16:creationId xmlns:a16="http://schemas.microsoft.com/office/drawing/2014/main" id="{142F1E74-29E0-486F-8866-F915D7ACF02F}"/>
               </a:ext>
             </a:extLst>
           </p:cNvPr>
@@ -19835,7 +19835,7 @@
           <p:cNvPr id="5" name="decision-example">
             <a:extLst xmlns:a="http://schemas.openxmlformats.org/drawingml/2006/main">
               <a:ext uri="{FF2B5EF4-FFF2-40B4-BE49-F238E27FC236}">
-                <a16:creationId xmlns:a16="http://schemas.microsoft.com/office/drawing/2014/main" id="{D6F9CB86-9CDA-40B5-8B5C-B56FCD6911C4}"/>
+                <a16:creationId xmlns:a16="http://schemas.microsoft.com/office/drawing/2014/main" id="{09B678A7-9E84-46BA-9E0F-8D8F19B43AFE}"/>
               </a:ext>
             </a:extLst>
           </p:cNvPr>
@@ -19892,7 +19892,7 @@
           <p:cNvPr id="6" name="decision-transfer">
             <a:extLst xmlns:a="http://schemas.openxmlformats.org/drawingml/2006/main">
               <a:ext uri="{FF2B5EF4-FFF2-40B4-BE49-F238E27FC236}">
-                <a16:creationId xmlns:a16="http://schemas.microsoft.com/office/drawing/2014/main" id="{0F29B108-2BCC-4C42-BD8A-AD59EA2F935A}"/>
+                <a16:creationId xmlns:a16="http://schemas.microsoft.com/office/drawing/2014/main" id="{7424F797-1EAA-4052-B51A-2AACBC7654E8}"/>
               </a:ext>
             </a:extLst>
           </p:cNvPr>
@@ -19978,456 +19978,456 @@
 </file>
 
 <file path=ppt/slides/slide4.xml><?xml version="1.0" encoding="utf-8"?>
-<p:sld xmlns:p="http://schemas.openxmlformats.org/presentationml/2006/main">
-  <p:cSld>
-    <p:bg>
-      <p:bgPr>
-        <a:solidFill xmlns:a="http://schemas.openxmlformats.org/drawingml/2006/main">
-          <a:srgbClr val="FCFCFA"/>
-        </a:solidFill>
-      </p:bgPr>
-    </p:bg>
-    <p:spTree>
-      <p:nvGrpSpPr>
-        <p:cNvPr id="1" name=""/>
-        <p:cNvGrpSpPr/>
-        <p:nvPr/>
-      </p:nvGrpSpPr>
-      <p:grpSpPr>
-        <a:xfrm xmlns:a="http://schemas.openxmlformats.org/drawingml/2006/main"/>
-      </p:grpSpPr>
-      <p:pic>
-        <p:nvPicPr>
-          <p:cNvPr id="16" name=""/>
-          <p:cNvPicPr>
-            <a:picLocks xmlns:a="http://schemas.openxmlformats.org/drawingml/2006/main" noChangeAspect="1"/>
-          </p:cNvPicPr>
-          <p:nvPr/>
-        </p:nvPicPr>
-        <p:blipFill>
-          <a:blip xmlns:r="http://schemas.openxmlformats.org/officeDocument/2006/relationships" xmlns:a="http://schemas.openxmlformats.org/drawingml/2006/main" r:embed="R944d24afa02f4e5a"/>
-          <a:stretch xmlns:a="http://schemas.openxmlformats.org/drawingml/2006/main"/>
-        </p:blipFill>
-        <p:spPr>
-          <a:xfrm xmlns:a="http://schemas.openxmlformats.org/drawingml/2006/main">
-            <a:off x="666750" y="1676400"/>
-            <a:ext cx="5657850" cy="4114800"/>
-          </a:xfrm>
-          <a:prstGeom xmlns:a="http://schemas.openxmlformats.org/drawingml/2006/main" prst="rect">
-            <a:avLst/>
-          </a:prstGeom>
-        </p:spPr>
-      </p:pic>
-      <p:sp>
-        <p:nvSpPr>
-          <p:cNvPr id="9" name="eyebrow">
-            <a:extLst xmlns:a="http://schemas.openxmlformats.org/drawingml/2006/main">
-              <a:ext uri="{FF2B5EF4-FFF2-40B4-BE49-F238E27FC236}">
-                <a16:creationId xmlns:a16="http://schemas.microsoft.com/office/drawing/2014/main" id="{468F18FB-D37E-4965-B1FB-8887D3F72C10}"/>
-              </a:ext>
-            </a:extLst>
-          </p:cNvPr>
-          <p:cNvSpPr>
-            <a:spLocks xmlns:a="http://schemas.openxmlformats.org/drawingml/2006/main" noGrp="1"/>
-          </p:cNvSpPr>
-          <p:nvPr/>
-        </p:nvSpPr>
-        <p:spPr>
-          <a:xfrm xmlns:a="http://schemas.openxmlformats.org/drawingml/2006/main">
-            <a:off x="609600" y="295275"/>
-            <a:ext cx="5715000" cy="228600"/>
-          </a:xfrm>
-          <a:prstGeom xmlns:a="http://schemas.openxmlformats.org/drawingml/2006/main" prst="rect">
-            <a:avLst/>
-          </a:prstGeom>
-          <a:noFill xmlns:a="http://schemas.openxmlformats.org/drawingml/2006/main"/>
-          <a:ln xmlns:a="http://schemas.openxmlformats.org/drawingml/2006/main" w="0">
-            <a:noFill/>
-          </a:ln>
-        </p:spPr>
-        <p:txBody>
-          <a:bodyPr xmlns:a="http://schemas.openxmlformats.org/drawingml/2006/main" wrap="square" lIns="0" tIns="0" rIns="0" bIns="0" anchor="t">
-            <a:noAutofit/>
-          </a:bodyPr>
-          <a:lstStyle xmlns:a="http://schemas.openxmlformats.org/drawingml/2006/main"/>
-          <a:p xmlns:a="http://schemas.openxmlformats.org/drawingml/2006/main">
-            <a:pPr>
-              <a:defRPr sz="1050" b="1">
-                <a:solidFill>
-                  <a:srgbClr val="214AE8"/>
-                </a:solidFill>
-                <a:latin typeface="Helvetica Neue"/>
-                <a:ea typeface="Helvetica Neue"/>
-                <a:cs typeface="Helvetica Neue"/>
-              </a:defRPr>
-            </a:pPr>
-            <a:r>
-              <a:rPr sz="1050" b="1">
-                <a:solidFill>
-                  <a:srgbClr val="214AE8"/>
-                </a:solidFill>
-                <a:latin typeface="Helvetica Neue"/>
-                <a:ea typeface="Helvetica Neue"/>
-                <a:cs typeface="Helvetica Neue"/>
-              </a:rPr>
-              <a:t>WEEK 09  /  CST4714</a:t>
-            </a:r>
-          </a:p>
-        </p:txBody>
-      </p:sp>
-      <p:sp>
-        <p:nvSpPr>
-          <p:cNvPr id="10" name="slide-title">
-            <a:extLst xmlns:a="http://schemas.openxmlformats.org/drawingml/2006/main">
-              <a:ext uri="{FF2B5EF4-FFF2-40B4-BE49-F238E27FC236}">
-                <a16:creationId xmlns:a16="http://schemas.microsoft.com/office/drawing/2014/main" id="{558CB877-064B-4830-BC43-3DAAEC31D314}"/>
-              </a:ext>
-            </a:extLst>
-          </p:cNvPr>
-          <p:cNvSpPr>
-            <a:spLocks xmlns:a="http://schemas.openxmlformats.org/drawingml/2006/main" noGrp="1"/>
-          </p:cNvSpPr>
-          <p:nvPr/>
-        </p:nvSpPr>
-        <p:spPr>
-          <a:xfrm xmlns:a="http://schemas.openxmlformats.org/drawingml/2006/main">
-            <a:off x="609600" y="619125"/>
-            <a:ext cx="10972800" cy="628650"/>
-          </a:xfrm>
-          <a:prstGeom xmlns:a="http://schemas.openxmlformats.org/drawingml/2006/main" prst="rect">
-            <a:avLst/>
-          </a:prstGeom>
-          <a:noFill xmlns:a="http://schemas.openxmlformats.org/drawingml/2006/main"/>
-          <a:ln xmlns:a="http://schemas.openxmlformats.org/drawingml/2006/main" w="0">
-            <a:noFill/>
-          </a:ln>
-        </p:spPr>
-        <p:txBody>
-          <a:bodyPr xmlns:a="http://schemas.openxmlformats.org/drawingml/2006/main" wrap="square" lIns="0" tIns="0" rIns="0" bIns="0" anchor="t">
-            <a:noAutofit/>
-          </a:bodyPr>
-          <a:lstStyle xmlns:a="http://schemas.openxmlformats.org/drawingml/2006/main"/>
-          <a:p xmlns:a="http://schemas.openxmlformats.org/drawingml/2006/main">
-            <a:pPr>
-              <a:defRPr sz="2775" b="1">
-                <a:solidFill>
-                  <a:srgbClr val="111827"/>
-                </a:solidFill>
-                <a:latin typeface="Helvetica Neue"/>
-                <a:ea typeface="Helvetica Neue"/>
-                <a:cs typeface="Helvetica Neue"/>
-              </a:defRPr>
-            </a:pPr>
-            <a:r>
-              <a:rPr sz="2775" b="1">
-                <a:solidFill>
-                  <a:srgbClr val="111827"/>
-                </a:solidFill>
-                <a:latin typeface="Helvetica Neue"/>
-                <a:ea typeface="Helvetica Neue"/>
-                <a:cs typeface="Helvetica Neue"/>
-              </a:rPr>
-              <a:t>Model families and access patterns</a:t>
-            </a:r>
-          </a:p>
-        </p:txBody>
-      </p:sp>
-      <p:sp>
-        <p:nvSpPr>
-          <p:cNvPr id="11" name="">
-            <a:extLst xmlns:a="http://schemas.openxmlformats.org/drawingml/2006/main">
-              <a:ext uri="{FF2B5EF4-FFF2-40B4-BE49-F238E27FC236}">
-                <a16:creationId xmlns:a16="http://schemas.microsoft.com/office/drawing/2014/main" id="{AF601EED-1672-4E16-B0E8-C6D6AACA4113}"/>
-              </a:ext>
-            </a:extLst>
-          </p:cNvPr>
-          <p:cNvSpPr>
-            <a:spLocks xmlns:a="http://schemas.openxmlformats.org/drawingml/2006/main" noGrp="1"/>
-          </p:cNvSpPr>
-          <p:nvPr/>
-        </p:nvSpPr>
-        <p:spPr>
-          <a:xfrm xmlns:a="http://schemas.openxmlformats.org/drawingml/2006/main">
-            <a:off x="609600" y="1295400"/>
-            <a:ext cx="10972800" cy="9525"/>
-          </a:xfrm>
-          <a:prstGeom xmlns:a="http://schemas.openxmlformats.org/drawingml/2006/main" prst="rect">
-            <a:avLst/>
-          </a:prstGeom>
-          <a:solidFill xmlns:a="http://schemas.openxmlformats.org/drawingml/2006/main">
-            <a:srgbClr val="CBD5E1"/>
-          </a:solidFill>
-          <a:ln xmlns:a="http://schemas.openxmlformats.org/drawingml/2006/main" w="0">
-            <a:solidFill>
-              <a:srgbClr val="CBD5E1"/>
-            </a:solidFill>
-          </a:ln>
-        </p:spPr>
-      </p:sp>
-      <p:sp>
-        <p:nvSpPr>
-          <p:cNvPr id="12" name="slide-number">
-            <a:extLst xmlns:a="http://schemas.openxmlformats.org/drawingml/2006/main">
-              <a:ext uri="{FF2B5EF4-FFF2-40B4-BE49-F238E27FC236}">
-                <a16:creationId xmlns:a16="http://schemas.microsoft.com/office/drawing/2014/main" id="{939911BD-2E67-4A5D-A723-C95C82DB1C34}"/>
-              </a:ext>
-            </a:extLst>
-          </p:cNvPr>
-          <p:cNvSpPr>
-            <a:spLocks xmlns:a="http://schemas.openxmlformats.org/drawingml/2006/main" noGrp="1"/>
-          </p:cNvSpPr>
-          <p:nvPr/>
-        </p:nvSpPr>
-        <p:spPr>
-          <a:xfrm xmlns:a="http://schemas.openxmlformats.org/drawingml/2006/main">
-            <a:off x="11125200" y="6467475"/>
-            <a:ext cx="457200" cy="190500"/>
-          </a:xfrm>
-          <a:prstGeom xmlns:a="http://schemas.openxmlformats.org/drawingml/2006/main" prst="rect">
-            <a:avLst/>
-          </a:prstGeom>
-          <a:noFill xmlns:a="http://schemas.openxmlformats.org/drawingml/2006/main"/>
-          <a:ln xmlns:a="http://schemas.openxmlformats.org/drawingml/2006/main" w="0">
-            <a:noFill/>
-          </a:ln>
-        </p:spPr>
-        <p:txBody>
-          <a:bodyPr xmlns:a="http://schemas.openxmlformats.org/drawingml/2006/main" wrap="square" lIns="0" tIns="0" rIns="0" bIns="0" anchor="t">
-            <a:noAutofit/>
-          </a:bodyPr>
-          <a:lstStyle xmlns:a="http://schemas.openxmlformats.org/drawingml/2006/main"/>
-          <a:p xmlns:a="http://schemas.openxmlformats.org/drawingml/2006/main">
-            <a:pPr>
-              <a:defRPr sz="900" b="0">
-                <a:solidFill>
-                  <a:srgbClr val="64748B"/>
-                </a:solidFill>
-                <a:latin typeface="Helvetica Neue"/>
-                <a:ea typeface="Helvetica Neue"/>
-                <a:cs typeface="Helvetica Neue"/>
-              </a:defRPr>
-            </a:pPr>
-            <a:r>
-              <a:rPr sz="900" b="0">
-                <a:solidFill>
-                  <a:srgbClr val="64748B"/>
-                </a:solidFill>
-                <a:latin typeface="Helvetica Neue"/>
-                <a:ea typeface="Helvetica Neue"/>
-                <a:cs typeface="Helvetica Neue"/>
-              </a:rPr>
-              <a:t>04</a:t>
-            </a:r>
-          </a:p>
-        </p:txBody>
-      </p:sp>
-      <p:sp>
-        <p:nvSpPr>
-          <p:cNvPr id="13" name="access-definition">
-            <a:extLst xmlns:a="http://schemas.openxmlformats.org/drawingml/2006/main">
-              <a:ext uri="{FF2B5EF4-FFF2-40B4-BE49-F238E27FC236}">
-                <a16:creationId xmlns:a16="http://schemas.microsoft.com/office/drawing/2014/main" id="{9AC8372B-6E76-427A-9731-2D8B3AFC2E15}"/>
-              </a:ext>
-            </a:extLst>
-          </p:cNvPr>
-          <p:cNvSpPr>
-            <a:spLocks xmlns:a="http://schemas.openxmlformats.org/drawingml/2006/main" noGrp="1"/>
-          </p:cNvSpPr>
-          <p:nvPr/>
-        </p:nvSpPr>
-        <p:spPr>
-          <a:xfrm xmlns:a="http://schemas.openxmlformats.org/drawingml/2006/main">
-            <a:off x="6848475" y="1943100"/>
-            <a:ext cx="4667250" cy="1352550"/>
-          </a:xfrm>
-          <a:prstGeom xmlns:a="http://schemas.openxmlformats.org/drawingml/2006/main" prst="rect">
-            <a:avLst/>
-          </a:prstGeom>
-          <a:noFill xmlns:a="http://schemas.openxmlformats.org/drawingml/2006/main"/>
-          <a:ln xmlns:a="http://schemas.openxmlformats.org/drawingml/2006/main" w="0">
-            <a:noFill/>
-          </a:ln>
-        </p:spPr>
-        <p:txBody>
-          <a:bodyPr xmlns:a="http://schemas.openxmlformats.org/drawingml/2006/main" wrap="square" lIns="0" tIns="0" rIns="0" bIns="0" anchor="t">
-            <a:noAutofit/>
-          </a:bodyPr>
-          <a:lstStyle xmlns:a="http://schemas.openxmlformats.org/drawingml/2006/main"/>
-          <a:p xmlns:a="http://schemas.openxmlformats.org/drawingml/2006/main">
-            <a:pPr>
-              <a:defRPr sz="2325" b="0">
-                <a:solidFill>
-                  <a:srgbClr val="111827"/>
-                </a:solidFill>
-                <a:latin typeface="Helvetica Neue"/>
-                <a:ea typeface="Helvetica Neue"/>
-                <a:cs typeface="Helvetica Neue"/>
-              </a:defRPr>
-            </a:pPr>
-            <a:r>
-              <a:rPr sz="2325" b="0">
-                <a:solidFill>
-                  <a:srgbClr val="111827"/>
-                </a:solidFill>
-                <a:latin typeface="Helvetica Neue"/>
-                <a:ea typeface="Helvetica Neue"/>
-                <a:cs typeface="Helvetica Neue"/>
-              </a:rPr>
-              <a:t>Access pattern: the data an application repeatedly reads or changes.</a:t>
-            </a:r>
-          </a:p>
-        </p:txBody>
-      </p:sp>
-      <p:sp>
-        <p:nvSpPr>
-          <p:cNvPr id="14" name="access-example">
-            <a:extLst xmlns:a="http://schemas.openxmlformats.org/drawingml/2006/main">
-              <a:ext uri="{FF2B5EF4-FFF2-40B4-BE49-F238E27FC236}">
-                <a16:creationId xmlns:a16="http://schemas.microsoft.com/office/drawing/2014/main" id="{F52199B9-DCE1-4C04-B9C8-B4457DADE6E3}"/>
-              </a:ext>
-            </a:extLst>
-          </p:cNvPr>
-          <p:cNvSpPr>
-            <a:spLocks xmlns:a="http://schemas.openxmlformats.org/drawingml/2006/main" noGrp="1"/>
-          </p:cNvSpPr>
-          <p:nvPr/>
-        </p:nvSpPr>
-        <p:spPr>
-          <a:xfrm xmlns:a="http://schemas.openxmlformats.org/drawingml/2006/main">
-            <a:off x="6848475" y="3810000"/>
-            <a:ext cx="4667250" cy="1971675"/>
-          </a:xfrm>
-          <a:prstGeom xmlns:a="http://schemas.openxmlformats.org/drawingml/2006/main" prst="rect">
-            <a:avLst/>
-          </a:prstGeom>
-          <a:noFill xmlns:a="http://schemas.openxmlformats.org/drawingml/2006/main"/>
-          <a:ln xmlns:a="http://schemas.openxmlformats.org/drawingml/2006/main" w="0">
-            <a:noFill/>
-          </a:ln>
-        </p:spPr>
-        <p:txBody>
-          <a:bodyPr xmlns:a="http://schemas.openxmlformats.org/drawingml/2006/main" wrap="square" lIns="0" tIns="0" rIns="0" bIns="0" anchor="t">
-            <a:noAutofit/>
-          </a:bodyPr>
-          <a:lstStyle xmlns:a="http://schemas.openxmlformats.org/drawingml/2006/main"/>
-          <a:p xmlns:a="http://schemas.openxmlformats.org/drawingml/2006/main">
-            <a:pPr>
-              <a:defRPr sz="2250" b="0">
-                <a:solidFill>
-                  <a:srgbClr val="111827"/>
-                </a:solidFill>
-                <a:latin typeface="Helvetica Neue"/>
-                <a:ea typeface="Helvetica Neue"/>
-                <a:cs typeface="Helvetica Neue"/>
-              </a:defRPr>
-            </a:pPr>
-            <a:r>
-              <a:rPr sz="2250" b="0">
-                <a:solidFill>
-                  <a:srgbClr val="111827"/>
-                </a:solidFill>
-                <a:latin typeface="Helvetica Neue"/>
-                <a:ea typeface="Helvetica Neue"/>
-                <a:cs typeface="Helvetica Neue"/>
-              </a:rPr>
-              <a:t>Opening ticket 1001 and its latest events is one pattern.</a:t>
-            </a:r>
-          </a:p>
-          <a:p xmlns:a="http://schemas.openxmlformats.org/drawingml/2006/main">
-            <a:r>
-              <a:t/>
-            </a:r>
-          </a:p>
-          <a:p xmlns:a="http://schemas.openxmlformats.org/drawingml/2006/main">
-            <a:pPr>
-              <a:defRPr sz="2250" b="0">
-                <a:solidFill>
-                  <a:srgbClr val="111827"/>
-                </a:solidFill>
-                <a:latin typeface="Helvetica Neue"/>
-                <a:ea typeface="Helvetica Neue"/>
-                <a:cs typeface="Helvetica Neue"/>
-              </a:defRPr>
-            </a:pPr>
-            <a:r>
-              <a:rPr sz="2250" b="0">
-                <a:solidFill>
-                  <a:srgbClr val="111827"/>
-                </a:solidFill>
-                <a:latin typeface="Helvetica Neue"/>
-                <a:ea typeface="Helvetica Neue"/>
-                <a:cs typeface="Helvetica Neue"/>
-              </a:rPr>
-              <a:t>Counting every event by type is another.</a:t>
-            </a:r>
-          </a:p>
-        </p:txBody>
-      </p:sp>
-      <p:sp>
-        <p:nvSpPr>
-          <p:cNvPr id="15" name="access-choice">
-            <a:extLst xmlns:a="http://schemas.openxmlformats.org/drawingml/2006/main">
-              <a:ext uri="{FF2B5EF4-FFF2-40B4-BE49-F238E27FC236}">
-                <a16:creationId xmlns:a16="http://schemas.microsoft.com/office/drawing/2014/main" id="{FC8E327B-D92A-45F8-A0DB-A12A6EEC21FB}"/>
-              </a:ext>
-            </a:extLst>
-          </p:cNvPr>
-          <p:cNvSpPr>
-            <a:spLocks xmlns:a="http://schemas.openxmlformats.org/drawingml/2006/main" noGrp="1"/>
-          </p:cNvSpPr>
-          <p:nvPr/>
-        </p:nvSpPr>
-        <p:spPr>
-          <a:xfrm xmlns:a="http://schemas.openxmlformats.org/drawingml/2006/main">
-            <a:off x="723900" y="6067425"/>
-            <a:ext cx="10668000" cy="352425"/>
-          </a:xfrm>
-          <a:prstGeom xmlns:a="http://schemas.openxmlformats.org/drawingml/2006/main" prst="rect">
-            <a:avLst/>
-          </a:prstGeom>
-          <a:noFill xmlns:a="http://schemas.openxmlformats.org/drawingml/2006/main"/>
-          <a:ln xmlns:a="http://schemas.openxmlformats.org/drawingml/2006/main" w="0">
-            <a:noFill/>
-          </a:ln>
-        </p:spPr>
-        <p:txBody>
-          <a:bodyPr xmlns:a="http://schemas.openxmlformats.org/drawingml/2006/main" wrap="square" lIns="0" tIns="0" rIns="0" bIns="0" anchor="t">
-            <a:noAutofit/>
-          </a:bodyPr>
-          <a:lstStyle xmlns:a="http://schemas.openxmlformats.org/drawingml/2006/main"/>
-          <a:p xmlns:a="http://schemas.openxmlformats.org/drawingml/2006/main">
-            <a:pPr>
-              <a:defRPr sz="1950" b="0">
-                <a:solidFill>
-                  <a:srgbClr val="111827"/>
-                </a:solidFill>
-                <a:latin typeface="Helvetica Neue"/>
-                <a:ea typeface="Helvetica Neue"/>
-                <a:cs typeface="Helvetica Neue"/>
-              </a:defRPr>
-            </a:pPr>
-            <a:r>
-              <a:rPr sz="1950" b="0">
-                <a:solidFill>
-                  <a:srgbClr val="111827"/>
-                </a:solidFill>
-                <a:latin typeface="Helvetica Neue"/>
-                <a:ea typeface="Helvetica Neue"/>
-                <a:cs typeface="Helvetica Neue"/>
-              </a:rPr>
-              <a:t>One application may benefit from more than one representation.</a:t>
-            </a:r>
-          </a:p>
-        </p:txBody>
-      </p:sp>
-    </p:spTree>
-    <p:extLst>
-      <p:ext uri="{BB962C8B-B14F-4D97-AF65-F5344CB8AC3E}">
-        <p14:creationId xmlns:p14="http://schemas.microsoft.com/office/powerpoint/2010/main" val="335246399"/>
-      </p:ext>
-    </p:extLst>
-  </p:cSld>
-</p:sld>
+<ns0:sld xmlns:ns0="http://schemas.openxmlformats.org/presentationml/2006/main" xmlns:ns1="http://schemas.openxmlformats.org/drawingml/2006/main" xmlns:ns2="http://schemas.openxmlformats.org/officeDocument/2006/relationships" xmlns:ns3="http://schemas.microsoft.com/office/drawing/2014/main" xmlns:ns4="http://schemas.microsoft.com/office/powerpoint/2010/main">
+  <ns0:cSld>
+    <ns0:bg>
+      <ns0:bgPr>
+        <ns1:solidFill>
+          <ns1:srgbClr val="FCFCFA"/>
+        </ns1:solidFill>
+      </ns0:bgPr>
+    </ns0:bg>
+    <ns0:spTree>
+      <ns0:nvGrpSpPr>
+        <ns0:cNvPr id="1" name=""/>
+        <ns0:cNvGrpSpPr/>
+        <ns0:nvPr/>
+      </ns0:nvGrpSpPr>
+      <ns0:grpSpPr>
+        <ns1:xfrm/>
+      </ns0:grpSpPr>
+      <ns0:pic>
+        <ns0:nvPicPr>
+          <ns0:cNvPr id="16" name="" descr="The workload question branches to five model families: key-value for exact-key lookup, wide-column for sparse rows by access key, document for a bounded nested aggregate, graph for relationship paths, and vector search for semantic neighbors. These are access-pattern comparisons, not mutually exclusive product categories."/>
+          <ns0:cNvPicPr>
+            <ns1:picLocks noChangeAspect="1"/>
+          </ns0:cNvPicPr>
+          <ns0:nvPr/>
+        </ns0:nvPicPr>
+        <ns0:blipFill>
+          <ns1:blip ns2:embed="Rd9634f36c11d4498"/>
+          <ns1:stretch/>
+        </ns0:blipFill>
+        <ns0:spPr>
+          <ns1:xfrm>
+            <ns1:off x="666750" y="1676400"/>
+            <ns1:ext cx="5657850" cy="4114800"/>
+          </ns1:xfrm>
+          <ns1:prstGeom prst="rect">
+            <ns1:avLst/>
+          </ns1:prstGeom>
+        </ns0:spPr>
+      </ns0:pic>
+      <ns0:sp>
+        <ns0:nvSpPr>
+          <ns0:cNvPr id="9" name="eyebrow">
+            <ns1:extLst>
+              <ns1:ext uri="{FF2B5EF4-FFF2-40B4-BE49-F238E27FC236}">
+                <ns3:creationId id="{CAFD6B76-C696-44A9-A945-CB6434FE0AEC}"/>
+              </ns1:ext>
+            </ns1:extLst>
+          </ns0:cNvPr>
+          <ns0:cNvSpPr>
+            <ns1:spLocks noGrp="1"/>
+          </ns0:cNvSpPr>
+          <ns0:nvPr/>
+        </ns0:nvSpPr>
+        <ns0:spPr>
+          <ns1:xfrm>
+            <ns1:off x="609600" y="295275"/>
+            <ns1:ext cx="5715000" cy="228600"/>
+          </ns1:xfrm>
+          <ns1:prstGeom prst="rect">
+            <ns1:avLst/>
+          </ns1:prstGeom>
+          <ns1:noFill/>
+          <ns1:ln w="0">
+            <ns1:noFill/>
+          </ns1:ln>
+        </ns0:spPr>
+        <ns0:txBody>
+          <ns1:bodyPr wrap="square" lIns="0" tIns="0" rIns="0" bIns="0" anchor="t">
+            <ns1:noAutofit/>
+          </ns1:bodyPr>
+          <ns1:lstStyle/>
+          <ns1:p>
+            <ns1:pPr>
+              <ns1:defRPr sz="1050" b="1">
+                <ns1:solidFill>
+                  <ns1:srgbClr val="214AE8"/>
+                </ns1:solidFill>
+                <ns1:latin typeface="Helvetica Neue"/>
+                <ns1:ea typeface="Helvetica Neue"/>
+                <ns1:cs typeface="Helvetica Neue"/>
+              </ns1:defRPr>
+            </ns1:pPr>
+            <ns1:r>
+              <ns1:rPr sz="1050" b="1">
+                <ns1:solidFill>
+                  <ns1:srgbClr val="214AE8"/>
+                </ns1:solidFill>
+                <ns1:latin typeface="Helvetica Neue"/>
+                <ns1:ea typeface="Helvetica Neue"/>
+                <ns1:cs typeface="Helvetica Neue"/>
+              </ns1:rPr>
+              <ns1:t>WEEK 09  /  CST4714</ns1:t>
+            </ns1:r>
+          </ns1:p>
+        </ns0:txBody>
+      </ns0:sp>
+      <ns0:sp>
+        <ns0:nvSpPr>
+          <ns0:cNvPr id="10" name="slide-title">
+            <ns1:extLst>
+              <ns1:ext uri="{FF2B5EF4-FFF2-40B4-BE49-F238E27FC236}">
+                <ns3:creationId id="{DB61C89C-E979-49AF-82EB-35271E634188}"/>
+              </ns1:ext>
+            </ns1:extLst>
+          </ns0:cNvPr>
+          <ns0:cNvSpPr>
+            <ns1:spLocks noGrp="1"/>
+          </ns0:cNvSpPr>
+          <ns0:nvPr/>
+        </ns0:nvSpPr>
+        <ns0:spPr>
+          <ns1:xfrm>
+            <ns1:off x="609600" y="619125"/>
+            <ns1:ext cx="10972800" cy="628650"/>
+          </ns1:xfrm>
+          <ns1:prstGeom prst="rect">
+            <ns1:avLst/>
+          </ns1:prstGeom>
+          <ns1:noFill/>
+          <ns1:ln w="0">
+            <ns1:noFill/>
+          </ns1:ln>
+        </ns0:spPr>
+        <ns0:txBody>
+          <ns1:bodyPr wrap="square" lIns="0" tIns="0" rIns="0" bIns="0" anchor="t">
+            <ns1:noAutofit/>
+          </ns1:bodyPr>
+          <ns1:lstStyle/>
+          <ns1:p>
+            <ns1:pPr>
+              <ns1:defRPr sz="2775" b="1">
+                <ns1:solidFill>
+                  <ns1:srgbClr val="111827"/>
+                </ns1:solidFill>
+                <ns1:latin typeface="Helvetica Neue"/>
+                <ns1:ea typeface="Helvetica Neue"/>
+                <ns1:cs typeface="Helvetica Neue"/>
+              </ns1:defRPr>
+            </ns1:pPr>
+            <ns1:r>
+              <ns1:rPr sz="2775" b="1">
+                <ns1:solidFill>
+                  <ns1:srgbClr val="111827"/>
+                </ns1:solidFill>
+                <ns1:latin typeface="Helvetica Neue"/>
+                <ns1:ea typeface="Helvetica Neue"/>
+                <ns1:cs typeface="Helvetica Neue"/>
+              </ns1:rPr>
+              <ns1:t>Model families and access patterns</ns1:t>
+            </ns1:r>
+          </ns1:p>
+        </ns0:txBody>
+      </ns0:sp>
+      <ns0:sp>
+        <ns0:nvSpPr>
+          <ns0:cNvPr id="11" name="">
+            <ns1:extLst>
+              <ns1:ext uri="{FF2B5EF4-FFF2-40B4-BE49-F238E27FC236}">
+                <ns3:creationId id="{CABDC6F2-A46C-44EA-9BFA-F94D0E1F6D26}"/>
+              </ns1:ext>
+            </ns1:extLst>
+          </ns0:cNvPr>
+          <ns0:cNvSpPr>
+            <ns1:spLocks noGrp="1"/>
+          </ns0:cNvSpPr>
+          <ns0:nvPr/>
+        </ns0:nvSpPr>
+        <ns0:spPr>
+          <ns1:xfrm>
+            <ns1:off x="609600" y="1295400"/>
+            <ns1:ext cx="10972800" cy="9525"/>
+          </ns1:xfrm>
+          <ns1:prstGeom prst="rect">
+            <ns1:avLst/>
+          </ns1:prstGeom>
+          <ns1:solidFill>
+            <ns1:srgbClr val="CBD5E1"/>
+          </ns1:solidFill>
+          <ns1:ln w="0">
+            <ns1:solidFill>
+              <ns1:srgbClr val="CBD5E1"/>
+            </ns1:solidFill>
+          </ns1:ln>
+        </ns0:spPr>
+      </ns0:sp>
+      <ns0:sp>
+        <ns0:nvSpPr>
+          <ns0:cNvPr id="12" name="slide-number">
+            <ns1:extLst>
+              <ns1:ext uri="{FF2B5EF4-FFF2-40B4-BE49-F238E27FC236}">
+                <ns3:creationId id="{AA04E6F5-DFF3-4B17-A39E-5F534857259D}"/>
+              </ns1:ext>
+            </ns1:extLst>
+          </ns0:cNvPr>
+          <ns0:cNvSpPr>
+            <ns1:spLocks noGrp="1"/>
+          </ns0:cNvSpPr>
+          <ns0:nvPr/>
+        </ns0:nvSpPr>
+        <ns0:spPr>
+          <ns1:xfrm>
+            <ns1:off x="11125200" y="6467475"/>
+            <ns1:ext cx="457200" cy="190500"/>
+          </ns1:xfrm>
+          <ns1:prstGeom prst="rect">
+            <ns1:avLst/>
+          </ns1:prstGeom>
+          <ns1:noFill/>
+          <ns1:ln w="0">
+            <ns1:noFill/>
+          </ns1:ln>
+        </ns0:spPr>
+        <ns0:txBody>
+          <ns1:bodyPr wrap="square" lIns="0" tIns="0" rIns="0" bIns="0" anchor="t">
+            <ns1:noAutofit/>
+          </ns1:bodyPr>
+          <ns1:lstStyle/>
+          <ns1:p>
+            <ns1:pPr>
+              <ns1:defRPr sz="900" b="0">
+                <ns1:solidFill>
+                  <ns1:srgbClr val="64748B"/>
+                </ns1:solidFill>
+                <ns1:latin typeface="Helvetica Neue"/>
+                <ns1:ea typeface="Helvetica Neue"/>
+                <ns1:cs typeface="Helvetica Neue"/>
+              </ns1:defRPr>
+            </ns1:pPr>
+            <ns1:r>
+              <ns1:rPr sz="900" b="0">
+                <ns1:solidFill>
+                  <ns1:srgbClr val="64748B"/>
+                </ns1:solidFill>
+                <ns1:latin typeface="Helvetica Neue"/>
+                <ns1:ea typeface="Helvetica Neue"/>
+                <ns1:cs typeface="Helvetica Neue"/>
+              </ns1:rPr>
+              <ns1:t>04</ns1:t>
+            </ns1:r>
+          </ns1:p>
+        </ns0:txBody>
+      </ns0:sp>
+      <ns0:sp>
+        <ns0:nvSpPr>
+          <ns0:cNvPr id="13" name="access-definition">
+            <ns1:extLst>
+              <ns1:ext uri="{FF2B5EF4-FFF2-40B4-BE49-F238E27FC236}">
+                <ns3:creationId id="{CCF225C9-1DB6-439B-962C-8CABD38DD9F4}"/>
+              </ns1:ext>
+            </ns1:extLst>
+          </ns0:cNvPr>
+          <ns0:cNvSpPr>
+            <ns1:spLocks noGrp="1"/>
+          </ns0:cNvSpPr>
+          <ns0:nvPr/>
+        </ns0:nvSpPr>
+        <ns0:spPr>
+          <ns1:xfrm>
+            <ns1:off x="6848475" y="1943100"/>
+            <ns1:ext cx="4667250" cy="1352550"/>
+          </ns1:xfrm>
+          <ns1:prstGeom prst="rect">
+            <ns1:avLst/>
+          </ns1:prstGeom>
+          <ns1:noFill/>
+          <ns1:ln w="0">
+            <ns1:noFill/>
+          </ns1:ln>
+        </ns0:spPr>
+        <ns0:txBody>
+          <ns1:bodyPr wrap="square" lIns="0" tIns="0" rIns="0" bIns="0" anchor="t">
+            <ns1:noAutofit/>
+          </ns1:bodyPr>
+          <ns1:lstStyle/>
+          <ns1:p>
+            <ns1:pPr>
+              <ns1:defRPr sz="2325" b="0">
+                <ns1:solidFill>
+                  <ns1:srgbClr val="111827"/>
+                </ns1:solidFill>
+                <ns1:latin typeface="Helvetica Neue"/>
+                <ns1:ea typeface="Helvetica Neue"/>
+                <ns1:cs typeface="Helvetica Neue"/>
+              </ns1:defRPr>
+            </ns1:pPr>
+            <ns1:r>
+              <ns1:rPr sz="2325" b="0">
+                <ns1:solidFill>
+                  <ns1:srgbClr val="111827"/>
+                </ns1:solidFill>
+                <ns1:latin typeface="Helvetica Neue"/>
+                <ns1:ea typeface="Helvetica Neue"/>
+                <ns1:cs typeface="Helvetica Neue"/>
+              </ns1:rPr>
+              <ns1:t>Access pattern: the data an application repeatedly reads or changes.</ns1:t>
+            </ns1:r>
+          </ns1:p>
+        </ns0:txBody>
+      </ns0:sp>
+      <ns0:sp>
+        <ns0:nvSpPr>
+          <ns0:cNvPr id="14" name="access-example">
+            <ns1:extLst>
+              <ns1:ext uri="{FF2B5EF4-FFF2-40B4-BE49-F238E27FC236}">
+                <ns3:creationId id="{467C5EEB-9429-4673-91B2-F8522A42346E}"/>
+              </ns1:ext>
+            </ns1:extLst>
+          </ns0:cNvPr>
+          <ns0:cNvSpPr>
+            <ns1:spLocks noGrp="1"/>
+          </ns0:cNvSpPr>
+          <ns0:nvPr/>
+        </ns0:nvSpPr>
+        <ns0:spPr>
+          <ns1:xfrm>
+            <ns1:off x="6848475" y="3810000"/>
+            <ns1:ext cx="4667250" cy="1971675"/>
+          </ns1:xfrm>
+          <ns1:prstGeom prst="rect">
+            <ns1:avLst/>
+          </ns1:prstGeom>
+          <ns1:noFill/>
+          <ns1:ln w="0">
+            <ns1:noFill/>
+          </ns1:ln>
+        </ns0:spPr>
+        <ns0:txBody>
+          <ns1:bodyPr wrap="square" lIns="0" tIns="0" rIns="0" bIns="0" anchor="t">
+            <ns1:noAutofit/>
+          </ns1:bodyPr>
+          <ns1:lstStyle/>
+          <ns1:p>
+            <ns1:pPr>
+              <ns1:defRPr sz="2250" b="0">
+                <ns1:solidFill>
+                  <ns1:srgbClr val="111827"/>
+                </ns1:solidFill>
+                <ns1:latin typeface="Helvetica Neue"/>
+                <ns1:ea typeface="Helvetica Neue"/>
+                <ns1:cs typeface="Helvetica Neue"/>
+              </ns1:defRPr>
+            </ns1:pPr>
+            <ns1:r>
+              <ns1:rPr sz="2250" b="0">
+                <ns1:solidFill>
+                  <ns1:srgbClr val="111827"/>
+                </ns1:solidFill>
+                <ns1:latin typeface="Helvetica Neue"/>
+                <ns1:ea typeface="Helvetica Neue"/>
+                <ns1:cs typeface="Helvetica Neue"/>
+              </ns1:rPr>
+              <ns1:t>Opening ticket 1001 and its latest events is one pattern.</ns1:t>
+            </ns1:r>
+          </ns1:p>
+          <ns1:p>
+            <ns1:r>
+              <ns1:t/>
+            </ns1:r>
+          </ns1:p>
+          <ns1:p>
+            <ns1:pPr>
+              <ns1:defRPr sz="2250" b="0">
+                <ns1:solidFill>
+                  <ns1:srgbClr val="111827"/>
+                </ns1:solidFill>
+                <ns1:latin typeface="Helvetica Neue"/>
+                <ns1:ea typeface="Helvetica Neue"/>
+                <ns1:cs typeface="Helvetica Neue"/>
+              </ns1:defRPr>
+            </ns1:pPr>
+            <ns1:r>
+              <ns1:rPr sz="2250" b="0">
+                <ns1:solidFill>
+                  <ns1:srgbClr val="111827"/>
+                </ns1:solidFill>
+                <ns1:latin typeface="Helvetica Neue"/>
+                <ns1:ea typeface="Helvetica Neue"/>
+                <ns1:cs typeface="Helvetica Neue"/>
+              </ns1:rPr>
+              <ns1:t>Counting every event by type is another.</ns1:t>
+            </ns1:r>
+          </ns1:p>
+        </ns0:txBody>
+      </ns0:sp>
+      <ns0:sp>
+        <ns0:nvSpPr>
+          <ns0:cNvPr id="15" name="access-choice">
+            <ns1:extLst>
+              <ns1:ext uri="{FF2B5EF4-FFF2-40B4-BE49-F238E27FC236}">
+                <ns3:creationId id="{226D563B-9FDB-4F53-8E7B-0E45D683E4BE}"/>
+              </ns1:ext>
+            </ns1:extLst>
+          </ns0:cNvPr>
+          <ns0:cNvSpPr>
+            <ns1:spLocks noGrp="1"/>
+          </ns0:cNvSpPr>
+          <ns0:nvPr/>
+        </ns0:nvSpPr>
+        <ns0:spPr>
+          <ns1:xfrm>
+            <ns1:off x="723900" y="6067425"/>
+            <ns1:ext cx="10668000" cy="352425"/>
+          </ns1:xfrm>
+          <ns1:prstGeom prst="rect">
+            <ns1:avLst/>
+          </ns1:prstGeom>
+          <ns1:noFill/>
+          <ns1:ln w="0">
+            <ns1:noFill/>
+          </ns1:ln>
+        </ns0:spPr>
+        <ns0:txBody>
+          <ns1:bodyPr wrap="square" lIns="0" tIns="0" rIns="0" bIns="0" anchor="t">
+            <ns1:noAutofit/>
+          </ns1:bodyPr>
+          <ns1:lstStyle/>
+          <ns1:p>
+            <ns1:pPr>
+              <ns1:defRPr sz="1950" b="0">
+                <ns1:solidFill>
+                  <ns1:srgbClr val="111827"/>
+                </ns1:solidFill>
+                <ns1:latin typeface="Helvetica Neue"/>
+                <ns1:ea typeface="Helvetica Neue"/>
+                <ns1:cs typeface="Helvetica Neue"/>
+              </ns1:defRPr>
+            </ns1:pPr>
+            <ns1:r>
+              <ns1:rPr sz="1950" b="0">
+                <ns1:solidFill>
+                  <ns1:srgbClr val="111827"/>
+                </ns1:solidFill>
+                <ns1:latin typeface="Helvetica Neue"/>
+                <ns1:ea typeface="Helvetica Neue"/>
+                <ns1:cs typeface="Helvetica Neue"/>
+              </ns1:rPr>
+              <ns1:t>One application may benefit from more than one representation.</ns1:t>
+            </ns1:r>
+          </ns1:p>
+        </ns0:txBody>
+      </ns0:sp>
+    </ns0:spTree>
+    <ns0:extLst>
+      <ns0:ext uri="{BB962C8B-B14F-4D97-AF65-F5344CB8AC3E}">
+        <ns4:creationId val="335246399"/>
+      </ns0:ext>
+    </ns0:extLst>
+  </ns0:cSld>
+</ns0:sld>
 </file>
 
 <file path=ppt/slides/slide5.xml><?xml version="1.0" encoding="utf-8"?>
@@ -20454,7 +20454,7 @@
           <p:cNvPr id="14" name="eyebrow">
             <a:extLst xmlns:a="http://schemas.openxmlformats.org/drawingml/2006/main">
               <a:ext uri="{FF2B5EF4-FFF2-40B4-BE49-F238E27FC236}">
-                <a16:creationId xmlns:a16="http://schemas.microsoft.com/office/drawing/2014/main" id="{2A3A72BF-236B-424A-9FC0-8AA451FE317F}"/>
+                <a16:creationId xmlns:a16="http://schemas.microsoft.com/office/drawing/2014/main" id="{C9F79941-DF8F-4C26-A90B-E99F7E994E24}"/>
               </a:ext>
             </a:extLst>
           </p:cNvPr>
@@ -20511,7 +20511,7 @@
           <p:cNvPr id="2" name="slide-title">
             <a:extLst xmlns:a="http://schemas.openxmlformats.org/drawingml/2006/main">
               <a:ext uri="{FF2B5EF4-FFF2-40B4-BE49-F238E27FC236}">
-                <a16:creationId xmlns:a16="http://schemas.microsoft.com/office/drawing/2014/main" id="{5D011467-FBDC-4FE0-83A9-9EF404B52904}"/>
+                <a16:creationId xmlns:a16="http://schemas.microsoft.com/office/drawing/2014/main" id="{E080D838-B03F-47D1-9096-EE23ECE7BB8D}"/>
               </a:ext>
             </a:extLst>
           </p:cNvPr>
@@ -20568,7 +20568,7 @@
           <p:cNvPr id="3" name="">
             <a:extLst xmlns:a="http://schemas.openxmlformats.org/drawingml/2006/main">
               <a:ext uri="{FF2B5EF4-FFF2-40B4-BE49-F238E27FC236}">
-                <a16:creationId xmlns:a16="http://schemas.microsoft.com/office/drawing/2014/main" id="{5D2603DC-1934-4BE5-87EC-4CF414EA1E91}"/>
+                <a16:creationId xmlns:a16="http://schemas.microsoft.com/office/drawing/2014/main" id="{7D10CF16-9541-4679-BD41-75C24E7D196E}"/>
               </a:ext>
             </a:extLst>
           </p:cNvPr>
@@ -20600,7 +20600,7 @@
           <p:cNvPr id="4" name="slide-number">
             <a:extLst xmlns:a="http://schemas.openxmlformats.org/drawingml/2006/main">
               <a:ext uri="{FF2B5EF4-FFF2-40B4-BE49-F238E27FC236}">
-                <a16:creationId xmlns:a16="http://schemas.microsoft.com/office/drawing/2014/main" id="{DE816C92-A272-4B72-A124-4096253DFAC9}"/>
+                <a16:creationId xmlns:a16="http://schemas.microsoft.com/office/drawing/2014/main" id="{F1AD6E34-D742-4670-AD95-949108CF3C3C}"/>
               </a:ext>
             </a:extLst>
           </p:cNvPr>
@@ -20657,7 +20657,7 @@
           <p:cNvPr id="5" name="">
             <a:extLst xmlns:a="http://schemas.openxmlformats.org/drawingml/2006/main">
               <a:ext uri="{FF2B5EF4-FFF2-40B4-BE49-F238E27FC236}">
-                <a16:creationId xmlns:a16="http://schemas.microsoft.com/office/drawing/2014/main" id="{C72AD167-2106-4F2F-9356-F6C8E32C0E0C}"/>
+                <a16:creationId xmlns:a16="http://schemas.microsoft.com/office/drawing/2014/main" id="{C39E593E-7D23-457A-8734-F8BAEF53A891}"/>
               </a:ext>
             </a:extLst>
           </p:cNvPr>
@@ -20689,7 +20689,7 @@
           <p:cNvPr id="6" name="node-session:8f21">
             <a:extLst xmlns:a="http://schemas.openxmlformats.org/drawingml/2006/main">
               <a:ext uri="{FF2B5EF4-FFF2-40B4-BE49-F238E27FC236}">
-                <a16:creationId xmlns:a16="http://schemas.microsoft.com/office/drawing/2014/main" id="{AE981977-EF25-4371-A357-A6117B306886}"/>
+                <a16:creationId xmlns:a16="http://schemas.microsoft.com/office/drawing/2014/main" id="{E2A01EC2-3AFC-47EB-86CF-8CF3CC5A6E13}"/>
               </a:ext>
             </a:extLst>
           </p:cNvPr>
@@ -20746,7 +20746,7 @@
           <p:cNvPr id="7" name="">
             <a:extLst xmlns:a="http://schemas.openxmlformats.org/drawingml/2006/main">
               <a:ext uri="{FF2B5EF4-FFF2-40B4-BE49-F238E27FC236}">
-                <a16:creationId xmlns:a16="http://schemas.microsoft.com/office/drawing/2014/main" id="{E859EDB8-7737-44D4-B073-9023F5EA49B7}"/>
+                <a16:creationId xmlns:a16="http://schemas.microsoft.com/office/drawing/2014/main" id="{1F5584C5-3D0A-4E72-8B43-F735AD0B47C7}"/>
               </a:ext>
             </a:extLst>
           </p:cNvPr>
@@ -20778,7 +20778,7 @@
           <p:cNvPr id="8" name="">
             <a:extLst xmlns:a="http://schemas.openxmlformats.org/drawingml/2006/main">
               <a:ext uri="{FF2B5EF4-FFF2-40B4-BE49-F238E27FC236}">
-                <a16:creationId xmlns:a16="http://schemas.microsoft.com/office/drawing/2014/main" id="{76B060F0-9185-4E85-989F-E4006C43F9A2}"/>
+                <a16:creationId xmlns:a16="http://schemas.microsoft.com/office/drawing/2014/main" id="{91894EF5-2483-4746-BF51-F7C9699EEBF5}"/>
               </a:ext>
             </a:extLst>
           </p:cNvPr>
@@ -20810,7 +20810,7 @@
           <p:cNvPr id="9" name="node-Stored session value">
             <a:extLst xmlns:a="http://schemas.openxmlformats.org/drawingml/2006/main">
               <a:ext uri="{FF2B5EF4-FFF2-40B4-BE49-F238E27FC236}">
-                <a16:creationId xmlns:a16="http://schemas.microsoft.com/office/drawing/2014/main" id="{E366FBF8-E408-4BFA-B66C-993F53ABB6F3}"/>
+                <a16:creationId xmlns:a16="http://schemas.microsoft.com/office/drawing/2014/main" id="{E54EEBF9-3490-4DCE-B891-62E4813EA039}"/>
               </a:ext>
             </a:extLst>
           </p:cNvPr>
@@ -20867,7 +20867,7 @@
           <p:cNvPr id="10" name="">
             <a:extLst xmlns:a="http://schemas.openxmlformats.org/drawingml/2006/main">
               <a:ext uri="{FF2B5EF4-FFF2-40B4-BE49-F238E27FC236}">
-                <a16:creationId xmlns:a16="http://schemas.microsoft.com/office/drawing/2014/main" id="{A6835BB5-85A2-4397-9E3F-CACCF23E44B1}"/>
+                <a16:creationId xmlns:a16="http://schemas.microsoft.com/office/drawing/2014/main" id="{1878D83A-8AF2-4602-80EE-7B55EC04E97F}"/>
               </a:ext>
             </a:extLst>
           </p:cNvPr>
@@ -20899,7 +20899,7 @@
           <p:cNvPr id="11" name="session-value">
             <a:extLst xmlns:a="http://schemas.openxmlformats.org/drawingml/2006/main">
               <a:ext uri="{FF2B5EF4-FFF2-40B4-BE49-F238E27FC236}">
-                <a16:creationId xmlns:a16="http://schemas.microsoft.com/office/drawing/2014/main" id="{334D873E-176F-46CF-9F20-CAAAE4793521}"/>
+                <a16:creationId xmlns:a16="http://schemas.microsoft.com/office/drawing/2014/main" id="{4CF53F40-394C-4E76-BA53-25B6CBE58B78}"/>
               </a:ext>
             </a:extLst>
           </p:cNvPr>
@@ -20979,7 +20979,7 @@
           <p:cNvPr id="12" name="key-direct">
             <a:extLst xmlns:a="http://schemas.openxmlformats.org/drawingml/2006/main">
               <a:ext uri="{FF2B5EF4-FFF2-40B4-BE49-F238E27FC236}">
-                <a16:creationId xmlns:a16="http://schemas.microsoft.com/office/drawing/2014/main" id="{A512A18F-7EE2-49DF-8A64-DA6B58EBA588}"/>
+                <a16:creationId xmlns:a16="http://schemas.microsoft.com/office/drawing/2014/main" id="{E500E90B-FD52-4C3E-B721-97B1420DF843}"/>
               </a:ext>
             </a:extLst>
           </p:cNvPr>
@@ -21064,7 +21064,7 @@
           <p:cNvPr id="13" name="key-cost">
             <a:extLst xmlns:a="http://schemas.openxmlformats.org/drawingml/2006/main">
               <a:ext uri="{FF2B5EF4-FFF2-40B4-BE49-F238E27FC236}">
-                <a16:creationId xmlns:a16="http://schemas.microsoft.com/office/drawing/2014/main" id="{FB7EE252-8901-4ABF-A938-F259D58A9F51}"/>
+                <a16:creationId xmlns:a16="http://schemas.microsoft.com/office/drawing/2014/main" id="{7BE09624-3442-43AD-9660-A467F0FD0FB5}"/>
               </a:ext>
             </a:extLst>
           </p:cNvPr>
@@ -21173,7 +21173,7 @@
           <p:cNvPr id="8" name="eyebrow">
             <a:extLst xmlns:a="http://schemas.openxmlformats.org/drawingml/2006/main">
               <a:ext uri="{FF2B5EF4-FFF2-40B4-BE49-F238E27FC236}">
-                <a16:creationId xmlns:a16="http://schemas.microsoft.com/office/drawing/2014/main" id="{80D2F0E2-C6F8-466A-937F-080D8B758B72}"/>
+                <a16:creationId xmlns:a16="http://schemas.microsoft.com/office/drawing/2014/main" id="{FD264B08-CF76-4A6E-BF2C-AEC014BD6C02}"/>
               </a:ext>
             </a:extLst>
           </p:cNvPr>
@@ -21230,7 +21230,7 @@
           <p:cNvPr id="2" name="slide-title">
             <a:extLst xmlns:a="http://schemas.openxmlformats.org/drawingml/2006/main">
               <a:ext uri="{FF2B5EF4-FFF2-40B4-BE49-F238E27FC236}">
-                <a16:creationId xmlns:a16="http://schemas.microsoft.com/office/drawing/2014/main" id="{0ADEC03B-14D9-4ADF-8201-3EB2B7E82497}"/>
+                <a16:creationId xmlns:a16="http://schemas.microsoft.com/office/drawing/2014/main" id="{BDB3BC3C-574C-4664-8C1E-32C31B805AB7}"/>
               </a:ext>
             </a:extLst>
           </p:cNvPr>
@@ -21287,7 +21287,7 @@
           <p:cNvPr id="3" name="">
             <a:extLst xmlns:a="http://schemas.openxmlformats.org/drawingml/2006/main">
               <a:ext uri="{FF2B5EF4-FFF2-40B4-BE49-F238E27FC236}">
-                <a16:creationId xmlns:a16="http://schemas.microsoft.com/office/drawing/2014/main" id="{7ECBAE82-EFE4-4A3E-85A4-CE7FDC5646E4}"/>
+                <a16:creationId xmlns:a16="http://schemas.microsoft.com/office/drawing/2014/main" id="{EDD73DB1-6CE4-49C1-A46C-369DCD37C3F4}"/>
               </a:ext>
             </a:extLst>
           </p:cNvPr>
@@ -21319,7 +21319,7 @@
           <p:cNvPr id="4" name="slide-number">
             <a:extLst xmlns:a="http://schemas.openxmlformats.org/drawingml/2006/main">
               <a:ext uri="{FF2B5EF4-FFF2-40B4-BE49-F238E27FC236}">
-                <a16:creationId xmlns:a16="http://schemas.microsoft.com/office/drawing/2014/main" id="{E9932564-DFE1-4A95-8B32-719C3EC9BDBB}"/>
+                <a16:creationId xmlns:a16="http://schemas.microsoft.com/office/drawing/2014/main" id="{24FAADB3-DA7A-4FE3-9F74-6688F3CE7F9C}"/>
               </a:ext>
             </a:extLst>
           </p:cNvPr>
@@ -21598,7 +21598,7 @@
           <p:cNvPr id="6" name="wide-query">
             <a:extLst xmlns:a="http://schemas.openxmlformats.org/drawingml/2006/main">
               <a:ext uri="{FF2B5EF4-FFF2-40B4-BE49-F238E27FC236}">
-                <a16:creationId xmlns:a16="http://schemas.microsoft.com/office/drawing/2014/main" id="{CAA1348D-34DC-4DE9-AE54-BD1A90FF0F24}"/>
+                <a16:creationId xmlns:a16="http://schemas.microsoft.com/office/drawing/2014/main" id="{6F6C0E3D-466E-4051-9F51-AC8B4E49CF44}"/>
               </a:ext>
             </a:extLst>
           </p:cNvPr>
@@ -21678,7 +21678,7 @@
           <p:cNvPr id="7" name="wide-limit">
             <a:extLst xmlns:a="http://schemas.openxmlformats.org/drawingml/2006/main">
               <a:ext uri="{FF2B5EF4-FFF2-40B4-BE49-F238E27FC236}">
-                <a16:creationId xmlns:a16="http://schemas.microsoft.com/office/drawing/2014/main" id="{059C2CF6-8094-4EF6-93C0-775E74764F12}"/>
+                <a16:creationId xmlns:a16="http://schemas.microsoft.com/office/drawing/2014/main" id="{7BBDE64C-2155-4846-9D10-B39FF2593D92}"/>
               </a:ext>
             </a:extLst>
           </p:cNvPr>
@@ -21764,7 +21764,7 @@
           <p:cNvPr id="9" name="eyebrow">
             <a:extLst xmlns:a="http://schemas.openxmlformats.org/drawingml/2006/main">
               <a:ext uri="{FF2B5EF4-FFF2-40B4-BE49-F238E27FC236}">
-                <a16:creationId xmlns:a16="http://schemas.microsoft.com/office/drawing/2014/main" id="{A616E1B3-EB6A-472E-86FE-73CE3F2CF829}"/>
+                <a16:creationId xmlns:a16="http://schemas.microsoft.com/office/drawing/2014/main" id="{6CE8AE91-0DC1-49E2-9027-164A290FB94C}"/>
               </a:ext>
             </a:extLst>
           </p:cNvPr>
@@ -21821,7 +21821,7 @@
           <p:cNvPr id="2" name="slide-title">
             <a:extLst xmlns:a="http://schemas.openxmlformats.org/drawingml/2006/main">
               <a:ext uri="{FF2B5EF4-FFF2-40B4-BE49-F238E27FC236}">
-                <a16:creationId xmlns:a16="http://schemas.microsoft.com/office/drawing/2014/main" id="{0976CD0C-105F-4BDA-8599-B07A1D0DF5E8}"/>
+                <a16:creationId xmlns:a16="http://schemas.microsoft.com/office/drawing/2014/main" id="{185B2398-37DE-49E6-A01B-05DABF6457FB}"/>
               </a:ext>
             </a:extLst>
           </p:cNvPr>
@@ -21878,7 +21878,7 @@
           <p:cNvPr id="3" name="">
             <a:extLst xmlns:a="http://schemas.openxmlformats.org/drawingml/2006/main">
               <a:ext uri="{FF2B5EF4-FFF2-40B4-BE49-F238E27FC236}">
-                <a16:creationId xmlns:a16="http://schemas.microsoft.com/office/drawing/2014/main" id="{A15E4A17-2A26-4067-A601-A0EF836CE4A9}"/>
+                <a16:creationId xmlns:a16="http://schemas.microsoft.com/office/drawing/2014/main" id="{07BBFCFC-6A3D-4D48-A604-F2EBDA75BE7B}"/>
               </a:ext>
             </a:extLst>
           </p:cNvPr>
@@ -21910,7 +21910,7 @@
           <p:cNvPr id="4" name="slide-number">
             <a:extLst xmlns:a="http://schemas.openxmlformats.org/drawingml/2006/main">
               <a:ext uri="{FF2B5EF4-FFF2-40B4-BE49-F238E27FC236}">
-                <a16:creationId xmlns:a16="http://schemas.microsoft.com/office/drawing/2014/main" id="{6079D499-F5D4-446B-9C58-9075C3009C03}"/>
+                <a16:creationId xmlns:a16="http://schemas.microsoft.com/office/drawing/2014/main" id="{EC546BF0-50D6-47B5-B241-67FBF0086FDC}"/>
               </a:ext>
             </a:extLst>
           </p:cNvPr>
@@ -21967,7 +21967,7 @@
           <p:cNvPr id="5" name="">
             <a:extLst xmlns:a="http://schemas.openxmlformats.org/drawingml/2006/main">
               <a:ext uri="{FF2B5EF4-FFF2-40B4-BE49-F238E27FC236}">
-                <a16:creationId xmlns:a16="http://schemas.microsoft.com/office/drawing/2014/main" id="{41B19C28-BF87-4BE2-9C97-45A85AA3167E}"/>
+                <a16:creationId xmlns:a16="http://schemas.microsoft.com/office/drawing/2014/main" id="{FD918758-3417-47AA-9983-B4C25C8581AA}"/>
               </a:ext>
             </a:extLst>
           </p:cNvPr>
@@ -21999,7 +21999,7 @@
           <p:cNvPr id="6" name="document-preview">
             <a:extLst xmlns:a="http://schemas.openxmlformats.org/drawingml/2006/main">
               <a:ext uri="{FF2B5EF4-FFF2-40B4-BE49-F238E27FC236}">
-                <a16:creationId xmlns:a16="http://schemas.microsoft.com/office/drawing/2014/main" id="{143A9FD8-8A06-4E0A-AF4B-EF4DA2C3583A}"/>
+                <a16:creationId xmlns:a16="http://schemas.microsoft.com/office/drawing/2014/main" id="{F7FD8E8E-5275-410A-A7C4-28413F6A8C32}"/>
               </a:ext>
             </a:extLst>
           </p:cNvPr>
@@ -22171,7 +22171,7 @@
           <p:cNvPr id="7" name="document-read">
             <a:extLst xmlns:a="http://schemas.openxmlformats.org/drawingml/2006/main">
               <a:ext uri="{FF2B5EF4-FFF2-40B4-BE49-F238E27FC236}">
-                <a16:creationId xmlns:a16="http://schemas.microsoft.com/office/drawing/2014/main" id="{8B0ED146-A3C4-4BB6-8EA6-B0DDFE1D9792}"/>
+                <a16:creationId xmlns:a16="http://schemas.microsoft.com/office/drawing/2014/main" id="{6282D7D8-7FD4-4C17-8BC0-DA256BB373FF}"/>
               </a:ext>
             </a:extLst>
           </p:cNvPr>
@@ -22251,7 +22251,7 @@
           <p:cNvPr id="8" name="document-contract">
             <a:extLst xmlns:a="http://schemas.openxmlformats.org/drawingml/2006/main">
               <a:ext uri="{FF2B5EF4-FFF2-40B4-BE49-F238E27FC236}">
-                <a16:creationId xmlns:a16="http://schemas.microsoft.com/office/drawing/2014/main" id="{3EB29509-7CB8-4214-8810-F5783BCC0F4D}"/>
+                <a16:creationId xmlns:a16="http://schemas.microsoft.com/office/drawing/2014/main" id="{9180080D-5C08-4E5E-B777-11AFBC06D60F}"/>
               </a:ext>
             </a:extLst>
           </p:cNvPr>
@@ -22360,7 +22360,7 @@
           <p:cNvPr id="19" name="eyebrow">
             <a:extLst xmlns:a="http://schemas.openxmlformats.org/drawingml/2006/main">
               <a:ext uri="{FF2B5EF4-FFF2-40B4-BE49-F238E27FC236}">
-                <a16:creationId xmlns:a16="http://schemas.microsoft.com/office/drawing/2014/main" id="{9A6EA902-BD67-49C0-9093-505B52F5992B}"/>
+                <a16:creationId xmlns:a16="http://schemas.microsoft.com/office/drawing/2014/main" id="{88159747-B527-4665-9678-239F0A3C54C4}"/>
               </a:ext>
             </a:extLst>
           </p:cNvPr>
@@ -22417,7 +22417,7 @@
           <p:cNvPr id="2" name="slide-title">
             <a:extLst xmlns:a="http://schemas.openxmlformats.org/drawingml/2006/main">
               <a:ext uri="{FF2B5EF4-FFF2-40B4-BE49-F238E27FC236}">
-                <a16:creationId xmlns:a16="http://schemas.microsoft.com/office/drawing/2014/main" id="{766B26C2-235E-4EEC-9389-7FB89DE3EAF1}"/>
+                <a16:creationId xmlns:a16="http://schemas.microsoft.com/office/drawing/2014/main" id="{CF710E4B-BA09-4334-AF5E-F02270371FB7}"/>
               </a:ext>
             </a:extLst>
           </p:cNvPr>
@@ -22474,7 +22474,7 @@
           <p:cNvPr id="3" name="">
             <a:extLst xmlns:a="http://schemas.openxmlformats.org/drawingml/2006/main">
               <a:ext uri="{FF2B5EF4-FFF2-40B4-BE49-F238E27FC236}">
-                <a16:creationId xmlns:a16="http://schemas.microsoft.com/office/drawing/2014/main" id="{5FF00AD2-1060-4A63-9364-4F31313E4C0C}"/>
+                <a16:creationId xmlns:a16="http://schemas.microsoft.com/office/drawing/2014/main" id="{21FC7543-624B-4980-8A36-3CFFCC09DD92}"/>
               </a:ext>
             </a:extLst>
           </p:cNvPr>
@@ -22506,7 +22506,7 @@
           <p:cNvPr id="4" name="slide-number">
             <a:extLst xmlns:a="http://schemas.openxmlformats.org/drawingml/2006/main">
               <a:ext uri="{FF2B5EF4-FFF2-40B4-BE49-F238E27FC236}">
-                <a16:creationId xmlns:a16="http://schemas.microsoft.com/office/drawing/2014/main" id="{BDF3E231-70B2-4AA3-A421-9B43076521E5}"/>
+                <a16:creationId xmlns:a16="http://schemas.microsoft.com/office/drawing/2014/main" id="{F7406D19-68DF-49AB-A69B-A45A68066D21}"/>
               </a:ext>
             </a:extLst>
           </p:cNvPr>
@@ -22563,7 +22563,7 @@
           <p:cNvPr id="5" name="">
             <a:extLst xmlns:a="http://schemas.openxmlformats.org/drawingml/2006/main">
               <a:ext uri="{FF2B5EF4-FFF2-40B4-BE49-F238E27FC236}">
-                <a16:creationId xmlns:a16="http://schemas.microsoft.com/office/drawing/2014/main" id="{74A7B3D4-7A94-4A4E-8057-7816A0E21975}"/>
+                <a16:creationId xmlns:a16="http://schemas.microsoft.com/office/drawing/2014/main" id="{F21BC977-E4FC-4931-A72A-9A2691C61BD0}"/>
               </a:ext>
             </a:extLst>
           </p:cNvPr>
@@ -22595,7 +22595,7 @@
           <p:cNvPr id="6" name="node-Portal">
             <a:extLst xmlns:a="http://schemas.openxmlformats.org/drawingml/2006/main">
               <a:ext uri="{FF2B5EF4-FFF2-40B4-BE49-F238E27FC236}">
-                <a16:creationId xmlns:a16="http://schemas.microsoft.com/office/drawing/2014/main" id="{13DBE9EF-B9D6-40FD-B226-FD9DCD898F1B}"/>
+                <a16:creationId xmlns:a16="http://schemas.microsoft.com/office/drawing/2014/main" id="{C1E262E6-0239-47EB-AC3D-5CD6F3CDF701}"/>
               </a:ext>
             </a:extLst>
           </p:cNvPr>
@@ -22652,7 +22652,7 @@
           <p:cNvPr id="7" name="">
             <a:extLst xmlns:a="http://schemas.openxmlformats.org/drawingml/2006/main">
               <a:ext uri="{FF2B5EF4-FFF2-40B4-BE49-F238E27FC236}">
-                <a16:creationId xmlns:a16="http://schemas.microsoft.com/office/drawing/2014/main" id="{B275CAD5-04E3-4704-831E-DBE1523F4F97}"/>
+                <a16:creationId xmlns:a16="http://schemas.microsoft.com/office/drawing/2014/main" id="{5C9EAEBD-2C5C-45FD-A445-7270E26AFB18}"/>
               </a:ext>
             </a:extLst>
           </p:cNvPr>
@@ -22684,7 +22684,7 @@
           <p:cNvPr id="8" name="">
             <a:extLst xmlns:a="http://schemas.openxmlformats.org/drawingml/2006/main">
               <a:ext uri="{FF2B5EF4-FFF2-40B4-BE49-F238E27FC236}">
-                <a16:creationId xmlns:a16="http://schemas.microsoft.com/office/drawing/2014/main" id="{A0DE2659-43F1-4644-A3F0-83BAFF8761AF}"/>
+                <a16:creationId xmlns:a16="http://schemas.microsoft.com/office/drawing/2014/main" id="{6BF075F9-62A0-4CC3-A23F-036B499D03ED}"/>
               </a:ext>
             </a:extLst>
           </p:cNvPr>
@@ -22716,7 +22716,7 @@
           <p:cNvPr id="9" name="node-Identity">
             <a:extLst xmlns:a="http://schemas.openxmlformats.org/drawingml/2006/main">
               <a:ext uri="{FF2B5EF4-FFF2-40B4-BE49-F238E27FC236}">
-                <a16:creationId xmlns:a16="http://schemas.microsoft.com/office/drawing/2014/main" id="{0340CF72-60D7-4159-9832-8F1689D69701}"/>
+                <a16:creationId xmlns:a16="http://schemas.microsoft.com/office/drawing/2014/main" id="{42F64EA8-CC21-43B7-A28A-EBDCAB407DDF}"/>
               </a:ext>
             </a:extLst>
           </p:cNvPr>
@@ -22773,7 +22773,7 @@
           <p:cNvPr id="10" name="">
             <a:extLst xmlns:a="http://schemas.openxmlformats.org/drawingml/2006/main">
               <a:ext uri="{FF2B5EF4-FFF2-40B4-BE49-F238E27FC236}">
-                <a16:creationId xmlns:a16="http://schemas.microsoft.com/office/drawing/2014/main" id="{9191FC43-95D8-4E94-A0C1-DB6C7965BD28}"/>
+                <a16:creationId xmlns:a16="http://schemas.microsoft.com/office/drawing/2014/main" id="{59496A17-C84F-470B-B638-18067C8DB974}"/>
               </a:ext>
             </a:extLst>
           </p:cNvPr>
@@ -22805,7 +22805,7 @@
           <p:cNvPr id="11" name="">
             <a:extLst xmlns:a="http://schemas.openxmlformats.org/drawingml/2006/main">
               <a:ext uri="{FF2B5EF4-FFF2-40B4-BE49-F238E27FC236}">
-                <a16:creationId xmlns:a16="http://schemas.microsoft.com/office/drawing/2014/main" id="{620DC3D0-EC6B-4A37-A0C2-97F03FC8ACC8}"/>
+                <a16:creationId xmlns:a16="http://schemas.microsoft.com/office/drawing/2014/main" id="{80724D64-A7A4-4F3B-9120-10F4AA57036A}"/>
               </a:ext>
             </a:extLst>
           </p:cNvPr>
@@ -22837,7 +22837,7 @@
           <p:cNvPr id="12" name="">
             <a:extLst xmlns:a="http://schemas.openxmlformats.org/drawingml/2006/main">
               <a:ext uri="{FF2B5EF4-FFF2-40B4-BE49-F238E27FC236}">
-                <a16:creationId xmlns:a16="http://schemas.microsoft.com/office/drawing/2014/main" id="{456139E2-C282-41FD-8AFF-345E3BA3E70A}"/>
+                <a16:creationId xmlns:a16="http://schemas.microsoft.com/office/drawing/2014/main" id="{320D954F-F33D-4C52-B561-06B7D73F943B}"/>
               </a:ext>
             </a:extLst>
           </p:cNvPr>
@@ -22869,7 +22869,7 @@
           <p:cNvPr id="13" name="node-API">
             <a:extLst xmlns:a="http://schemas.openxmlformats.org/drawingml/2006/main">
               <a:ext uri="{FF2B5EF4-FFF2-40B4-BE49-F238E27FC236}">
-                <a16:creationId xmlns:a16="http://schemas.microsoft.com/office/drawing/2014/main" id="{917BAF2F-DF5F-4714-9079-55C3ACF7740F}"/>
+                <a16:creationId xmlns:a16="http://schemas.microsoft.com/office/drawing/2014/main" id="{270F966D-A36D-4FF9-BD35-146F1AB976B7}"/>
               </a:ext>
             </a:extLst>
           </p:cNvPr>
@@ -22926,7 +22926,7 @@
           <p:cNvPr id="14" name="">
             <a:extLst xmlns:a="http://schemas.openxmlformats.org/drawingml/2006/main">
               <a:ext uri="{FF2B5EF4-FFF2-40B4-BE49-F238E27FC236}">
-                <a16:creationId xmlns:a16="http://schemas.microsoft.com/office/drawing/2014/main" id="{68DA86AC-E5A0-4808-8D76-91369507544D}"/>
+                <a16:creationId xmlns:a16="http://schemas.microsoft.com/office/drawing/2014/main" id="{0AA530DC-5D90-4613-8CF5-58A0110B4029}"/>
               </a:ext>
             </a:extLst>
           </p:cNvPr>
@@ -22958,7 +22958,7 @@
           <p:cNvPr id="15" name="">
             <a:extLst xmlns:a="http://schemas.openxmlformats.org/drawingml/2006/main">
               <a:ext uri="{FF2B5EF4-FFF2-40B4-BE49-F238E27FC236}">
-                <a16:creationId xmlns:a16="http://schemas.microsoft.com/office/drawing/2014/main" id="{7107A883-C8F7-49BB-AD6C-555390B82EF6}"/>
+                <a16:creationId xmlns:a16="http://schemas.microsoft.com/office/drawing/2014/main" id="{31311C72-8810-4CE9-9FC8-B9647F5AB0C3}"/>
               </a:ext>
             </a:extLst>
           </p:cNvPr>
@@ -22990,7 +22990,7 @@
           <p:cNvPr id="16" name="node-Database">
             <a:extLst xmlns:a="http://schemas.openxmlformats.org/drawingml/2006/main">
               <a:ext uri="{FF2B5EF4-FFF2-40B4-BE49-F238E27FC236}">
-                <a16:creationId xmlns:a16="http://schemas.microsoft.com/office/drawing/2014/main" id="{05C5DCB9-082E-4527-A1DF-A23AEC831102}"/>
+                <a16:creationId xmlns:a16="http://schemas.microsoft.com/office/drawing/2014/main" id="{8C6A97CD-AA9E-41D0-AE82-EF9FD6761BF0}"/>
               </a:ext>
             </a:extLst>
           </p:cNvPr>
@@ -23047,7 +23047,7 @@
           <p:cNvPr id="17" name="graph-definition">
             <a:extLst xmlns:a="http://schemas.openxmlformats.org/drawingml/2006/main">
               <a:ext uri="{FF2B5EF4-FFF2-40B4-BE49-F238E27FC236}">
-                <a16:creationId xmlns:a16="http://schemas.microsoft.com/office/drawing/2014/main" id="{AC3D40CA-C062-4840-A139-874D932474C9}"/>
+                <a16:creationId xmlns:a16="http://schemas.microsoft.com/office/drawing/2014/main" id="{C69D5935-509D-4DB3-B68D-48C0F093A961}"/>
               </a:ext>
             </a:extLst>
           </p:cNvPr>
@@ -23150,7 +23150,7 @@
           <p:cNvPr id="18" name="graph-meaning">
             <a:extLst xmlns:a="http://schemas.openxmlformats.org/drawingml/2006/main">
               <a:ext uri="{FF2B5EF4-FFF2-40B4-BE49-F238E27FC236}">
-                <a16:creationId xmlns:a16="http://schemas.microsoft.com/office/drawing/2014/main" id="{13F8ACFA-12F2-414E-887D-7A52E330DFBB}"/>
+                <a16:creationId xmlns:a16="http://schemas.microsoft.com/office/drawing/2014/main" id="{EF31D927-2728-463C-BC1C-A2A5F4463D4A}"/>
               </a:ext>
             </a:extLst>
           </p:cNvPr>
@@ -23259,7 +23259,7 @@
           <p:cNvPr id="8" name="eyebrow">
             <a:extLst xmlns:a="http://schemas.openxmlformats.org/drawingml/2006/main">
               <a:ext uri="{FF2B5EF4-FFF2-40B4-BE49-F238E27FC236}">
-                <a16:creationId xmlns:a16="http://schemas.microsoft.com/office/drawing/2014/main" id="{65C4630B-3457-48BF-8B78-F9C42EBD0DB4}"/>
+                <a16:creationId xmlns:a16="http://schemas.microsoft.com/office/drawing/2014/main" id="{1468EFBC-195F-4F3A-A2CA-4201BFDA3677}"/>
               </a:ext>
             </a:extLst>
           </p:cNvPr>
@@ -23316,7 +23316,7 @@
           <p:cNvPr id="2" name="slide-title">
             <a:extLst xmlns:a="http://schemas.openxmlformats.org/drawingml/2006/main">
               <a:ext uri="{FF2B5EF4-FFF2-40B4-BE49-F238E27FC236}">
-                <a16:creationId xmlns:a16="http://schemas.microsoft.com/office/drawing/2014/main" id="{B8550C47-EC62-481F-BBC9-22C2CE987C7B}"/>
+                <a16:creationId xmlns:a16="http://schemas.microsoft.com/office/drawing/2014/main" id="{1CCC1040-7245-475D-AFC1-DE01B7672313}"/>
               </a:ext>
             </a:extLst>
           </p:cNvPr>
@@ -23373,7 +23373,7 @@
           <p:cNvPr id="3" name="">
             <a:extLst xmlns:a="http://schemas.openxmlformats.org/drawingml/2006/main">
               <a:ext uri="{FF2B5EF4-FFF2-40B4-BE49-F238E27FC236}">
-                <a16:creationId xmlns:a16="http://schemas.microsoft.com/office/drawing/2014/main" id="{FC489EC2-C3BF-4319-9023-792A9454C8FE}"/>
+                <a16:creationId xmlns:a16="http://schemas.microsoft.com/office/drawing/2014/main" id="{41B21728-AF1A-47B8-807A-8A958053FC5B}"/>
               </a:ext>
             </a:extLst>
           </p:cNvPr>
@@ -23405,7 +23405,7 @@
           <p:cNvPr id="4" name="slide-number">
             <a:extLst xmlns:a="http://schemas.openxmlformats.org/drawingml/2006/main">
               <a:ext uri="{FF2B5EF4-FFF2-40B4-BE49-F238E27FC236}">
-                <a16:creationId xmlns:a16="http://schemas.microsoft.com/office/drawing/2014/main" id="{D1CE92FA-AFA8-40E7-9AC2-D03210BDCADF}"/>
+                <a16:creationId xmlns:a16="http://schemas.microsoft.com/office/drawing/2014/main" id="{44BB07EA-B9B9-401A-8B73-E8BE36573887}"/>
               </a:ext>
             </a:extLst>
           </p:cNvPr>
@@ -23684,7 +23684,7 @@
           <p:cNvPr id="6" name="bfs-rule">
             <a:extLst xmlns:a="http://schemas.openxmlformats.org/drawingml/2006/main">
               <a:ext uri="{FF2B5EF4-FFF2-40B4-BE49-F238E27FC236}">
-                <a16:creationId xmlns:a16="http://schemas.microsoft.com/office/drawing/2014/main" id="{3FAFE9F7-CAB2-458B-B544-BFFB27BD0240}"/>
+                <a16:creationId xmlns:a16="http://schemas.microsoft.com/office/drawing/2014/main" id="{77A380D1-AF3F-45ED-A0AF-F821CA71A2EC}"/>
               </a:ext>
             </a:extLst>
           </p:cNvPr>
@@ -23764,7 +23764,7 @@
           <p:cNvPr id="7" name="graph-limit">
             <a:extLst xmlns:a="http://schemas.openxmlformats.org/drawingml/2006/main">
               <a:ext uri="{FF2B5EF4-FFF2-40B4-BE49-F238E27FC236}">
-                <a16:creationId xmlns:a16="http://schemas.microsoft.com/office/drawing/2014/main" id="{DE1C3CEE-B138-468D-9E63-D1EE9EDC8700}"/>
+                <a16:creationId xmlns:a16="http://schemas.microsoft.com/office/drawing/2014/main" id="{6AE66345-79B3-4126-8269-07C722D364A4}"/>
               </a:ext>
             </a:extLst>
           </p:cNvPr>
